--- a/gcse-slides/ocr-biology/OCR21C_B5.2_NervousSystem_Combined.pptx
+++ b/gcse-slides/ocr-biology/OCR21C_B5.2_NervousSystem_Combined.pptx
@@ -8214,68 +8214,6 @@
         </p:nvSpPr>
         <p:spPr>
           <a:xfrm>
-            <a:off x="2240280" y="2798064"/>
-            <a:ext cx="91" cy="603504"/>
-          </a:xfrm>
-          <a:prstGeom prst="line">
-            <a:avLst/>
-          </a:prstGeom>
-          <a:noFill/>
-          <a:ln w="9525">
-            <a:solidFill>
-              <a:srgbClr val="C9A88A"/>
-            </a:solidFill>
-            <a:prstDash val="dash"/>
-          </a:ln>
-        </p:spPr>
-      </p:sp>
-      <p:sp>
-        <p:nvSpPr>
-          <p:cNvPr id="13" name="Text 11"/>
-          <p:cNvSpPr/>
-          <p:nvPr/>
-        </p:nvSpPr>
-        <p:spPr>
-          <a:xfrm>
-            <a:off x="1965960" y="3493008"/>
-            <a:ext cx="548640" cy="256032"/>
-          </a:xfrm>
-          <a:prstGeom prst="rect">
-            <a:avLst/>
-          </a:prstGeom>
-          <a:noFill/>
-          <a:ln/>
-        </p:spPr>
-        <p:txBody>
-          <a:bodyPr wrap="square" lIns="0" tIns="0" rIns="0" bIns="0" rtlCol="0" anchor="ctr"/>
-          <a:lstStyle/>
-          <a:p>
-            <a:pPr algn="ctr" indent="0" marL="0">
-              <a:buNone/>
-            </a:pPr>
-            <a:r>
-              <a:rPr lang="en-US" sz="1000" dirty="0">
-                <a:solidFill>
-                  <a:srgbClr val="6B7385"/>
-                </a:solidFill>
-                <a:latin typeface="Calibri" pitchFamily="34" charset="0"/>
-                <a:ea typeface="Calibri" pitchFamily="34" charset="-122"/>
-                <a:cs typeface="Calibri" pitchFamily="34" charset="-120"/>
-              </a:rPr>
-              <a:t>elbow</a:t>
-            </a:r>
-            <a:endParaRPr lang="en-US" sz="1000" dirty="0"/>
-          </a:p>
-        </p:txBody>
-      </p:sp>
-      <p:sp>
-        <p:nvSpPr>
-          <p:cNvPr id="14" name="Shape 12"/>
-          <p:cNvSpPr/>
-          <p:nvPr/>
-        </p:nvSpPr>
-        <p:spPr>
-          <a:xfrm>
             <a:off x="603504" y="3840480"/>
             <a:ext cx="164592" cy="502920"/>
           </a:xfrm>
@@ -8295,7 +8233,7 @@
       </p:sp>
       <p:sp>
         <p:nvSpPr>
-          <p:cNvPr id="15" name="Shape 13"/>
+          <p:cNvPr id="13" name="Shape 11"/>
           <p:cNvSpPr/>
           <p:nvPr/>
         </p:nvSpPr>
@@ -8320,7 +8258,7 @@
       </p:sp>
       <p:sp>
         <p:nvSpPr>
-          <p:cNvPr id="16" name="Shape 14"/>
+          <p:cNvPr id="14" name="Shape 12"/>
           <p:cNvSpPr/>
           <p:nvPr/>
         </p:nvSpPr>
@@ -8340,7 +8278,7 @@
       </p:sp>
       <p:sp>
         <p:nvSpPr>
-          <p:cNvPr id="17" name="Text 15"/>
+          <p:cNvPr id="15" name="Text 13"/>
           <p:cNvSpPr/>
           <p:nvPr/>
         </p:nvSpPr>
@@ -8390,7 +8328,7 @@
       </p:sp>
       <p:sp>
         <p:nvSpPr>
-          <p:cNvPr id="18" name="Shape 16"/>
+          <p:cNvPr id="16" name="Shape 14"/>
           <p:cNvSpPr/>
           <p:nvPr/>
         </p:nvSpPr>
@@ -8415,7 +8353,7 @@
       </p:sp>
       <p:sp>
         <p:nvSpPr>
-          <p:cNvPr id="19" name="Shape 17"/>
+          <p:cNvPr id="17" name="Shape 15"/>
           <p:cNvSpPr/>
           <p:nvPr/>
         </p:nvSpPr>
@@ -8440,7 +8378,7 @@
       </p:sp>
       <p:sp>
         <p:nvSpPr>
-          <p:cNvPr id="20" name="Shape 18"/>
+          <p:cNvPr id="18" name="Shape 16"/>
           <p:cNvSpPr/>
           <p:nvPr/>
         </p:nvSpPr>
@@ -8465,7 +8403,7 @@
       </p:sp>
       <p:sp>
         <p:nvSpPr>
-          <p:cNvPr id="21" name="Shape 19"/>
+          <p:cNvPr id="19" name="Shape 17"/>
           <p:cNvSpPr/>
           <p:nvPr/>
         </p:nvSpPr>
@@ -8490,7 +8428,7 @@
       </p:sp>
       <p:sp>
         <p:nvSpPr>
-          <p:cNvPr id="22" name="Shape 20"/>
+          <p:cNvPr id="20" name="Shape 18"/>
           <p:cNvSpPr/>
           <p:nvPr/>
         </p:nvSpPr>
@@ -8515,7 +8453,7 @@
       </p:sp>
       <p:sp>
         <p:nvSpPr>
-          <p:cNvPr id="23" name="Shape 21"/>
+          <p:cNvPr id="21" name="Shape 19"/>
           <p:cNvSpPr/>
           <p:nvPr/>
         </p:nvSpPr>
@@ -8540,7 +8478,7 @@
       </p:sp>
       <p:sp>
         <p:nvSpPr>
-          <p:cNvPr id="24" name="Shape 22"/>
+          <p:cNvPr id="22" name="Shape 20"/>
           <p:cNvSpPr/>
           <p:nvPr/>
         </p:nvSpPr>
@@ -8560,7 +8498,7 @@
       </p:sp>
       <p:sp>
         <p:nvSpPr>
-          <p:cNvPr id="25" name="Shape 23"/>
+          <p:cNvPr id="23" name="Shape 21"/>
           <p:cNvSpPr/>
           <p:nvPr/>
         </p:nvSpPr>
@@ -8585,7 +8523,7 @@
       </p:sp>
       <p:sp>
         <p:nvSpPr>
-          <p:cNvPr id="26" name="Shape 24"/>
+          <p:cNvPr id="24" name="Shape 22"/>
           <p:cNvSpPr/>
           <p:nvPr/>
         </p:nvSpPr>
@@ -8610,7 +8548,7 @@
       </p:sp>
       <p:sp>
         <p:nvSpPr>
-          <p:cNvPr id="27" name="Shape 25"/>
+          <p:cNvPr id="25" name="Shape 23"/>
           <p:cNvSpPr/>
           <p:nvPr/>
         </p:nvSpPr>
@@ -8633,7 +8571,7 @@
       </p:sp>
       <p:sp>
         <p:nvSpPr>
-          <p:cNvPr id="28" name="Shape 26"/>
+          <p:cNvPr id="26" name="Shape 24"/>
           <p:cNvSpPr/>
           <p:nvPr/>
         </p:nvSpPr>
@@ -8656,7 +8594,7 @@
       </p:sp>
       <p:sp>
         <p:nvSpPr>
-          <p:cNvPr id="29" name="Shape 27"/>
+          <p:cNvPr id="27" name="Shape 25"/>
           <p:cNvSpPr/>
           <p:nvPr/>
         </p:nvSpPr>
@@ -8679,7 +8617,7 @@
       </p:sp>
       <p:sp>
         <p:nvSpPr>
-          <p:cNvPr id="30" name="Shape 28"/>
+          <p:cNvPr id="28" name="Shape 26"/>
           <p:cNvSpPr/>
           <p:nvPr/>
         </p:nvSpPr>
@@ -8702,7 +8640,7 @@
       </p:sp>
       <p:sp>
         <p:nvSpPr>
-          <p:cNvPr id="31" name="Shape 29"/>
+          <p:cNvPr id="29" name="Shape 27"/>
           <p:cNvSpPr/>
           <p:nvPr/>
         </p:nvSpPr>
@@ -8725,7 +8663,7 @@
       </p:sp>
       <p:sp>
         <p:nvSpPr>
-          <p:cNvPr id="32" name="Shape 30"/>
+          <p:cNvPr id="30" name="Shape 28"/>
           <p:cNvSpPr/>
           <p:nvPr/>
         </p:nvSpPr>
@@ -8750,7 +8688,7 @@
       </p:sp>
       <p:sp>
         <p:nvSpPr>
-          <p:cNvPr id="33" name="Shape 31"/>
+          <p:cNvPr id="31" name="Shape 29"/>
           <p:cNvSpPr/>
           <p:nvPr/>
         </p:nvSpPr>
@@ -8775,7 +8713,7 @@
       </p:sp>
       <p:sp>
         <p:nvSpPr>
-          <p:cNvPr id="34" name="Shape 32"/>
+          <p:cNvPr id="32" name="Shape 30"/>
           <p:cNvSpPr/>
           <p:nvPr/>
         </p:nvSpPr>
@@ -8799,7 +8737,7 @@
       </p:sp>
       <p:sp>
         <p:nvSpPr>
-          <p:cNvPr id="35" name="Shape 33"/>
+          <p:cNvPr id="33" name="Shape 31"/>
           <p:cNvSpPr/>
           <p:nvPr/>
         </p:nvSpPr>
@@ -8822,7 +8760,7 @@
       </p:sp>
       <p:sp>
         <p:nvSpPr>
-          <p:cNvPr id="36" name="Shape 34"/>
+          <p:cNvPr id="34" name="Shape 32"/>
           <p:cNvSpPr/>
           <p:nvPr/>
         </p:nvSpPr>
@@ -8845,7 +8783,7 @@
       </p:sp>
       <p:sp>
         <p:nvSpPr>
-          <p:cNvPr id="37" name="Shape 35"/>
+          <p:cNvPr id="35" name="Shape 33"/>
           <p:cNvSpPr/>
           <p:nvPr/>
         </p:nvSpPr>
@@ -8870,7 +8808,7 @@
       </p:sp>
       <p:sp>
         <p:nvSpPr>
-          <p:cNvPr id="38" name="Shape 36"/>
+          <p:cNvPr id="36" name="Shape 34"/>
           <p:cNvSpPr/>
           <p:nvPr/>
         </p:nvSpPr>
@@ -8892,35 +8830,58 @@
       </p:sp>
       <p:sp>
         <p:nvSpPr>
+          <p:cNvPr id="37" name="Shape 35"/>
+          <p:cNvSpPr/>
+          <p:nvPr/>
+        </p:nvSpPr>
+        <p:spPr>
+          <a:xfrm>
+            <a:off x="5276088" y="3172968"/>
+            <a:ext cx="164592" cy="164592"/>
+          </a:xfrm>
+          <a:prstGeom prst="ellipse">
+            <a:avLst/>
+          </a:prstGeom>
+          <a:ln w="12700">
+            <a:solidFill>
+              <a:srgbClr val="133536"/>
+            </a:solidFill>
+            <a:prstDash val="dash"/>
+          </a:ln>
+        </p:spPr>
+      </p:sp>
+      <p:sp>
+        <p:nvSpPr>
+          <p:cNvPr id="38" name="Shape 36"/>
+          <p:cNvSpPr/>
+          <p:nvPr/>
+        </p:nvSpPr>
+        <p:spPr>
+          <a:xfrm flipH="1">
+            <a:off x="5303520" y="3291840"/>
+            <a:ext cx="64008" cy="128016"/>
+          </a:xfrm>
+          <a:prstGeom prst="line">
+            <a:avLst/>
+          </a:prstGeom>
+          <a:noFill/>
+          <a:ln w="25400">
+            <a:solidFill>
+              <a:srgbClr val="C8414C"/>
+            </a:solidFill>
+            <a:prstDash val="solid"/>
+          </a:ln>
+        </p:spPr>
+      </p:sp>
+      <p:sp>
+        <p:nvSpPr>
           <p:cNvPr id="39" name="Shape 37"/>
           <p:cNvSpPr/>
           <p:nvPr/>
         </p:nvSpPr>
         <p:spPr>
           <a:xfrm>
-            <a:off x="5248656" y="3154680"/>
-            <a:ext cx="182880" cy="182880"/>
-          </a:xfrm>
-          <a:prstGeom prst="ellipse">
-            <a:avLst/>
-          </a:prstGeom>
-          <a:ln w="12700">
-            <a:solidFill>
-              <a:srgbClr val="133536"/>
-            </a:solidFill>
-            <a:prstDash val="dash"/>
-          </a:ln>
-        </p:spPr>
-      </p:sp>
-      <p:sp>
-        <p:nvSpPr>
-          <p:cNvPr id="40" name="Shape 38"/>
-          <p:cNvSpPr/>
-          <p:nvPr/>
-        </p:nvSpPr>
-        <p:spPr>
-          <a:xfrm>
-            <a:off x="5193792" y="3218688"/>
+            <a:off x="5193792" y="3364992"/>
             <a:ext cx="182880" cy="182880"/>
           </a:xfrm>
           <a:prstGeom prst="ellipse">
@@ -8939,13 +8900,13 @@
       </p:sp>
       <p:sp>
         <p:nvSpPr>
-          <p:cNvPr id="41" name="Shape 39"/>
-          <p:cNvSpPr/>
-          <p:nvPr/>
-        </p:nvSpPr>
-        <p:spPr>
-          <a:xfrm>
-            <a:off x="5248656" y="3273552"/>
+          <p:cNvPr id="40" name="Shape 38"/>
+          <p:cNvSpPr/>
+          <p:nvPr/>
+        </p:nvSpPr>
+        <p:spPr>
+          <a:xfrm>
+            <a:off x="5248656" y="3419856"/>
             <a:ext cx="73152" cy="73152"/>
           </a:xfrm>
           <a:prstGeom prst="ellipse">
@@ -8964,30 +8925,30 @@
       </p:sp>
       <p:sp>
         <p:nvSpPr>
+          <p:cNvPr id="41" name="Shape 39"/>
+          <p:cNvSpPr/>
+          <p:nvPr/>
+        </p:nvSpPr>
+        <p:spPr>
+          <a:xfrm flipH="1">
+            <a:off x="4754880" y="3493008"/>
+            <a:ext cx="448056" cy="118872"/>
+          </a:xfrm>
+          <a:prstGeom prst="line">
+            <a:avLst/>
+          </a:prstGeom>
+          <a:noFill/>
+          <a:ln w="28575">
+            <a:solidFill>
+              <a:srgbClr val="C8414C"/>
+            </a:solidFill>
+            <a:prstDash val="solid"/>
+          </a:ln>
+        </p:spPr>
+      </p:sp>
+      <p:sp>
+        <p:nvSpPr>
           <p:cNvPr id="42" name="Shape 40"/>
-          <p:cNvSpPr/>
-          <p:nvPr/>
-        </p:nvSpPr>
-        <p:spPr>
-          <a:xfrm flipH="1">
-            <a:off x="4754880" y="3364992"/>
-            <a:ext cx="457200" cy="246888"/>
-          </a:xfrm>
-          <a:prstGeom prst="line">
-            <a:avLst/>
-          </a:prstGeom>
-          <a:noFill/>
-          <a:ln w="28575">
-            <a:solidFill>
-              <a:srgbClr val="C8414C"/>
-            </a:solidFill>
-            <a:prstDash val="solid"/>
-          </a:ln>
-        </p:spPr>
-      </p:sp>
-      <p:sp>
-        <p:nvSpPr>
-          <p:cNvPr id="43" name="Shape 41"/>
           <p:cNvSpPr/>
           <p:nvPr/>
         </p:nvSpPr>
@@ -9010,7 +8971,7 @@
       </p:sp>
       <p:sp>
         <p:nvSpPr>
-          <p:cNvPr id="44" name="Shape 42"/>
+          <p:cNvPr id="43" name="Shape 41"/>
           <p:cNvSpPr/>
           <p:nvPr/>
         </p:nvSpPr>
@@ -9033,7 +8994,7 @@
       </p:sp>
       <p:sp>
         <p:nvSpPr>
-          <p:cNvPr id="45" name="Shape 43"/>
+          <p:cNvPr id="44" name="Shape 42"/>
           <p:cNvSpPr/>
           <p:nvPr/>
         </p:nvSpPr>
@@ -9056,7 +9017,7 @@
       </p:sp>
       <p:sp>
         <p:nvSpPr>
-          <p:cNvPr id="46" name="Shape 44"/>
+          <p:cNvPr id="45" name="Shape 43"/>
           <p:cNvSpPr/>
           <p:nvPr/>
         </p:nvSpPr>
@@ -9081,7 +9042,7 @@
       </p:sp>
       <p:sp>
         <p:nvSpPr>
-          <p:cNvPr id="47" name="Shape 45"/>
+          <p:cNvPr id="46" name="Shape 44"/>
           <p:cNvSpPr/>
           <p:nvPr/>
         </p:nvSpPr>
@@ -9104,7 +9065,7 @@
       </p:sp>
       <p:sp>
         <p:nvSpPr>
-          <p:cNvPr id="48" name="Shape 46"/>
+          <p:cNvPr id="47" name="Shape 45"/>
           <p:cNvSpPr/>
           <p:nvPr/>
         </p:nvSpPr>
@@ -9129,7 +9090,7 @@
       </p:sp>
       <p:sp>
         <p:nvSpPr>
-          <p:cNvPr id="49" name="Shape 47"/>
+          <p:cNvPr id="48" name="Shape 46"/>
           <p:cNvSpPr/>
           <p:nvPr/>
         </p:nvSpPr>
@@ -9152,7 +9113,7 @@
       </p:sp>
       <p:sp>
         <p:nvSpPr>
-          <p:cNvPr id="50" name="Shape 48"/>
+          <p:cNvPr id="49" name="Shape 47"/>
           <p:cNvSpPr/>
           <p:nvPr/>
         </p:nvSpPr>
@@ -9177,7 +9138,7 @@
       </p:sp>
       <p:sp>
         <p:nvSpPr>
-          <p:cNvPr id="51" name="Shape 49"/>
+          <p:cNvPr id="50" name="Shape 48"/>
           <p:cNvSpPr/>
           <p:nvPr/>
         </p:nvSpPr>
@@ -9200,7 +9161,7 @@
       </p:sp>
       <p:sp>
         <p:nvSpPr>
-          <p:cNvPr id="52" name="Shape 50"/>
+          <p:cNvPr id="51" name="Shape 49"/>
           <p:cNvSpPr/>
           <p:nvPr/>
         </p:nvSpPr>
@@ -9225,7 +9186,7 @@
       </p:sp>
       <p:sp>
         <p:nvSpPr>
-          <p:cNvPr id="53" name="Shape 51"/>
+          <p:cNvPr id="52" name="Shape 50"/>
           <p:cNvSpPr/>
           <p:nvPr/>
         </p:nvSpPr>
@@ -9249,7 +9210,7 @@
       </p:sp>
       <p:sp>
         <p:nvSpPr>
-          <p:cNvPr id="54" name="Text 52"/>
+          <p:cNvPr id="53" name="Text 51"/>
           <p:cNvSpPr/>
           <p:nvPr/>
         </p:nvSpPr>
@@ -9299,7 +9260,7 @@
       </p:sp>
       <p:sp>
         <p:nvSpPr>
-          <p:cNvPr id="55" name="Shape 53"/>
+          <p:cNvPr id="54" name="Shape 52"/>
           <p:cNvSpPr/>
           <p:nvPr/>
         </p:nvSpPr>
@@ -9322,7 +9283,7 @@
       </p:sp>
       <p:sp>
         <p:nvSpPr>
-          <p:cNvPr id="56" name="Text 54"/>
+          <p:cNvPr id="55" name="Text 53"/>
           <p:cNvSpPr/>
           <p:nvPr/>
         </p:nvSpPr>
@@ -9361,7 +9322,7 @@
       </p:sp>
       <p:sp>
         <p:nvSpPr>
-          <p:cNvPr id="57" name="Shape 55"/>
+          <p:cNvPr id="56" name="Shape 54"/>
           <p:cNvSpPr/>
           <p:nvPr/>
         </p:nvSpPr>
@@ -9384,7 +9345,7 @@
       </p:sp>
       <p:sp>
         <p:nvSpPr>
-          <p:cNvPr id="58" name="Text 56"/>
+          <p:cNvPr id="57" name="Text 55"/>
           <p:cNvSpPr/>
           <p:nvPr/>
         </p:nvSpPr>
@@ -9423,7 +9384,7 @@
       </p:sp>
       <p:sp>
         <p:nvSpPr>
-          <p:cNvPr id="59" name="Shape 57"/>
+          <p:cNvPr id="58" name="Shape 56"/>
           <p:cNvSpPr/>
           <p:nvPr/>
         </p:nvSpPr>
@@ -9446,7 +9407,7 @@
       </p:sp>
       <p:sp>
         <p:nvSpPr>
-          <p:cNvPr id="60" name="Text 58"/>
+          <p:cNvPr id="59" name="Text 57"/>
           <p:cNvSpPr/>
           <p:nvPr/>
         </p:nvSpPr>
@@ -9485,7 +9446,7 @@
       </p:sp>
       <p:sp>
         <p:nvSpPr>
-          <p:cNvPr id="61" name="Shape 59"/>
+          <p:cNvPr id="60" name="Shape 58"/>
           <p:cNvSpPr/>
           <p:nvPr/>
         </p:nvSpPr>
@@ -9508,7 +9469,7 @@
       </p:sp>
       <p:sp>
         <p:nvSpPr>
-          <p:cNvPr id="62" name="Text 60"/>
+          <p:cNvPr id="61" name="Text 59"/>
           <p:cNvSpPr/>
           <p:nvPr/>
         </p:nvSpPr>
@@ -9547,7 +9508,7 @@
       </p:sp>
       <p:sp>
         <p:nvSpPr>
-          <p:cNvPr id="63" name="Shape 61"/>
+          <p:cNvPr id="62" name="Shape 60"/>
           <p:cNvSpPr/>
           <p:nvPr/>
         </p:nvSpPr>
@@ -9570,7 +9531,7 @@
       </p:sp>
       <p:sp>
         <p:nvSpPr>
-          <p:cNvPr id="64" name="Text 62"/>
+          <p:cNvPr id="63" name="Text 61"/>
           <p:cNvSpPr/>
           <p:nvPr/>
         </p:nvSpPr>
@@ -9620,7 +9581,7 @@
       </p:sp>
       <p:sp>
         <p:nvSpPr>
-          <p:cNvPr id="65" name="Text 63"/>
+          <p:cNvPr id="64" name="Text 62"/>
           <p:cNvSpPr/>
           <p:nvPr/>
         </p:nvSpPr>
@@ -9659,7 +9620,7 @@
       </p:sp>
       <p:sp>
         <p:nvSpPr>
-          <p:cNvPr id="66" name="Text 64"/>
+          <p:cNvPr id="65" name="Text 63"/>
           <p:cNvSpPr/>
           <p:nvPr/>
         </p:nvSpPr>
@@ -9698,7 +9659,7 @@
       </p:sp>
       <p:sp>
         <p:nvSpPr>
-          <p:cNvPr id="67" name="Text 65"/>
+          <p:cNvPr id="66" name="Text 64"/>
           <p:cNvSpPr/>
           <p:nvPr/>
         </p:nvSpPr>
@@ -9748,7 +9709,7 @@
       </p:sp>
       <p:sp>
         <p:nvSpPr>
-          <p:cNvPr id="68" name="Shape 66"/>
+          <p:cNvPr id="67" name="Shape 65"/>
           <p:cNvSpPr/>
           <p:nvPr/>
         </p:nvSpPr>
@@ -9771,7 +9732,7 @@
       </p:sp>
       <p:sp>
         <p:nvSpPr>
-          <p:cNvPr id="69" name="Shape 67"/>
+          <p:cNvPr id="68" name="Shape 66"/>
           <p:cNvSpPr/>
           <p:nvPr/>
         </p:nvSpPr>
@@ -9798,7 +9759,7 @@
       </p:sp>
       <p:sp>
         <p:nvSpPr>
-          <p:cNvPr id="70" name="Text 68"/>
+          <p:cNvPr id="69" name="Text 67"/>
           <p:cNvSpPr/>
           <p:nvPr/>
         </p:nvSpPr>
@@ -9837,7 +9798,7 @@
       </p:sp>
       <p:sp>
         <p:nvSpPr>
-          <p:cNvPr id="71" name="Shape 69"/>
+          <p:cNvPr id="70" name="Shape 68"/>
           <p:cNvSpPr/>
           <p:nvPr/>
         </p:nvSpPr>
@@ -9861,7 +9822,7 @@
       </p:sp>
       <p:sp>
         <p:nvSpPr>
-          <p:cNvPr id="72" name="Shape 70"/>
+          <p:cNvPr id="71" name="Shape 69"/>
           <p:cNvSpPr/>
           <p:nvPr/>
         </p:nvSpPr>
@@ -9888,7 +9849,7 @@
       </p:sp>
       <p:sp>
         <p:nvSpPr>
-          <p:cNvPr id="73" name="Text 71"/>
+          <p:cNvPr id="72" name="Text 70"/>
           <p:cNvSpPr/>
           <p:nvPr/>
         </p:nvSpPr>
@@ -9927,7 +9888,7 @@
       </p:sp>
       <p:sp>
         <p:nvSpPr>
-          <p:cNvPr id="74" name="Shape 72"/>
+          <p:cNvPr id="73" name="Shape 71"/>
           <p:cNvSpPr/>
           <p:nvPr/>
         </p:nvSpPr>
@@ -9951,7 +9912,7 @@
       </p:sp>
       <p:sp>
         <p:nvSpPr>
-          <p:cNvPr id="75" name="Shape 73"/>
+          <p:cNvPr id="74" name="Shape 72"/>
           <p:cNvSpPr/>
           <p:nvPr/>
         </p:nvSpPr>
@@ -9978,7 +9939,7 @@
       </p:sp>
       <p:sp>
         <p:nvSpPr>
-          <p:cNvPr id="76" name="Text 74"/>
+          <p:cNvPr id="75" name="Text 73"/>
           <p:cNvSpPr/>
           <p:nvPr/>
         </p:nvSpPr>
@@ -10017,7 +9978,7 @@
       </p:sp>
       <p:sp>
         <p:nvSpPr>
-          <p:cNvPr id="77" name="Shape 75"/>
+          <p:cNvPr id="76" name="Shape 74"/>
           <p:cNvSpPr/>
           <p:nvPr/>
         </p:nvSpPr>
@@ -10041,7 +10002,7 @@
       </p:sp>
       <p:sp>
         <p:nvSpPr>
-          <p:cNvPr id="78" name="Shape 76"/>
+          <p:cNvPr id="77" name="Shape 75"/>
           <p:cNvSpPr/>
           <p:nvPr/>
         </p:nvSpPr>
@@ -10068,7 +10029,7 @@
       </p:sp>
       <p:sp>
         <p:nvSpPr>
-          <p:cNvPr id="79" name="Text 77"/>
+          <p:cNvPr id="78" name="Text 76"/>
           <p:cNvSpPr/>
           <p:nvPr/>
         </p:nvSpPr>
@@ -10107,7 +10068,7 @@
       </p:sp>
       <p:sp>
         <p:nvSpPr>
-          <p:cNvPr id="80" name="Shape 78"/>
+          <p:cNvPr id="79" name="Shape 77"/>
           <p:cNvSpPr/>
           <p:nvPr/>
         </p:nvSpPr>
@@ -10131,7 +10092,7 @@
       </p:sp>
       <p:sp>
         <p:nvSpPr>
-          <p:cNvPr id="81" name="Shape 79"/>
+          <p:cNvPr id="80" name="Shape 78"/>
           <p:cNvSpPr/>
           <p:nvPr/>
         </p:nvSpPr>
@@ -10158,7 +10119,7 @@
       </p:sp>
       <p:sp>
         <p:nvSpPr>
-          <p:cNvPr id="82" name="Text 80"/>
+          <p:cNvPr id="81" name="Text 79"/>
           <p:cNvSpPr/>
           <p:nvPr/>
         </p:nvSpPr>
@@ -10197,7 +10158,7 @@
       </p:sp>
       <p:sp>
         <p:nvSpPr>
-          <p:cNvPr id="83" name="Shape 81"/>
+          <p:cNvPr id="82" name="Shape 80"/>
           <p:cNvSpPr/>
           <p:nvPr/>
         </p:nvSpPr>
@@ -10221,7 +10182,7 @@
       </p:sp>
       <p:sp>
         <p:nvSpPr>
-          <p:cNvPr id="84" name="Shape 82"/>
+          <p:cNvPr id="83" name="Shape 81"/>
           <p:cNvSpPr/>
           <p:nvPr/>
         </p:nvSpPr>
@@ -10248,7 +10209,7 @@
       </p:sp>
       <p:sp>
         <p:nvSpPr>
-          <p:cNvPr id="85" name="Text 83"/>
+          <p:cNvPr id="84" name="Text 82"/>
           <p:cNvSpPr/>
           <p:nvPr/>
         </p:nvSpPr>
@@ -10287,7 +10248,7 @@
       </p:sp>
       <p:sp>
         <p:nvSpPr>
-          <p:cNvPr id="86" name="Shape 84"/>
+          <p:cNvPr id="85" name="Shape 83"/>
           <p:cNvSpPr/>
           <p:nvPr/>
         </p:nvSpPr>
@@ -10311,7 +10272,7 @@
       </p:sp>
       <p:sp>
         <p:nvSpPr>
-          <p:cNvPr id="87" name="Shape 85"/>
+          <p:cNvPr id="86" name="Shape 84"/>
           <p:cNvSpPr/>
           <p:nvPr/>
         </p:nvSpPr>
@@ -10338,7 +10299,7 @@
       </p:sp>
       <p:sp>
         <p:nvSpPr>
-          <p:cNvPr id="88" name="Text 86"/>
+          <p:cNvPr id="87" name="Text 85"/>
           <p:cNvSpPr/>
           <p:nvPr/>
         </p:nvSpPr>
@@ -10377,7 +10338,7 @@
       </p:sp>
       <p:sp>
         <p:nvSpPr>
-          <p:cNvPr id="89" name="Text 87"/>
+          <p:cNvPr id="88" name="Text 86"/>
           <p:cNvSpPr/>
           <p:nvPr/>
         </p:nvSpPr>
@@ -10416,7 +10377,7 @@
       </p:sp>
       <p:sp>
         <p:nvSpPr>
-          <p:cNvPr id="90" name="Shape 88"/>
+          <p:cNvPr id="89" name="Shape 87"/>
           <p:cNvSpPr/>
           <p:nvPr/>
         </p:nvSpPr>
@@ -10443,7 +10404,7 @@
       </p:sp>
       <p:sp>
         <p:nvSpPr>
-          <p:cNvPr id="91" name="Text 89"/>
+          <p:cNvPr id="90" name="Text 88"/>
           <p:cNvSpPr/>
           <p:nvPr/>
         </p:nvSpPr>
@@ -10482,7 +10443,7 @@
       </p:sp>
       <p:sp>
         <p:nvSpPr>
-          <p:cNvPr id="92" name="Text 90"/>
+          <p:cNvPr id="91" name="Text 89"/>
           <p:cNvSpPr/>
           <p:nvPr/>
         </p:nvSpPr>
@@ -10796,7 +10757,7 @@
       </p:sp>
       <p:sp>
         <p:nvSpPr>
-          <p:cNvPr id="93" name="Shape 91"/>
+          <p:cNvPr id="92" name="Shape 90"/>
           <p:cNvSpPr/>
           <p:nvPr/>
         </p:nvSpPr>
@@ -10823,7 +10784,7 @@
       </p:sp>
       <p:sp>
         <p:nvSpPr>
-          <p:cNvPr id="94" name="Text 92"/>
+          <p:cNvPr id="93" name="Text 91"/>
           <p:cNvSpPr/>
           <p:nvPr/>
         </p:nvSpPr>
@@ -10862,7 +10823,7 @@
       </p:sp>
       <p:sp>
         <p:nvSpPr>
-          <p:cNvPr id="95" name="Text 93"/>
+          <p:cNvPr id="94" name="Text 92"/>
           <p:cNvSpPr/>
           <p:nvPr/>
         </p:nvSpPr>
@@ -10994,7 +10955,7 @@
       </p:sp>
       <p:sp>
         <p:nvSpPr>
-          <p:cNvPr id="96" name="Shape 94"/>
+          <p:cNvPr id="95" name="Shape 93"/>
           <p:cNvSpPr/>
           <p:nvPr/>
         </p:nvSpPr>
@@ -11019,7 +10980,7 @@
       </p:sp>
       <p:sp>
         <p:nvSpPr>
-          <p:cNvPr id="97" name="Shape 95"/>
+          <p:cNvPr id="96" name="Shape 94"/>
           <p:cNvSpPr/>
           <p:nvPr/>
         </p:nvSpPr>
@@ -11044,7 +11005,7 @@
       </p:sp>
       <p:sp>
         <p:nvSpPr>
-          <p:cNvPr id="98" name="Text 96"/>
+          <p:cNvPr id="97" name="Text 95"/>
           <p:cNvSpPr/>
           <p:nvPr/>
         </p:nvSpPr>
@@ -16626,8 +16587,8 @@
         </p:nvSpPr>
         <p:spPr>
           <a:xfrm>
-            <a:off x="3246120" y="1371600"/>
-            <a:ext cx="2651760" cy="548640"/>
+            <a:off x="3429000" y="1691640"/>
+            <a:ext cx="2468880" cy="548640"/>
           </a:xfrm>
           <a:prstGeom prst="rect">
             <a:avLst/>
@@ -17172,7 +17133,7 @@
               <a:buChar char="▪"/>
             </a:pPr>
             <a:r>
-              <a:rPr lang="en-US" sz="1050" dirty="0">
+              <a:rPr lang="en-US" sz="1200" dirty="0">
                 <a:solidFill>
                   <a:srgbClr val="262B3A"/>
                 </a:solidFill>
@@ -17183,7 +17144,7 @@
               <a:t>Person B rests their forearm on the bench, hand over the edge, and holds thumb and finger either side of the </a:t>
             </a:r>
             <a:r>
-              <a:rPr lang="en-US" sz="1050" b="1" dirty="0">
+              <a:rPr lang="en-US" sz="1200" b="1" dirty="0">
                 <a:solidFill>
                   <a:srgbClr val="262B3A"/>
                 </a:solidFill>
@@ -17194,7 +17155,7 @@
               <a:t>0 cm</a:t>
             </a:r>
             <a:r>
-              <a:rPr lang="en-US" sz="1050" dirty="0">
+              <a:rPr lang="en-US" sz="1200" dirty="0">
                 <a:solidFill>
                   <a:srgbClr val="262B3A"/>
                 </a:solidFill>
@@ -17204,7 +17165,7 @@
               </a:rPr>
               <a:t> mark.</a:t>
             </a:r>
-            <a:endParaRPr lang="en-US" sz="1050" dirty="0"/>
+            <a:endParaRPr lang="en-US" sz="1200" dirty="0"/>
           </a:p>
           <a:p>
             <a:pPr marL="152400" indent="-152400">
@@ -17215,7 +17176,7 @@
               <a:buChar char="▪"/>
             </a:pPr>
             <a:r>
-              <a:rPr lang="en-US" sz="1050" dirty="0">
+              <a:rPr lang="en-US" sz="1200" dirty="0">
                 <a:solidFill>
                   <a:srgbClr val="262B3A"/>
                 </a:solidFill>
@@ -17226,7 +17187,7 @@
               <a:t>Person A drops the ruler </a:t>
             </a:r>
             <a:r>
-              <a:rPr lang="en-US" sz="1050" b="1" dirty="0">
+              <a:rPr lang="en-US" sz="1200" b="1" dirty="0">
                 <a:solidFill>
                   <a:srgbClr val="262B3A"/>
                 </a:solidFill>
@@ -17237,7 +17198,7 @@
               <a:t>without warning</a:t>
             </a:r>
             <a:r>
-              <a:rPr lang="en-US" sz="1050" dirty="0">
+              <a:rPr lang="en-US" sz="1200" dirty="0">
                 <a:solidFill>
                   <a:srgbClr val="262B3A"/>
                 </a:solidFill>
@@ -17247,7 +17208,7 @@
               </a:rPr>
               <a:t>. B catches it as fast as possible.</a:t>
             </a:r>
-            <a:endParaRPr lang="en-US" sz="1050" dirty="0"/>
+            <a:endParaRPr lang="en-US" sz="1200" dirty="0"/>
           </a:p>
           <a:p>
             <a:pPr marL="152400" indent="-152400">
@@ -17258,7 +17219,7 @@
               <a:buChar char="▪"/>
             </a:pPr>
             <a:r>
-              <a:rPr lang="en-US" sz="1050" dirty="0">
+              <a:rPr lang="en-US" sz="1200" dirty="0">
                 <a:solidFill>
                   <a:srgbClr val="262B3A"/>
                 </a:solidFill>
@@ -17269,7 +17230,7 @@
               <a:t>Read the distance </a:t>
             </a:r>
             <a:r>
-              <a:rPr lang="en-US" sz="1050" b="1" dirty="0">
+              <a:rPr lang="en-US" sz="1200" b="1" dirty="0">
                 <a:solidFill>
                   <a:srgbClr val="262B3A"/>
                 </a:solidFill>
@@ -17280,7 +17241,7 @@
               <a:t>d</a:t>
             </a:r>
             <a:r>
-              <a:rPr lang="en-US" sz="1050" dirty="0">
+              <a:rPr lang="en-US" sz="1200" dirty="0">
                 <a:solidFill>
                   <a:srgbClr val="262B3A"/>
                 </a:solidFill>
@@ -17291,7 +17252,7 @@
               <a:t> (cm) at the top of B's thumb. Repeat </a:t>
             </a:r>
             <a:r>
-              <a:rPr lang="en-US" sz="1050" b="1" dirty="0">
+              <a:rPr lang="en-US" sz="1200" b="1" dirty="0">
                 <a:solidFill>
                   <a:srgbClr val="262B3A"/>
                 </a:solidFill>
@@ -17302,7 +17263,7 @@
               <a:t>5 times</a:t>
             </a:r>
             <a:r>
-              <a:rPr lang="en-US" sz="1050" dirty="0">
+              <a:rPr lang="en-US" sz="1200" dirty="0">
                 <a:solidFill>
                   <a:srgbClr val="262B3A"/>
                 </a:solidFill>
@@ -17312,7 +17273,7 @@
               </a:rPr>
               <a:t>.</a:t>
             </a:r>
-            <a:endParaRPr lang="en-US" sz="1050" dirty="0"/>
+            <a:endParaRPr lang="en-US" sz="1200" dirty="0"/>
           </a:p>
           <a:p>
             <a:pPr marL="152400" indent="-152400">
@@ -17323,7 +17284,7 @@
               <a:buChar char="▪"/>
             </a:pPr>
             <a:r>
-              <a:rPr lang="en-US" sz="1050" dirty="0">
+              <a:rPr lang="en-US" sz="1200" dirty="0">
                 <a:solidFill>
                   <a:srgbClr val="262B3A"/>
                 </a:solidFill>
@@ -17334,7 +17295,7 @@
               <a:t>Repeat while B counts backwards in 3s (the </a:t>
             </a:r>
             <a:r>
-              <a:rPr lang="en-US" sz="1050" b="1" dirty="0">
+              <a:rPr lang="en-US" sz="1200" b="1" dirty="0">
                 <a:solidFill>
                   <a:srgbClr val="262B3A"/>
                 </a:solidFill>
@@ -17345,7 +17306,7 @@
               <a:t>distraction</a:t>
             </a:r>
             <a:r>
-              <a:rPr lang="en-US" sz="1050" dirty="0">
+              <a:rPr lang="en-US" sz="1200" dirty="0">
                 <a:solidFill>
                   <a:srgbClr val="262B3A"/>
                 </a:solidFill>
@@ -17356,7 +17317,7 @@
               <a:t>). Calculate the </a:t>
             </a:r>
             <a:r>
-              <a:rPr lang="en-US" sz="1050" b="1" dirty="0">
+              <a:rPr lang="en-US" sz="1200" b="1" dirty="0">
                 <a:solidFill>
                   <a:srgbClr val="262B3A"/>
                 </a:solidFill>
@@ -17367,7 +17328,7 @@
               <a:t>mean</a:t>
             </a:r>
             <a:r>
-              <a:rPr lang="en-US" sz="1050" dirty="0">
+              <a:rPr lang="en-US" sz="1200" dirty="0">
                 <a:solidFill>
                   <a:srgbClr val="262B3A"/>
                 </a:solidFill>
@@ -17377,7 +17338,7 @@
               </a:rPr>
               <a:t> d for each.</a:t>
             </a:r>
-            <a:endParaRPr lang="en-US" sz="1050" dirty="0"/>
+            <a:endParaRPr lang="en-US" sz="1200" dirty="0"/>
           </a:p>
           <a:p>
             <a:pPr marL="152400" indent="-152400">
@@ -17388,7 +17349,7 @@
               <a:buChar char="▪"/>
             </a:pPr>
             <a:r>
-              <a:rPr lang="en-US" sz="1050" dirty="0">
+              <a:rPr lang="en-US" sz="1200" dirty="0">
                 <a:solidFill>
                   <a:srgbClr val="262B3A"/>
                 </a:solidFill>
@@ -17399,7 +17360,7 @@
               <a:t>Convert each mean distance to a </a:t>
             </a:r>
             <a:r>
-              <a:rPr lang="en-US" sz="1050" b="1" dirty="0">
+              <a:rPr lang="en-US" sz="1200" b="1" dirty="0">
                 <a:solidFill>
                   <a:srgbClr val="262B3A"/>
                 </a:solidFill>
@@ -17410,7 +17371,7 @@
               <a:t>reaction time</a:t>
             </a:r>
             <a:r>
-              <a:rPr lang="en-US" sz="1050" dirty="0">
+              <a:rPr lang="en-US" sz="1200" dirty="0">
                 <a:solidFill>
                   <a:srgbClr val="262B3A"/>
                 </a:solidFill>
@@ -17420,7 +17381,7 @@
               </a:rPr>
               <a:t> using a table or graph.</a:t>
             </a:r>
-            <a:endParaRPr lang="en-US" sz="1050" dirty="0"/>
+            <a:endParaRPr lang="en-US" sz="1200" dirty="0"/>
           </a:p>
         </p:txBody>
       </p:sp>
@@ -19900,11 +19861,11 @@
         <p:spPr>
           <a:xfrm>
             <a:off x="411480" y="2834640"/>
-            <a:ext cx="5577840" cy="2880360"/>
+            <a:ext cx="5577840" cy="1737360"/>
           </a:xfrm>
           <a:prstGeom prst="roundRect">
             <a:avLst>
-              <a:gd name="adj" fmla="val 1905"/>
+              <a:gd name="adj" fmla="val 3158"/>
             </a:avLst>
           </a:prstGeom>
           <a:solidFill>
@@ -19966,7 +19927,7 @@
         <p:spPr>
           <a:xfrm>
             <a:off x="576072" y="3218688"/>
-            <a:ext cx="5248656" cy="2423160"/>
+            <a:ext cx="5248656" cy="1280160"/>
           </a:xfrm>
           <a:prstGeom prst="rect">
             <a:avLst/>
@@ -20133,6 +20094,159 @@
         </p:nvSpPr>
         <p:spPr>
           <a:xfrm>
+            <a:off x="411480" y="4681728"/>
+            <a:ext cx="5577840" cy="1033272"/>
+          </a:xfrm>
+          <a:prstGeom prst="roundRect">
+            <a:avLst>
+              <a:gd name="adj" fmla="val 5310"/>
+            </a:avLst>
+          </a:prstGeom>
+          <a:solidFill>
+            <a:srgbClr val="F4FAF9"/>
+          </a:solidFill>
+          <a:ln w="9525">
+            <a:solidFill>
+              <a:srgbClr val="CFE0DE"/>
+            </a:solidFill>
+            <a:prstDash val="solid"/>
+          </a:ln>
+        </p:spPr>
+      </p:sp>
+      <p:sp>
+        <p:nvSpPr>
+          <p:cNvPr id="18" name="Text 15"/>
+          <p:cNvSpPr/>
+          <p:nvPr/>
+        </p:nvSpPr>
+        <p:spPr>
+          <a:xfrm>
+            <a:off x="576072" y="4773168"/>
+            <a:ext cx="5248656" cy="292608"/>
+          </a:xfrm>
+          <a:prstGeom prst="rect">
+            <a:avLst/>
+          </a:prstGeom>
+          <a:noFill/>
+          <a:ln/>
+        </p:spPr>
+        <p:txBody>
+          <a:bodyPr wrap="square" lIns="0" tIns="0" rIns="0" bIns="0" rtlCol="0" anchor="ctr"/>
+          <a:lstStyle/>
+          <a:p>
+            <a:pPr indent="0" marL="0">
+              <a:buNone/>
+            </a:pPr>
+            <a:r>
+              <a:rPr lang="en-US" sz="1300" b="1" dirty="0">
+                <a:solidFill>
+                  <a:srgbClr val="133536"/>
+                </a:solidFill>
+                <a:latin typeface="Calibri" pitchFamily="34" charset="0"/>
+                <a:ea typeface="Calibri" pitchFamily="34" charset="-122"/>
+                <a:cs typeface="Calibri" pitchFamily="34" charset="-120"/>
+              </a:rPr>
+              <a:t>Conclusion</a:t>
+            </a:r>
+            <a:endParaRPr lang="en-US" sz="1300" dirty="0"/>
+          </a:p>
+        </p:txBody>
+      </p:sp>
+      <p:sp>
+        <p:nvSpPr>
+          <p:cNvPr id="19" name="Text 16"/>
+          <p:cNvSpPr/>
+          <p:nvPr/>
+        </p:nvSpPr>
+        <p:spPr>
+          <a:xfrm>
+            <a:off x="576072" y="5102352"/>
+            <a:ext cx="5248656" cy="539496"/>
+          </a:xfrm>
+          <a:prstGeom prst="rect">
+            <a:avLst/>
+          </a:prstGeom>
+          <a:noFill/>
+          <a:ln/>
+        </p:spPr>
+        <p:txBody>
+          <a:bodyPr wrap="square" lIns="0" tIns="0" rIns="0" bIns="0" rtlCol="0" anchor="t"/>
+          <a:lstStyle/>
+          <a:p>
+            <a:pPr marL="152400" indent="-152400">
+              <a:spcAft>
+                <a:spcPts val="300"/>
+              </a:spcAft>
+              <a:buSzPct val="100000"/>
+              <a:buChar char="▪"/>
+            </a:pPr>
+            <a:r>
+              <a:rPr lang="en-US" sz="1050" dirty="0">
+                <a:solidFill>
+                  <a:srgbClr val="262B3A"/>
+                </a:solidFill>
+                <a:latin typeface="Calibri" pitchFamily="34" charset="0"/>
+                <a:ea typeface="Calibri" pitchFamily="34" charset="-122"/>
+                <a:cs typeface="Calibri" pitchFamily="34" charset="-120"/>
+              </a:rPr>
+              <a:t>With the distraction the mean reaction time rose from about </a:t>
+            </a:r>
+            <a:r>
+              <a:rPr lang="en-US" sz="1050" b="1" dirty="0">
+                <a:solidFill>
+                  <a:srgbClr val="262B3A"/>
+                </a:solidFill>
+                <a:latin typeface="Calibri" pitchFamily="34" charset="0"/>
+                <a:ea typeface="Calibri" pitchFamily="34" charset="-122"/>
+                <a:cs typeface="Calibri" pitchFamily="34" charset="-120"/>
+              </a:rPr>
+              <a:t>0.18 s</a:t>
+            </a:r>
+            <a:r>
+              <a:rPr lang="en-US" sz="1050" dirty="0">
+                <a:solidFill>
+                  <a:srgbClr val="262B3A"/>
+                </a:solidFill>
+                <a:latin typeface="Calibri" pitchFamily="34" charset="0"/>
+                <a:ea typeface="Calibri" pitchFamily="34" charset="-122"/>
+                <a:cs typeface="Calibri" pitchFamily="34" charset="-120"/>
+              </a:rPr>
+              <a:t> to </a:t>
+            </a:r>
+            <a:r>
+              <a:rPr lang="en-US" sz="1050" b="1" dirty="0">
+                <a:solidFill>
+                  <a:srgbClr val="262B3A"/>
+                </a:solidFill>
+                <a:latin typeface="Calibri" pitchFamily="34" charset="0"/>
+                <a:ea typeface="Calibri" pitchFamily="34" charset="-122"/>
+                <a:cs typeface="Calibri" pitchFamily="34" charset="-120"/>
+              </a:rPr>
+              <a:t>0.22 s</a:t>
+            </a:r>
+            <a:r>
+              <a:rPr lang="en-US" sz="1050" dirty="0">
+                <a:solidFill>
+                  <a:srgbClr val="262B3A"/>
+                </a:solidFill>
+                <a:latin typeface="Calibri" pitchFamily="34" charset="0"/>
+                <a:ea typeface="Calibri" pitchFamily="34" charset="-122"/>
+                <a:cs typeface="Calibri" pitchFamily="34" charset="-120"/>
+              </a:rPr>
+              <a:t>: the brain was busy with the counting.</a:t>
+            </a:r>
+            <a:endParaRPr lang="en-US" sz="1050" dirty="0"/>
+          </a:p>
+        </p:txBody>
+      </p:sp>
+      <p:sp>
+        <p:nvSpPr>
+          <p:cNvPr id="20" name="Shape 17"/>
+          <p:cNvSpPr/>
+          <p:nvPr/>
+        </p:nvSpPr>
+        <p:spPr>
+          <a:xfrm>
             <a:off x="6217920" y="2834640"/>
             <a:ext cx="5559552" cy="2880360"/>
           </a:xfrm>
@@ -20154,7 +20268,7 @@
       </p:sp>
       <p:sp>
         <p:nvSpPr>
-          <p:cNvPr id="18" name="Shape 15"/>
+          <p:cNvPr id="21" name="Shape 18"/>
           <p:cNvSpPr/>
           <p:nvPr/>
         </p:nvSpPr>
@@ -20174,7 +20288,7 @@
       </p:sp>
       <p:sp>
         <p:nvSpPr>
-          <p:cNvPr id="19" name="Shape 16"/>
+          <p:cNvPr id="22" name="Shape 19"/>
           <p:cNvSpPr/>
           <p:nvPr/>
         </p:nvSpPr>
@@ -20197,7 +20311,7 @@
       </p:sp>
       <p:sp>
         <p:nvSpPr>
-          <p:cNvPr id="20" name="Shape 17"/>
+          <p:cNvPr id="23" name="Shape 20"/>
           <p:cNvSpPr/>
           <p:nvPr/>
         </p:nvSpPr>
@@ -20220,7 +20334,7 @@
       </p:sp>
       <p:sp>
         <p:nvSpPr>
-          <p:cNvPr id="21" name="Shape 18"/>
+          <p:cNvPr id="24" name="Shape 21"/>
           <p:cNvSpPr/>
           <p:nvPr/>
         </p:nvSpPr>
@@ -20243,7 +20357,7 @@
       </p:sp>
       <p:sp>
         <p:nvSpPr>
-          <p:cNvPr id="22" name="Shape 19"/>
+          <p:cNvPr id="25" name="Shape 22"/>
           <p:cNvSpPr/>
           <p:nvPr/>
         </p:nvSpPr>
@@ -20266,7 +20380,7 @@
       </p:sp>
       <p:sp>
         <p:nvSpPr>
-          <p:cNvPr id="23" name="Shape 20"/>
+          <p:cNvPr id="26" name="Shape 23"/>
           <p:cNvSpPr/>
           <p:nvPr/>
         </p:nvSpPr>
@@ -20289,7 +20403,7 @@
       </p:sp>
       <p:sp>
         <p:nvSpPr>
-          <p:cNvPr id="24" name="Shape 21"/>
+          <p:cNvPr id="27" name="Shape 24"/>
           <p:cNvSpPr/>
           <p:nvPr/>
         </p:nvSpPr>
@@ -20312,7 +20426,7 @@
       </p:sp>
       <p:sp>
         <p:nvSpPr>
-          <p:cNvPr id="25" name="Shape 22"/>
+          <p:cNvPr id="28" name="Shape 25"/>
           <p:cNvSpPr/>
           <p:nvPr/>
         </p:nvSpPr>
@@ -20335,7 +20449,7 @@
       </p:sp>
       <p:sp>
         <p:nvSpPr>
-          <p:cNvPr id="26" name="Shape 23"/>
+          <p:cNvPr id="29" name="Shape 26"/>
           <p:cNvSpPr/>
           <p:nvPr/>
         </p:nvSpPr>
@@ -20358,7 +20472,7 @@
       </p:sp>
       <p:sp>
         <p:nvSpPr>
-          <p:cNvPr id="27" name="Shape 24"/>
+          <p:cNvPr id="30" name="Shape 27"/>
           <p:cNvSpPr/>
           <p:nvPr/>
         </p:nvSpPr>
@@ -20381,7 +20495,7 @@
       </p:sp>
       <p:sp>
         <p:nvSpPr>
-          <p:cNvPr id="28" name="Shape 25"/>
+          <p:cNvPr id="31" name="Shape 28"/>
           <p:cNvSpPr/>
           <p:nvPr/>
         </p:nvSpPr>
@@ -20404,7 +20518,7 @@
       </p:sp>
       <p:sp>
         <p:nvSpPr>
-          <p:cNvPr id="29" name="Shape 26"/>
+          <p:cNvPr id="32" name="Shape 29"/>
           <p:cNvSpPr/>
           <p:nvPr/>
         </p:nvSpPr>
@@ -20427,7 +20541,7 @@
       </p:sp>
       <p:sp>
         <p:nvSpPr>
-          <p:cNvPr id="30" name="Shape 27"/>
+          <p:cNvPr id="33" name="Shape 30"/>
           <p:cNvSpPr/>
           <p:nvPr/>
         </p:nvSpPr>
@@ -20450,7 +20564,7 @@
       </p:sp>
       <p:sp>
         <p:nvSpPr>
-          <p:cNvPr id="31" name="Text 28"/>
+          <p:cNvPr id="34" name="Text 31"/>
           <p:cNvSpPr/>
           <p:nvPr/>
         </p:nvSpPr>
@@ -20478,7 +20592,7 @@
       </p:sp>
       <p:sp>
         <p:nvSpPr>
-          <p:cNvPr id="32" name="Shape 29"/>
+          <p:cNvPr id="35" name="Shape 32"/>
           <p:cNvSpPr/>
           <p:nvPr/>
         </p:nvSpPr>
@@ -20501,7 +20615,7 @@
       </p:sp>
       <p:sp>
         <p:nvSpPr>
-          <p:cNvPr id="33" name="Text 30"/>
+          <p:cNvPr id="36" name="Text 33"/>
           <p:cNvSpPr/>
           <p:nvPr/>
         </p:nvSpPr>
@@ -20529,7 +20643,7 @@
       </p:sp>
       <p:sp>
         <p:nvSpPr>
-          <p:cNvPr id="34" name="Shape 31"/>
+          <p:cNvPr id="37" name="Shape 34"/>
           <p:cNvSpPr/>
           <p:nvPr/>
         </p:nvSpPr>
@@ -20552,7 +20666,7 @@
       </p:sp>
       <p:sp>
         <p:nvSpPr>
-          <p:cNvPr id="35" name="Text 32"/>
+          <p:cNvPr id="38" name="Text 35"/>
           <p:cNvSpPr/>
           <p:nvPr/>
         </p:nvSpPr>
@@ -20580,7 +20694,7 @@
       </p:sp>
       <p:sp>
         <p:nvSpPr>
-          <p:cNvPr id="36" name="Shape 33"/>
+          <p:cNvPr id="39" name="Shape 36"/>
           <p:cNvSpPr/>
           <p:nvPr/>
         </p:nvSpPr>
@@ -20603,7 +20717,7 @@
       </p:sp>
       <p:sp>
         <p:nvSpPr>
-          <p:cNvPr id="37" name="Text 34"/>
+          <p:cNvPr id="40" name="Text 37"/>
           <p:cNvSpPr/>
           <p:nvPr/>
         </p:nvSpPr>
@@ -20625,13 +20739,24 @@
             <a:pPr algn="r" indent="0" marL="0">
               <a:buNone/>
             </a:pPr>
+            <a:r>
+              <a:rPr lang="en-US" sz="1000" dirty="0">
+                <a:solidFill>
+                  <a:srgbClr val="262B3A"/>
+                </a:solidFill>
+                <a:latin typeface="Calibri" pitchFamily="34" charset="0"/>
+                <a:ea typeface="Calibri" pitchFamily="34" charset="-122"/>
+                <a:cs typeface="Calibri" pitchFamily="34" charset="-120"/>
+              </a:rPr>
+              <a:t>0</a:t>
+            </a:r>
             <a:endParaRPr lang="en-US" sz="1000" dirty="0"/>
           </a:p>
         </p:txBody>
       </p:sp>
       <p:sp>
         <p:nvSpPr>
-          <p:cNvPr id="38" name="Shape 35"/>
+          <p:cNvPr id="41" name="Shape 38"/>
           <p:cNvSpPr/>
           <p:nvPr/>
         </p:nvSpPr>
@@ -20654,7 +20779,7 @@
       </p:sp>
       <p:sp>
         <p:nvSpPr>
-          <p:cNvPr id="39" name="Text 36"/>
+          <p:cNvPr id="42" name="Text 39"/>
           <p:cNvSpPr/>
           <p:nvPr/>
         </p:nvSpPr>
@@ -20676,13 +20801,24 @@
             <a:pPr algn="r" indent="0" marL="0">
               <a:buNone/>
             </a:pPr>
+            <a:r>
+              <a:rPr lang="en-US" sz="1000" dirty="0">
+                <a:solidFill>
+                  <a:srgbClr val="262B3A"/>
+                </a:solidFill>
+                <a:latin typeface="Calibri" pitchFamily="34" charset="0"/>
+                <a:ea typeface="Calibri" pitchFamily="34" charset="-122"/>
+                <a:cs typeface="Calibri" pitchFamily="34" charset="-120"/>
+              </a:rPr>
+              <a:t>50</a:t>
+            </a:r>
             <a:endParaRPr lang="en-US" sz="1000" dirty="0"/>
           </a:p>
         </p:txBody>
       </p:sp>
       <p:sp>
         <p:nvSpPr>
-          <p:cNvPr id="40" name="Shape 37"/>
+          <p:cNvPr id="43" name="Shape 40"/>
           <p:cNvSpPr/>
           <p:nvPr/>
         </p:nvSpPr>
@@ -20705,7 +20841,7 @@
       </p:sp>
       <p:sp>
         <p:nvSpPr>
-          <p:cNvPr id="41" name="Text 38"/>
+          <p:cNvPr id="44" name="Text 41"/>
           <p:cNvSpPr/>
           <p:nvPr/>
         </p:nvSpPr>
@@ -20727,13 +20863,24 @@
             <a:pPr algn="r" indent="0" marL="0">
               <a:buNone/>
             </a:pPr>
+            <a:r>
+              <a:rPr lang="en-US" sz="1000" dirty="0">
+                <a:solidFill>
+                  <a:srgbClr val="262B3A"/>
+                </a:solidFill>
+                <a:latin typeface="Calibri" pitchFamily="34" charset="0"/>
+                <a:ea typeface="Calibri" pitchFamily="34" charset="-122"/>
+                <a:cs typeface="Calibri" pitchFamily="34" charset="-120"/>
+              </a:rPr>
+              <a:t>100</a:t>
+            </a:r>
             <a:endParaRPr lang="en-US" sz="1000" dirty="0"/>
           </a:p>
         </p:txBody>
       </p:sp>
       <p:sp>
         <p:nvSpPr>
-          <p:cNvPr id="42" name="Shape 39"/>
+          <p:cNvPr id="45" name="Shape 42"/>
           <p:cNvSpPr/>
           <p:nvPr/>
         </p:nvSpPr>
@@ -20756,7 +20903,7 @@
       </p:sp>
       <p:sp>
         <p:nvSpPr>
-          <p:cNvPr id="43" name="Text 40"/>
+          <p:cNvPr id="46" name="Text 43"/>
           <p:cNvSpPr/>
           <p:nvPr/>
         </p:nvSpPr>
@@ -20778,13 +20925,24 @@
             <a:pPr algn="r" indent="0" marL="0">
               <a:buNone/>
             </a:pPr>
+            <a:r>
+              <a:rPr lang="en-US" sz="1000" dirty="0">
+                <a:solidFill>
+                  <a:srgbClr val="262B3A"/>
+                </a:solidFill>
+                <a:latin typeface="Calibri" pitchFamily="34" charset="0"/>
+                <a:ea typeface="Calibri" pitchFamily="34" charset="-122"/>
+                <a:cs typeface="Calibri" pitchFamily="34" charset="-120"/>
+              </a:rPr>
+              <a:t>150</a:t>
+            </a:r>
             <a:endParaRPr lang="en-US" sz="1000" dirty="0"/>
           </a:p>
         </p:txBody>
       </p:sp>
       <p:sp>
         <p:nvSpPr>
-          <p:cNvPr id="44" name="Shape 41"/>
+          <p:cNvPr id="47" name="Shape 44"/>
           <p:cNvSpPr/>
           <p:nvPr/>
         </p:nvSpPr>
@@ -20807,7 +20965,7 @@
       </p:sp>
       <p:sp>
         <p:nvSpPr>
-          <p:cNvPr id="45" name="Text 42"/>
+          <p:cNvPr id="48" name="Text 45"/>
           <p:cNvSpPr/>
           <p:nvPr/>
         </p:nvSpPr>
@@ -20829,13 +20987,24 @@
             <a:pPr algn="r" indent="0" marL="0">
               <a:buNone/>
             </a:pPr>
+            <a:r>
+              <a:rPr lang="en-US" sz="1000" dirty="0">
+                <a:solidFill>
+                  <a:srgbClr val="262B3A"/>
+                </a:solidFill>
+                <a:latin typeface="Calibri" pitchFamily="34" charset="0"/>
+                <a:ea typeface="Calibri" pitchFamily="34" charset="-122"/>
+                <a:cs typeface="Calibri" pitchFamily="34" charset="-120"/>
+              </a:rPr>
+              <a:t>200</a:t>
+            </a:r>
             <a:endParaRPr lang="en-US" sz="1000" dirty="0"/>
           </a:p>
         </p:txBody>
       </p:sp>
       <p:sp>
         <p:nvSpPr>
-          <p:cNvPr id="46" name="Shape 43"/>
+          <p:cNvPr id="49" name="Shape 46"/>
           <p:cNvSpPr/>
           <p:nvPr/>
         </p:nvSpPr>
@@ -20858,7 +21027,7 @@
       </p:sp>
       <p:sp>
         <p:nvSpPr>
-          <p:cNvPr id="47" name="Text 44"/>
+          <p:cNvPr id="50" name="Text 47"/>
           <p:cNvSpPr/>
           <p:nvPr/>
         </p:nvSpPr>
@@ -20880,13 +21049,24 @@
             <a:pPr algn="r" indent="0" marL="0">
               <a:buNone/>
             </a:pPr>
+            <a:r>
+              <a:rPr lang="en-US" sz="1000" dirty="0">
+                <a:solidFill>
+                  <a:srgbClr val="262B3A"/>
+                </a:solidFill>
+                <a:latin typeface="Calibri" pitchFamily="34" charset="0"/>
+                <a:ea typeface="Calibri" pitchFamily="34" charset="-122"/>
+                <a:cs typeface="Calibri" pitchFamily="34" charset="-120"/>
+              </a:rPr>
+              <a:t>250</a:t>
+            </a:r>
             <a:endParaRPr lang="en-US" sz="1000" dirty="0"/>
           </a:p>
         </p:txBody>
       </p:sp>
       <p:sp>
         <p:nvSpPr>
-          <p:cNvPr id="48" name="Text 45"/>
+          <p:cNvPr id="51" name="Text 48"/>
           <p:cNvSpPr/>
           <p:nvPr/>
         </p:nvSpPr>
@@ -20925,7 +21105,7 @@
       </p:sp>
       <p:sp>
         <p:nvSpPr>
-          <p:cNvPr id="49" name="Shape 46"/>
+          <p:cNvPr id="52" name="Shape 49"/>
           <p:cNvSpPr/>
           <p:nvPr/>
         </p:nvSpPr>
@@ -20950,7 +21130,7 @@
       </p:sp>
       <p:sp>
         <p:nvSpPr>
-          <p:cNvPr id="50" name="Text 47"/>
+          <p:cNvPr id="53" name="Text 50"/>
           <p:cNvSpPr/>
           <p:nvPr/>
         </p:nvSpPr>
@@ -20989,7 +21169,7 @@
       </p:sp>
       <p:sp>
         <p:nvSpPr>
-          <p:cNvPr id="51" name="Text 48"/>
+          <p:cNvPr id="54" name="Text 51"/>
           <p:cNvSpPr/>
           <p:nvPr/>
         </p:nvSpPr>
@@ -21028,7 +21208,7 @@
       </p:sp>
       <p:sp>
         <p:nvSpPr>
-          <p:cNvPr id="52" name="Shape 49"/>
+          <p:cNvPr id="55" name="Shape 52"/>
           <p:cNvSpPr/>
           <p:nvPr/>
         </p:nvSpPr>
@@ -21053,7 +21233,7 @@
       </p:sp>
       <p:sp>
         <p:nvSpPr>
-          <p:cNvPr id="53" name="Text 50"/>
+          <p:cNvPr id="56" name="Text 53"/>
           <p:cNvSpPr/>
           <p:nvPr/>
         </p:nvSpPr>
@@ -21092,7 +21272,7 @@
       </p:sp>
       <p:sp>
         <p:nvSpPr>
-          <p:cNvPr id="54" name="Text 51"/>
+          <p:cNvPr id="57" name="Text 54"/>
           <p:cNvSpPr/>
           <p:nvPr/>
         </p:nvSpPr>
@@ -21131,7 +21311,7 @@
       </p:sp>
       <p:sp>
         <p:nvSpPr>
-          <p:cNvPr id="55" name="Text 52"/>
+          <p:cNvPr id="58" name="Text 55"/>
           <p:cNvSpPr/>
           <p:nvPr/>
         </p:nvSpPr>
@@ -21170,7 +21350,7 @@
       </p:sp>
       <p:sp>
         <p:nvSpPr>
-          <p:cNvPr id="56" name="Shape 53"/>
+          <p:cNvPr id="59" name="Shape 56"/>
           <p:cNvSpPr/>
           <p:nvPr/>
         </p:nvSpPr>
@@ -21195,7 +21375,7 @@
       </p:sp>
       <p:sp>
         <p:nvSpPr>
-          <p:cNvPr id="57" name="Shape 54"/>
+          <p:cNvPr id="60" name="Shape 57"/>
           <p:cNvSpPr/>
           <p:nvPr/>
         </p:nvSpPr>
@@ -21220,7 +21400,7 @@
       </p:sp>
       <p:sp>
         <p:nvSpPr>
-          <p:cNvPr id="58" name="Text 55"/>
+          <p:cNvPr id="61" name="Text 58"/>
           <p:cNvSpPr/>
           <p:nvPr/>
         </p:nvSpPr>
@@ -38819,7 +38999,7 @@
               <a:buChar char="▪"/>
             </a:pPr>
             <a:r>
-              <a:rPr lang="en-US" sz="1100" dirty="0">
+              <a:rPr lang="en-US" sz="1250" dirty="0">
                 <a:solidFill>
                   <a:srgbClr val="262B3A"/>
                 </a:solidFill>
@@ -38830,7 +39010,7 @@
               <a:t>A </a:t>
             </a:r>
             <a:r>
-              <a:rPr lang="en-US" sz="1100" b="1" dirty="0">
+              <a:rPr lang="en-US" sz="1250" b="1" dirty="0">
                 <a:solidFill>
                   <a:srgbClr val="262B3A"/>
                 </a:solidFill>
@@ -38841,7 +39021,7 @@
               <a:t>stimulus</a:t>
             </a:r>
             <a:r>
-              <a:rPr lang="en-US" sz="1100" dirty="0">
+              <a:rPr lang="en-US" sz="1250" dirty="0">
                 <a:solidFill>
                   <a:srgbClr val="262B3A"/>
                 </a:solidFill>
@@ -38851,7 +39031,7 @@
               </a:rPr>
               <a:t> is a change in the environment, inside or outside the body.</a:t>
             </a:r>
-            <a:endParaRPr lang="en-US" sz="1100" dirty="0"/>
+            <a:endParaRPr lang="en-US" sz="1250" dirty="0"/>
           </a:p>
           <a:p>
             <a:pPr marL="152400" indent="-152400">
@@ -38862,7 +39042,7 @@
               <a:buChar char="▪"/>
             </a:pPr>
             <a:r>
-              <a:rPr lang="en-US" sz="1100" dirty="0">
+              <a:rPr lang="en-US" sz="1250" dirty="0">
                 <a:solidFill>
                   <a:srgbClr val="262B3A"/>
                 </a:solidFill>
@@ -38873,7 +39053,7 @@
               <a:t>The </a:t>
             </a:r>
             <a:r>
-              <a:rPr lang="en-US" sz="1100" b="1" dirty="0">
+              <a:rPr lang="en-US" sz="1250" b="1" dirty="0">
                 <a:solidFill>
                   <a:srgbClr val="262B3A"/>
                 </a:solidFill>
@@ -38884,7 +39064,7 @@
               <a:t>central nervous system (CNS)</a:t>
             </a:r>
             <a:r>
-              <a:rPr lang="en-US" sz="1100" dirty="0">
+              <a:rPr lang="en-US" sz="1250" dirty="0">
                 <a:solidFill>
                   <a:srgbClr val="262B3A"/>
                 </a:solidFill>
@@ -38895,7 +39075,7 @@
               <a:t> is the </a:t>
             </a:r>
             <a:r>
-              <a:rPr lang="en-US" sz="1100" b="1" dirty="0">
+              <a:rPr lang="en-US" sz="1250" b="1" dirty="0">
                 <a:solidFill>
                   <a:srgbClr val="262B3A"/>
                 </a:solidFill>
@@ -38906,7 +39086,7 @@
               <a:t>brain</a:t>
             </a:r>
             <a:r>
-              <a:rPr lang="en-US" sz="1100" dirty="0">
+              <a:rPr lang="en-US" sz="1250" dirty="0">
                 <a:solidFill>
                   <a:srgbClr val="262B3A"/>
                 </a:solidFill>
@@ -38917,7 +39097,7 @@
               <a:t> and </a:t>
             </a:r>
             <a:r>
-              <a:rPr lang="en-US" sz="1100" b="1" dirty="0">
+              <a:rPr lang="en-US" sz="1250" b="1" dirty="0">
                 <a:solidFill>
                   <a:srgbClr val="262B3A"/>
                 </a:solidFill>
@@ -38928,7 +39108,7 @@
               <a:t>spinal cord</a:t>
             </a:r>
             <a:r>
-              <a:rPr lang="en-US" sz="1100" dirty="0">
+              <a:rPr lang="en-US" sz="1250" dirty="0">
                 <a:solidFill>
                   <a:srgbClr val="262B3A"/>
                 </a:solidFill>
@@ -38939,7 +39119,7 @@
               <a:t>. It is the </a:t>
             </a:r>
             <a:r>
-              <a:rPr lang="en-US" sz="1100" b="1" dirty="0">
+              <a:rPr lang="en-US" sz="1250" b="1" dirty="0">
                 <a:solidFill>
                   <a:srgbClr val="262B3A"/>
                 </a:solidFill>
@@ -38950,7 +39130,7 @@
               <a:t>coordinator</a:t>
             </a:r>
             <a:r>
-              <a:rPr lang="en-US" sz="1100" dirty="0">
+              <a:rPr lang="en-US" sz="1250" dirty="0">
                 <a:solidFill>
                   <a:srgbClr val="262B3A"/>
                 </a:solidFill>
@@ -38960,7 +39140,7 @@
               </a:rPr>
               <a:t>: it processes information and sends instructions.</a:t>
             </a:r>
-            <a:endParaRPr lang="en-US" sz="1100" dirty="0"/>
+            <a:endParaRPr lang="en-US" sz="1250" dirty="0"/>
           </a:p>
           <a:p>
             <a:pPr marL="152400" indent="-152400">
@@ -38971,7 +39151,7 @@
               <a:buChar char="▪"/>
             </a:pPr>
             <a:r>
-              <a:rPr lang="en-US" sz="1100" dirty="0">
+              <a:rPr lang="en-US" sz="1250" dirty="0">
                 <a:solidFill>
                   <a:srgbClr val="262B3A"/>
                 </a:solidFill>
@@ -38982,7 +39162,7 @@
               <a:t>Nerves connect the CNS to the rest of the body (the </a:t>
             </a:r>
             <a:r>
-              <a:rPr lang="en-US" sz="1100" b="1" dirty="0">
+              <a:rPr lang="en-US" sz="1250" b="1" dirty="0">
                 <a:solidFill>
                   <a:srgbClr val="262B3A"/>
                 </a:solidFill>
@@ -38993,7 +39173,7 @@
               <a:t>peripheral</a:t>
             </a:r>
             <a:r>
-              <a:rPr lang="en-US" sz="1100" dirty="0">
+              <a:rPr lang="en-US" sz="1250" dirty="0">
                 <a:solidFill>
                   <a:srgbClr val="262B3A"/>
                 </a:solidFill>
@@ -39003,7 +39183,7 @@
               </a:rPr>
               <a:t> nervous system).</a:t>
             </a:r>
-            <a:endParaRPr lang="en-US" sz="1100" dirty="0"/>
+            <a:endParaRPr lang="en-US" sz="1250" dirty="0"/>
           </a:p>
           <a:p>
             <a:pPr marL="152400" indent="-152400">
@@ -39014,7 +39194,7 @@
               <a:buChar char="▪"/>
             </a:pPr>
             <a:r>
-              <a:rPr lang="en-US" sz="1100" dirty="0">
+              <a:rPr lang="en-US" sz="1250" dirty="0">
                 <a:solidFill>
                   <a:srgbClr val="262B3A"/>
                 </a:solidFill>
@@ -39025,7 +39205,7 @@
               <a:t>Information travels along </a:t>
             </a:r>
             <a:r>
-              <a:rPr lang="en-US" sz="1100" b="1" dirty="0">
+              <a:rPr lang="en-US" sz="1250" b="1" dirty="0">
                 <a:solidFill>
                   <a:srgbClr val="262B3A"/>
                 </a:solidFill>
@@ -39036,7 +39216,7 @@
               <a:t>neurones</a:t>
             </a:r>
             <a:r>
-              <a:rPr lang="en-US" sz="1100" dirty="0">
+              <a:rPr lang="en-US" sz="1250" dirty="0">
                 <a:solidFill>
                   <a:srgbClr val="262B3A"/>
                 </a:solidFill>
@@ -39047,7 +39227,7 @@
               <a:t> (nerve cells) as </a:t>
             </a:r>
             <a:r>
-              <a:rPr lang="en-US" sz="1100" b="1" dirty="0">
+              <a:rPr lang="en-US" sz="1250" b="1" dirty="0">
                 <a:solidFill>
                   <a:srgbClr val="262B3A"/>
                 </a:solidFill>
@@ -39058,7 +39238,7 @@
               <a:t>electrical impulses</a:t>
             </a:r>
             <a:r>
-              <a:rPr lang="en-US" sz="1100" dirty="0">
+              <a:rPr lang="en-US" sz="1250" dirty="0">
                 <a:solidFill>
                   <a:srgbClr val="262B3A"/>
                 </a:solidFill>
@@ -39068,7 +39248,7 @@
               </a:rPr>
               <a:t>. A nerve is a bundle of many neurones.</a:t>
             </a:r>
-            <a:endParaRPr lang="en-US" sz="1100" dirty="0"/>
+            <a:endParaRPr lang="en-US" sz="1250" dirty="0"/>
           </a:p>
         </p:txBody>
       </p:sp>
@@ -41373,7 +41553,7 @@
               <a:buChar char="▪"/>
             </a:pPr>
             <a:r>
-              <a:rPr lang="en-US" sz="1100" b="1" dirty="0">
+              <a:rPr lang="en-US" sz="1250" b="1" dirty="0">
                 <a:solidFill>
                   <a:srgbClr val="262B3A"/>
                 </a:solidFill>
@@ -41384,7 +41564,7 @@
               <a:t>Receptors</a:t>
             </a:r>
             <a:r>
-              <a:rPr lang="en-US" sz="1100" dirty="0">
+              <a:rPr lang="en-US" sz="1250" dirty="0">
                 <a:solidFill>
                   <a:srgbClr val="262B3A"/>
                 </a:solidFill>
@@ -41395,7 +41575,7 @@
               <a:t> are cells that detect a </a:t>
             </a:r>
             <a:r>
-              <a:rPr lang="en-US" sz="1100" b="1" dirty="0">
+              <a:rPr lang="en-US" sz="1250" b="1" dirty="0">
                 <a:solidFill>
                   <a:srgbClr val="262B3A"/>
                 </a:solidFill>
@@ -41406,7 +41586,7 @@
               <a:t>stimulus</a:t>
             </a:r>
             <a:r>
-              <a:rPr lang="en-US" sz="1100" dirty="0">
+              <a:rPr lang="en-US" sz="1250" dirty="0">
                 <a:solidFill>
                   <a:srgbClr val="262B3A"/>
                 </a:solidFill>
@@ -41417,7 +41597,7 @@
               <a:t>. Many are grouped in </a:t>
             </a:r>
             <a:r>
-              <a:rPr lang="en-US" sz="1100" b="1" dirty="0">
+              <a:rPr lang="en-US" sz="1250" b="1" dirty="0">
                 <a:solidFill>
                   <a:srgbClr val="262B3A"/>
                 </a:solidFill>
@@ -41428,7 +41608,7 @@
               <a:t>sense organs</a:t>
             </a:r>
             <a:r>
-              <a:rPr lang="en-US" sz="1100" dirty="0">
+              <a:rPr lang="en-US" sz="1250" dirty="0">
                 <a:solidFill>
                   <a:srgbClr val="262B3A"/>
                 </a:solidFill>
@@ -41438,7 +41618,7 @@
               </a:rPr>
               <a:t>.</a:t>
             </a:r>
-            <a:endParaRPr lang="en-US" sz="1100" dirty="0"/>
+            <a:endParaRPr lang="en-US" sz="1250" dirty="0"/>
           </a:p>
           <a:p>
             <a:pPr marL="152400" indent="-152400">
@@ -41449,7 +41629,7 @@
               <a:buChar char="▪"/>
             </a:pPr>
             <a:r>
-              <a:rPr lang="en-US" sz="1100" dirty="0">
+              <a:rPr lang="en-US" sz="1250" dirty="0">
                 <a:solidFill>
                   <a:srgbClr val="262B3A"/>
                 </a:solidFill>
@@ -41460,7 +41640,7 @@
               <a:t>A receptor changes the stimulus into an electrical </a:t>
             </a:r>
             <a:r>
-              <a:rPr lang="en-US" sz="1100" b="1" dirty="0">
+              <a:rPr lang="en-US" sz="1250" b="1" dirty="0">
                 <a:solidFill>
                   <a:srgbClr val="262B3A"/>
                 </a:solidFill>
@@ -41471,7 +41651,7 @@
               <a:t>impulse</a:t>
             </a:r>
             <a:r>
-              <a:rPr lang="en-US" sz="1100" dirty="0">
+              <a:rPr lang="en-US" sz="1250" dirty="0">
                 <a:solidFill>
                   <a:srgbClr val="262B3A"/>
                 </a:solidFill>
@@ -41482,7 +41662,7 @@
               <a:t> in a </a:t>
             </a:r>
             <a:r>
-              <a:rPr lang="en-US" sz="1100" b="1" dirty="0">
+              <a:rPr lang="en-US" sz="1250" b="1" dirty="0">
                 <a:solidFill>
                   <a:srgbClr val="262B3A"/>
                 </a:solidFill>
@@ -41493,7 +41673,7 @@
               <a:t>sensory neurone</a:t>
             </a:r>
             <a:r>
-              <a:rPr lang="en-US" sz="1100" dirty="0">
+              <a:rPr lang="en-US" sz="1250" dirty="0">
                 <a:solidFill>
                   <a:srgbClr val="262B3A"/>
                 </a:solidFill>
@@ -41503,7 +41683,7 @@
               </a:rPr>
               <a:t>.</a:t>
             </a:r>
-            <a:endParaRPr lang="en-US" sz="1100" dirty="0"/>
+            <a:endParaRPr lang="en-US" sz="1250" dirty="0"/>
           </a:p>
           <a:p>
             <a:pPr marL="152400" indent="-152400">
@@ -41514,7 +41694,7 @@
               <a:buChar char="▪"/>
             </a:pPr>
             <a:r>
-              <a:rPr lang="en-US" sz="1100" dirty="0">
+              <a:rPr lang="en-US" sz="1250" dirty="0">
                 <a:solidFill>
                   <a:srgbClr val="262B3A"/>
                 </a:solidFill>
@@ -41524,7 +41704,7 @@
               </a:rPr>
               <a:t>Different receptors detect different stimuli: light, sound, chemicals, touch, temperature.</a:t>
             </a:r>
-            <a:endParaRPr lang="en-US" sz="1100" dirty="0"/>
+            <a:endParaRPr lang="en-US" sz="1250" dirty="0"/>
           </a:p>
           <a:p>
             <a:pPr marL="152400" indent="-152400">
@@ -41535,7 +41715,7 @@
               <a:buChar char="▪"/>
             </a:pPr>
             <a:r>
-              <a:rPr lang="en-US" sz="1100" b="1" dirty="0">
+              <a:rPr lang="en-US" sz="1250" b="1" dirty="0">
                 <a:solidFill>
                   <a:srgbClr val="262B3A"/>
                 </a:solidFill>
@@ -41546,7 +41726,7 @@
               <a:t>Effectors</a:t>
             </a:r>
             <a:r>
-              <a:rPr lang="en-US" sz="1100" dirty="0">
+              <a:rPr lang="en-US" sz="1250" dirty="0">
                 <a:solidFill>
                   <a:srgbClr val="262B3A"/>
                 </a:solidFill>
@@ -41557,7 +41737,7 @@
               <a:t> are </a:t>
             </a:r>
             <a:r>
-              <a:rPr lang="en-US" sz="1100" b="1" dirty="0">
+              <a:rPr lang="en-US" sz="1250" b="1" dirty="0">
                 <a:solidFill>
                   <a:srgbClr val="262B3A"/>
                 </a:solidFill>
@@ -41568,7 +41748,7 @@
               <a:t>muscles</a:t>
             </a:r>
             <a:r>
-              <a:rPr lang="en-US" sz="1100" dirty="0">
+              <a:rPr lang="en-US" sz="1250" dirty="0">
                 <a:solidFill>
                   <a:srgbClr val="262B3A"/>
                 </a:solidFill>
@@ -41579,7 +41759,7 @@
               <a:t> or </a:t>
             </a:r>
             <a:r>
-              <a:rPr lang="en-US" sz="1100" b="1" dirty="0">
+              <a:rPr lang="en-US" sz="1250" b="1" dirty="0">
                 <a:solidFill>
                   <a:srgbClr val="262B3A"/>
                 </a:solidFill>
@@ -41590,7 +41770,7 @@
               <a:t>glands</a:t>
             </a:r>
             <a:r>
-              <a:rPr lang="en-US" sz="1100" dirty="0">
+              <a:rPr lang="en-US" sz="1250" dirty="0">
                 <a:solidFill>
                   <a:srgbClr val="262B3A"/>
                 </a:solidFill>
@@ -41601,7 +41781,7 @@
               <a:t>. They receive impulses along </a:t>
             </a:r>
             <a:r>
-              <a:rPr lang="en-US" sz="1100" b="1" dirty="0">
+              <a:rPr lang="en-US" sz="1250" b="1" dirty="0">
                 <a:solidFill>
                   <a:srgbClr val="262B3A"/>
                 </a:solidFill>
@@ -41612,7 +41792,7 @@
               <a:t>motor neurones</a:t>
             </a:r>
             <a:r>
-              <a:rPr lang="en-US" sz="1100" dirty="0">
+              <a:rPr lang="en-US" sz="1250" dirty="0">
                 <a:solidFill>
                   <a:srgbClr val="262B3A"/>
                 </a:solidFill>
@@ -41622,7 +41802,7 @@
               </a:rPr>
               <a:t>.</a:t>
             </a:r>
-            <a:endParaRPr lang="en-US" sz="1100" dirty="0"/>
+            <a:endParaRPr lang="en-US" sz="1250" dirty="0"/>
           </a:p>
           <a:p>
             <a:pPr marL="152400" indent="-152400">
@@ -41633,7 +41813,7 @@
               <a:buChar char="▪"/>
             </a:pPr>
             <a:r>
-              <a:rPr lang="en-US" sz="1100" dirty="0">
+              <a:rPr lang="en-US" sz="1250" dirty="0">
                 <a:solidFill>
                   <a:srgbClr val="262B3A"/>
                 </a:solidFill>
@@ -41643,7 +41823,7 @@
               </a:rPr>
               <a:t>The response is coordinated, so the right effector responds at the right time.</a:t>
             </a:r>
-            <a:endParaRPr lang="en-US" sz="1100" dirty="0"/>
+            <a:endParaRPr lang="en-US" sz="1250" dirty="0"/>
           </a:p>
         </p:txBody>
       </p:sp>
@@ -43400,8 +43580,8 @@
         </p:nvSpPr>
         <p:spPr>
           <a:xfrm flipV="1">
-            <a:off x="1234440" y="1718551"/>
-            <a:ext cx="140365" cy="796049"/>
+            <a:off x="1645920" y="1765377"/>
+            <a:ext cx="132108" cy="749223"/>
           </a:xfrm>
           <a:prstGeom prst="line">
             <a:avLst/>
@@ -43423,8 +43603,8 @@
         </p:nvSpPr>
         <p:spPr>
           <a:xfrm flipH="1" flipV="1">
-            <a:off x="1298699" y="1449294"/>
-            <a:ext cx="76106" cy="269257"/>
+            <a:off x="1706399" y="1511959"/>
+            <a:ext cx="71629" cy="253419"/>
           </a:xfrm>
           <a:prstGeom prst="line">
             <a:avLst/>
@@ -43446,8 +43626,8 @@
         </p:nvSpPr>
         <p:spPr>
           <a:xfrm flipV="1">
-            <a:off x="1374805" y="1491562"/>
-            <a:ext cx="163608" cy="226989"/>
+            <a:off x="1778028" y="1551740"/>
+            <a:ext cx="153984" cy="213637"/>
           </a:xfrm>
           <a:prstGeom prst="line">
             <a:avLst/>
@@ -43469,8 +43649,8 @@
         </p:nvSpPr>
         <p:spPr>
           <a:xfrm flipH="1" flipV="1">
-            <a:off x="914277" y="1772379"/>
-            <a:ext cx="320163" cy="742221"/>
+            <a:off x="1344590" y="1816039"/>
+            <a:ext cx="301330" cy="698561"/>
           </a:xfrm>
           <a:prstGeom prst="line">
             <a:avLst/>
@@ -43492,8 +43672,8 @@
         </p:nvSpPr>
         <p:spPr>
           <a:xfrm flipH="1" flipV="1">
-            <a:off x="702732" y="1589239"/>
-            <a:ext cx="211545" cy="183140"/>
+            <a:off x="1145489" y="1643672"/>
+            <a:ext cx="199101" cy="172367"/>
           </a:xfrm>
           <a:prstGeom prst="line">
             <a:avLst/>
@@ -43515,8 +43695,8 @@
         </p:nvSpPr>
         <p:spPr>
           <a:xfrm flipV="1">
-            <a:off x="914277" y="1492828"/>
-            <a:ext cx="11960" cy="279551"/>
+            <a:off x="1344590" y="1552932"/>
+            <a:ext cx="11256" cy="263107"/>
           </a:xfrm>
           <a:prstGeom prst="line">
             <a:avLst/>
@@ -43538,8 +43718,8 @@
         </p:nvSpPr>
         <p:spPr>
           <a:xfrm flipH="1" flipV="1">
-            <a:off x="559090" y="2070416"/>
-            <a:ext cx="675350" cy="444184"/>
+            <a:off x="1010297" y="2096544"/>
+            <a:ext cx="635623" cy="418056"/>
           </a:xfrm>
           <a:prstGeom prst="line">
             <a:avLst/>
@@ -43561,8 +43741,8 @@
         </p:nvSpPr>
         <p:spPr>
           <a:xfrm flipH="1" flipV="1">
-            <a:off x="281710" y="2033650"/>
-            <a:ext cx="277380" cy="36765"/>
+            <a:off x="749233" y="2061942"/>
+            <a:ext cx="261064" cy="34603"/>
           </a:xfrm>
           <a:prstGeom prst="line">
             <a:avLst/>
@@ -43584,8 +43764,8 @@
         </p:nvSpPr>
         <p:spPr>
           <a:xfrm flipH="1" flipV="1">
-            <a:off x="415467" y="1830282"/>
-            <a:ext cx="143623" cy="240133"/>
+            <a:off x="875122" y="1870536"/>
+            <a:ext cx="135175" cy="226008"/>
           </a:xfrm>
           <a:prstGeom prst="line">
             <a:avLst/>
@@ -43607,8 +43787,8 @@
         </p:nvSpPr>
         <p:spPr>
           <a:xfrm flipH="1">
-            <a:off x="426110" y="2514600"/>
-            <a:ext cx="808330" cy="91"/>
+            <a:off x="885139" y="2514600"/>
+            <a:ext cx="760781" cy="91"/>
           </a:xfrm>
           <a:prstGeom prst="line">
             <a:avLst/>
@@ -43630,8 +43810,8 @@
         </p:nvSpPr>
         <p:spPr>
           <a:xfrm flipH="1">
-            <a:off x="174160" y="2514600"/>
-            <a:ext cx="251951" cy="121706"/>
+            <a:off x="648009" y="2514600"/>
+            <a:ext cx="237130" cy="114547"/>
           </a:xfrm>
           <a:prstGeom prst="line">
             <a:avLst/>
@@ -43653,8 +43833,8 @@
         </p:nvSpPr>
         <p:spPr>
           <a:xfrm flipH="1" flipV="1">
-            <a:off x="174160" y="2392894"/>
-            <a:ext cx="251951" cy="121706"/>
+            <a:off x="648009" y="2400053"/>
+            <a:ext cx="237130" cy="114547"/>
           </a:xfrm>
           <a:prstGeom prst="line">
             <a:avLst/>
@@ -43676,8 +43856,8 @@
         </p:nvSpPr>
         <p:spPr>
           <a:xfrm flipH="1">
-            <a:off x="559090" y="2514600"/>
-            <a:ext cx="675350" cy="444184"/>
+            <a:off x="1010297" y="2514600"/>
+            <a:ext cx="635623" cy="418056"/>
           </a:xfrm>
           <a:prstGeom prst="line">
             <a:avLst/>
@@ -43699,8 +43879,8 @@
         </p:nvSpPr>
         <p:spPr>
           <a:xfrm flipH="1">
-            <a:off x="415467" y="2958784"/>
-            <a:ext cx="143623" cy="240133"/>
+            <a:off x="875122" y="2932656"/>
+            <a:ext cx="135175" cy="226008"/>
           </a:xfrm>
           <a:prstGeom prst="line">
             <a:avLst/>
@@ -43722,8 +43902,8 @@
         </p:nvSpPr>
         <p:spPr>
           <a:xfrm flipH="1">
-            <a:off x="281710" y="2958784"/>
-            <a:ext cx="277380" cy="36765"/>
+            <a:off x="749233" y="2932656"/>
+            <a:ext cx="261064" cy="34603"/>
           </a:xfrm>
           <a:prstGeom prst="line">
             <a:avLst/>
@@ -43745,8 +43925,8 @@
         </p:nvSpPr>
         <p:spPr>
           <a:xfrm flipH="1">
-            <a:off x="914277" y="2514600"/>
-            <a:ext cx="320163" cy="742221"/>
+            <a:off x="1344590" y="2514600"/>
+            <a:ext cx="301330" cy="698561"/>
           </a:xfrm>
           <a:prstGeom prst="line">
             <a:avLst/>
@@ -43768,8 +43948,8 @@
         </p:nvSpPr>
         <p:spPr>
           <a:xfrm>
-            <a:off x="914277" y="3256821"/>
-            <a:ext cx="11960" cy="279551"/>
+            <a:off x="1344590" y="3213161"/>
+            <a:ext cx="11256" cy="263107"/>
           </a:xfrm>
           <a:prstGeom prst="line">
             <a:avLst/>
@@ -43791,8 +43971,8 @@
         </p:nvSpPr>
         <p:spPr>
           <a:xfrm flipH="1">
-            <a:off x="702732" y="3256821"/>
-            <a:ext cx="211545" cy="183140"/>
+            <a:off x="1145489" y="3213161"/>
+            <a:ext cx="199101" cy="172367"/>
           </a:xfrm>
           <a:prstGeom prst="line">
             <a:avLst/>
@@ -43814,8 +43994,8 @@
         </p:nvSpPr>
         <p:spPr>
           <a:xfrm>
-            <a:off x="1234440" y="2514600"/>
-            <a:ext cx="140365" cy="796049"/>
+            <a:off x="1645920" y="2514600"/>
+            <a:ext cx="132108" cy="749223"/>
           </a:xfrm>
           <a:prstGeom prst="line">
             <a:avLst/>
@@ -43837,8 +44017,8 @@
         </p:nvSpPr>
         <p:spPr>
           <a:xfrm>
-            <a:off x="1374805" y="3310649"/>
-            <a:ext cx="163608" cy="226989"/>
+            <a:off x="1778028" y="3263823"/>
+            <a:ext cx="153984" cy="213637"/>
           </a:xfrm>
           <a:prstGeom prst="line">
             <a:avLst/>
@@ -43860,8 +44040,8 @@
         </p:nvSpPr>
         <p:spPr>
           <a:xfrm flipH="1">
-            <a:off x="1298699" y="3310649"/>
-            <a:ext cx="76106" cy="269257"/>
+            <a:off x="1706399" y="3263823"/>
+            <a:ext cx="71629" cy="253419"/>
           </a:xfrm>
           <a:prstGeom prst="line">
             <a:avLst/>
@@ -43883,8 +44063,8 @@
         </p:nvSpPr>
         <p:spPr>
           <a:xfrm>
-            <a:off x="923544" y="2203704"/>
-            <a:ext cx="621792" cy="621792"/>
+            <a:off x="1353312" y="2221992"/>
+            <a:ext cx="585216" cy="585216"/>
           </a:xfrm>
           <a:prstGeom prst="ellipse">
             <a:avLst/>
@@ -43908,8 +44088,8 @@
         </p:nvSpPr>
         <p:spPr>
           <a:xfrm>
-            <a:off x="1103864" y="2384024"/>
-            <a:ext cx="261153" cy="261153"/>
+            <a:off x="1523025" y="2391705"/>
+            <a:ext cx="245791" cy="245791"/>
           </a:xfrm>
           <a:prstGeom prst="ellipse">
             <a:avLst/>
@@ -43933,8 +44113,8 @@
         </p:nvSpPr>
         <p:spPr>
           <a:xfrm>
-            <a:off x="1545336" y="2514600"/>
-            <a:ext cx="4169664" cy="91"/>
+            <a:off x="1938528" y="2514600"/>
+            <a:ext cx="3776472" cy="91"/>
           </a:xfrm>
           <a:prstGeom prst="line">
             <a:avLst/>
@@ -43956,7 +44136,7 @@
         </p:nvSpPr>
         <p:spPr>
           <a:xfrm>
-            <a:off x="1819656" y="2404872"/>
+            <a:off x="2212848" y="2404872"/>
             <a:ext cx="457200" cy="219456"/>
           </a:xfrm>
           <a:prstGeom prst="roundRect">
@@ -43983,7 +44163,7 @@
         </p:nvSpPr>
         <p:spPr>
           <a:xfrm>
-            <a:off x="2350008" y="2404872"/>
+            <a:off x="2743200" y="2404872"/>
             <a:ext cx="457200" cy="219456"/>
           </a:xfrm>
           <a:prstGeom prst="roundRect">
@@ -44010,7 +44190,7 @@
         </p:nvSpPr>
         <p:spPr>
           <a:xfrm>
-            <a:off x="2880360" y="2404872"/>
+            <a:off x="3273552" y="2404872"/>
             <a:ext cx="457200" cy="219456"/>
           </a:xfrm>
           <a:prstGeom prst="roundRect">
@@ -44037,7 +44217,7 @@
         </p:nvSpPr>
         <p:spPr>
           <a:xfrm>
-            <a:off x="3410712" y="2404872"/>
+            <a:off x="3803904" y="2404872"/>
             <a:ext cx="457200" cy="219456"/>
           </a:xfrm>
           <a:prstGeom prst="roundRect">
@@ -44064,7 +44244,7 @@
         </p:nvSpPr>
         <p:spPr>
           <a:xfrm>
-            <a:off x="3941064" y="2404872"/>
+            <a:off x="4334256" y="2404872"/>
             <a:ext cx="457200" cy="219456"/>
           </a:xfrm>
           <a:prstGeom prst="roundRect">
@@ -44091,7 +44271,7 @@
         </p:nvSpPr>
         <p:spPr>
           <a:xfrm>
-            <a:off x="4471416" y="2404872"/>
+            <a:off x="4864608" y="2404872"/>
             <a:ext cx="457200" cy="219456"/>
           </a:xfrm>
           <a:prstGeom prst="roundRect">
@@ -44117,14 +44297,929 @@
           <p:nvPr/>
         </p:nvSpPr>
         <p:spPr>
-          <a:xfrm>
-            <a:off x="5001768" y="2404872"/>
-            <a:ext cx="457200" cy="219456"/>
+          <a:xfrm flipV="1">
+            <a:off x="5715000" y="2253996"/>
+            <a:ext cx="390906" cy="260604"/>
+          </a:xfrm>
+          <a:prstGeom prst="line">
+            <a:avLst/>
+          </a:prstGeom>
+          <a:noFill/>
+          <a:ln w="19050">
+            <a:solidFill>
+              <a:srgbClr val="6A4C93"/>
+            </a:solidFill>
+            <a:prstDash val="solid"/>
+          </a:ln>
+        </p:spPr>
+      </p:sp>
+      <p:sp>
+        <p:nvSpPr>
+          <p:cNvPr id="41" name="Shape 39"/>
+          <p:cNvSpPr/>
+          <p:nvPr/>
+        </p:nvSpPr>
+        <p:spPr>
+          <a:xfrm>
+            <a:off x="6066815" y="2214905"/>
+            <a:ext cx="78181" cy="78181"/>
+          </a:xfrm>
+          <a:prstGeom prst="ellipse">
+            <a:avLst/>
+          </a:prstGeom>
+          <a:solidFill>
+            <a:srgbClr val="6A4C93"/>
+          </a:solidFill>
+          <a:ln w="9525">
+            <a:solidFill>
+              <a:srgbClr val="6A4C93"/>
+            </a:solidFill>
+            <a:prstDash val="solid"/>
+          </a:ln>
+        </p:spPr>
+      </p:sp>
+      <p:sp>
+        <p:nvSpPr>
+          <p:cNvPr id="42" name="Shape 40"/>
+          <p:cNvSpPr/>
+          <p:nvPr/>
+        </p:nvSpPr>
+        <p:spPr>
+          <a:xfrm flipV="1">
+            <a:off x="5715000" y="2427732"/>
+            <a:ext cx="434340" cy="86868"/>
+          </a:xfrm>
+          <a:prstGeom prst="line">
+            <a:avLst/>
+          </a:prstGeom>
+          <a:noFill/>
+          <a:ln w="19050">
+            <a:solidFill>
+              <a:srgbClr val="6A4C93"/>
+            </a:solidFill>
+            <a:prstDash val="solid"/>
+          </a:ln>
+        </p:spPr>
+      </p:sp>
+      <p:sp>
+        <p:nvSpPr>
+          <p:cNvPr id="43" name="Shape 41"/>
+          <p:cNvSpPr/>
+          <p:nvPr/>
+        </p:nvSpPr>
+        <p:spPr>
+          <a:xfrm>
+            <a:off x="6110249" y="2388641"/>
+            <a:ext cx="78181" cy="78181"/>
+          </a:xfrm>
+          <a:prstGeom prst="ellipse">
+            <a:avLst/>
+          </a:prstGeom>
+          <a:solidFill>
+            <a:srgbClr val="6A4C93"/>
+          </a:solidFill>
+          <a:ln w="9525">
+            <a:solidFill>
+              <a:srgbClr val="6A4C93"/>
+            </a:solidFill>
+            <a:prstDash val="solid"/>
+          </a:ln>
+        </p:spPr>
+      </p:sp>
+      <p:sp>
+        <p:nvSpPr>
+          <p:cNvPr id="44" name="Shape 42"/>
+          <p:cNvSpPr/>
+          <p:nvPr/>
+        </p:nvSpPr>
+        <p:spPr>
+          <a:xfrm>
+            <a:off x="5715000" y="2514600"/>
+            <a:ext cx="434340" cy="86868"/>
+          </a:xfrm>
+          <a:prstGeom prst="line">
+            <a:avLst/>
+          </a:prstGeom>
+          <a:noFill/>
+          <a:ln w="19050">
+            <a:solidFill>
+              <a:srgbClr val="6A4C93"/>
+            </a:solidFill>
+            <a:prstDash val="solid"/>
+          </a:ln>
+        </p:spPr>
+      </p:sp>
+      <p:sp>
+        <p:nvSpPr>
+          <p:cNvPr id="45" name="Shape 43"/>
+          <p:cNvSpPr/>
+          <p:nvPr/>
+        </p:nvSpPr>
+        <p:spPr>
+          <a:xfrm>
+            <a:off x="6110249" y="2562377"/>
+            <a:ext cx="78181" cy="78181"/>
+          </a:xfrm>
+          <a:prstGeom prst="ellipse">
+            <a:avLst/>
+          </a:prstGeom>
+          <a:solidFill>
+            <a:srgbClr val="6A4C93"/>
+          </a:solidFill>
+          <a:ln w="9525">
+            <a:solidFill>
+              <a:srgbClr val="6A4C93"/>
+            </a:solidFill>
+            <a:prstDash val="solid"/>
+          </a:ln>
+        </p:spPr>
+      </p:sp>
+      <p:sp>
+        <p:nvSpPr>
+          <p:cNvPr id="46" name="Shape 44"/>
+          <p:cNvSpPr/>
+          <p:nvPr/>
+        </p:nvSpPr>
+        <p:spPr>
+          <a:xfrm>
+            <a:off x="5715000" y="2514600"/>
+            <a:ext cx="390906" cy="260604"/>
+          </a:xfrm>
+          <a:prstGeom prst="line">
+            <a:avLst/>
+          </a:prstGeom>
+          <a:noFill/>
+          <a:ln w="19050">
+            <a:solidFill>
+              <a:srgbClr val="6A4C93"/>
+            </a:solidFill>
+            <a:prstDash val="solid"/>
+          </a:ln>
+        </p:spPr>
+      </p:sp>
+      <p:sp>
+        <p:nvSpPr>
+          <p:cNvPr id="47" name="Shape 45"/>
+          <p:cNvSpPr/>
+          <p:nvPr/>
+        </p:nvSpPr>
+        <p:spPr>
+          <a:xfrm>
+            <a:off x="6066815" y="2736113"/>
+            <a:ext cx="78181" cy="78181"/>
+          </a:xfrm>
+          <a:prstGeom prst="ellipse">
+            <a:avLst/>
+          </a:prstGeom>
+          <a:solidFill>
+            <a:srgbClr val="6A4C93"/>
+          </a:solidFill>
+          <a:ln w="9525">
+            <a:solidFill>
+              <a:srgbClr val="6A4C93"/>
+            </a:solidFill>
+            <a:prstDash val="solid"/>
+          </a:ln>
+        </p:spPr>
+      </p:sp>
+      <p:sp>
+        <p:nvSpPr>
+          <p:cNvPr id="48" name="Shape 46"/>
+          <p:cNvSpPr/>
+          <p:nvPr/>
+        </p:nvSpPr>
+        <p:spPr>
+          <a:xfrm>
+            <a:off x="6172200" y="1965960"/>
+            <a:ext cx="566928" cy="1097280"/>
           </a:xfrm>
           <a:prstGeom prst="roundRect">
             <a:avLst>
-              <a:gd name="adj" fmla="val 50000"/>
+              <a:gd name="adj" fmla="val 12903"/>
             </a:avLst>
+          </a:prstGeom>
+          <a:solidFill>
+            <a:srgbClr val="F4B6B9"/>
+          </a:solidFill>
+          <a:ln w="15875">
+            <a:solidFill>
+              <a:srgbClr val="A33E48"/>
+            </a:solidFill>
+            <a:prstDash val="solid"/>
+          </a:ln>
+        </p:spPr>
+      </p:sp>
+      <p:sp>
+        <p:nvSpPr>
+          <p:cNvPr id="49" name="Shape 47"/>
+          <p:cNvSpPr/>
+          <p:nvPr/>
+        </p:nvSpPr>
+        <p:spPr>
+          <a:xfrm>
+            <a:off x="6217920" y="2148840"/>
+            <a:ext cx="475488" cy="91"/>
+          </a:xfrm>
+          <a:prstGeom prst="line">
+            <a:avLst/>
+          </a:prstGeom>
+          <a:noFill/>
+          <a:ln w="9525">
+            <a:solidFill>
+              <a:srgbClr val="C76A72"/>
+            </a:solidFill>
+            <a:prstDash val="solid"/>
+          </a:ln>
+        </p:spPr>
+      </p:sp>
+      <p:sp>
+        <p:nvSpPr>
+          <p:cNvPr id="50" name="Shape 48"/>
+          <p:cNvSpPr/>
+          <p:nvPr/>
+        </p:nvSpPr>
+        <p:spPr>
+          <a:xfrm>
+            <a:off x="6217920" y="2331720"/>
+            <a:ext cx="475488" cy="91"/>
+          </a:xfrm>
+          <a:prstGeom prst="line">
+            <a:avLst/>
+          </a:prstGeom>
+          <a:noFill/>
+          <a:ln w="9525">
+            <a:solidFill>
+              <a:srgbClr val="C76A72"/>
+            </a:solidFill>
+            <a:prstDash val="solid"/>
+          </a:ln>
+        </p:spPr>
+      </p:sp>
+      <p:sp>
+        <p:nvSpPr>
+          <p:cNvPr id="51" name="Shape 49"/>
+          <p:cNvSpPr/>
+          <p:nvPr/>
+        </p:nvSpPr>
+        <p:spPr>
+          <a:xfrm>
+            <a:off x="6217920" y="2514600"/>
+            <a:ext cx="475488" cy="91"/>
+          </a:xfrm>
+          <a:prstGeom prst="line">
+            <a:avLst/>
+          </a:prstGeom>
+          <a:noFill/>
+          <a:ln w="9525">
+            <a:solidFill>
+              <a:srgbClr val="C76A72"/>
+            </a:solidFill>
+            <a:prstDash val="solid"/>
+          </a:ln>
+        </p:spPr>
+      </p:sp>
+      <p:sp>
+        <p:nvSpPr>
+          <p:cNvPr id="52" name="Shape 50"/>
+          <p:cNvSpPr/>
+          <p:nvPr/>
+        </p:nvSpPr>
+        <p:spPr>
+          <a:xfrm>
+            <a:off x="6217920" y="2697480"/>
+            <a:ext cx="475488" cy="91"/>
+          </a:xfrm>
+          <a:prstGeom prst="line">
+            <a:avLst/>
+          </a:prstGeom>
+          <a:noFill/>
+          <a:ln w="9525">
+            <a:solidFill>
+              <a:srgbClr val="C76A72"/>
+            </a:solidFill>
+            <a:prstDash val="solid"/>
+          </a:ln>
+        </p:spPr>
+      </p:sp>
+      <p:sp>
+        <p:nvSpPr>
+          <p:cNvPr id="53" name="Shape 51"/>
+          <p:cNvSpPr/>
+          <p:nvPr/>
+        </p:nvSpPr>
+        <p:spPr>
+          <a:xfrm>
+            <a:off x="6217920" y="2880360"/>
+            <a:ext cx="475488" cy="91"/>
+          </a:xfrm>
+          <a:prstGeom prst="line">
+            <a:avLst/>
+          </a:prstGeom>
+          <a:noFill/>
+          <a:ln w="9525">
+            <a:solidFill>
+              <a:srgbClr val="C76A72"/>
+            </a:solidFill>
+            <a:prstDash val="solid"/>
+          </a:ln>
+        </p:spPr>
+      </p:sp>
+      <p:sp>
+        <p:nvSpPr>
+          <p:cNvPr id="54" name="Shape 52"/>
+          <p:cNvSpPr/>
+          <p:nvPr/>
+        </p:nvSpPr>
+        <p:spPr>
+          <a:xfrm>
+            <a:off x="2926080" y="2971800"/>
+            <a:ext cx="137160" cy="91"/>
+          </a:xfrm>
+          <a:prstGeom prst="line">
+            <a:avLst/>
+          </a:prstGeom>
+          <a:noFill/>
+          <a:ln w="25400">
+            <a:solidFill>
+              <a:srgbClr val="C8414C"/>
+            </a:solidFill>
+            <a:prstDash val="solid"/>
+            <a:tailEnd type="triangle"/>
+          </a:ln>
+        </p:spPr>
+      </p:sp>
+      <p:sp>
+        <p:nvSpPr>
+          <p:cNvPr id="55" name="Shape 53"/>
+          <p:cNvSpPr/>
+          <p:nvPr/>
+        </p:nvSpPr>
+        <p:spPr>
+          <a:xfrm>
+            <a:off x="4343400" y="2971800"/>
+            <a:ext cx="137160" cy="91"/>
+          </a:xfrm>
+          <a:prstGeom prst="line">
+            <a:avLst/>
+          </a:prstGeom>
+          <a:noFill/>
+          <a:ln w="25400">
+            <a:solidFill>
+              <a:srgbClr val="C8414C"/>
+            </a:solidFill>
+            <a:prstDash val="solid"/>
+            <a:tailEnd type="triangle"/>
+          </a:ln>
+        </p:spPr>
+      </p:sp>
+      <p:sp>
+        <p:nvSpPr>
+          <p:cNvPr id="56" name="Text 54"/>
+          <p:cNvSpPr/>
+          <p:nvPr/>
+        </p:nvSpPr>
+        <p:spPr>
+          <a:xfrm>
+            <a:off x="2743200" y="3044952"/>
+            <a:ext cx="2011680" cy="256032"/>
+          </a:xfrm>
+          <a:prstGeom prst="rect">
+            <a:avLst/>
+          </a:prstGeom>
+          <a:noFill/>
+          <a:ln/>
+        </p:spPr>
+        <p:txBody>
+          <a:bodyPr wrap="square" lIns="0" tIns="0" rIns="0" bIns="0" rtlCol="0" anchor="ctr"/>
+          <a:lstStyle/>
+          <a:p>
+            <a:pPr algn="ctr" indent="0" marL="0">
+              <a:buNone/>
+            </a:pPr>
+            <a:r>
+              <a:rPr lang="en-US" sz="1050" b="1" dirty="0">
+                <a:solidFill>
+                  <a:srgbClr val="C8414C"/>
+                </a:solidFill>
+                <a:latin typeface="Calibri" pitchFamily="34" charset="0"/>
+                <a:ea typeface="Calibri" pitchFamily="34" charset="-122"/>
+                <a:cs typeface="Calibri" pitchFamily="34" charset="-120"/>
+              </a:rPr>
+              <a:t>direction of impulse</a:t>
+            </a:r>
+            <a:endParaRPr lang="en-US" sz="1050" dirty="0"/>
+          </a:p>
+        </p:txBody>
+      </p:sp>
+      <p:sp>
+        <p:nvSpPr>
+          <p:cNvPr id="57" name="Text 55"/>
+          <p:cNvSpPr/>
+          <p:nvPr/>
+        </p:nvSpPr>
+        <p:spPr>
+          <a:xfrm>
+            <a:off x="548640" y="1298448"/>
+            <a:ext cx="1188720" cy="256032"/>
+          </a:xfrm>
+          <a:prstGeom prst="rect">
+            <a:avLst/>
+          </a:prstGeom>
+          <a:noFill/>
+          <a:ln/>
+        </p:spPr>
+        <p:txBody>
+          <a:bodyPr wrap="square" lIns="0" tIns="0" rIns="0" bIns="0" rtlCol="0" anchor="ctr"/>
+          <a:lstStyle/>
+          <a:p>
+            <a:pPr algn="l" indent="0" marL="0">
+              <a:buNone/>
+            </a:pPr>
+            <a:r>
+              <a:rPr lang="en-US" sz="1100" b="1" dirty="0">
+                <a:solidFill>
+                  <a:srgbClr val="262B3A"/>
+                </a:solidFill>
+                <a:latin typeface="Calibri" pitchFamily="34" charset="0"/>
+                <a:ea typeface="Calibri" pitchFamily="34" charset="-122"/>
+                <a:cs typeface="Calibri" pitchFamily="34" charset="-120"/>
+              </a:rPr>
+              <a:t>dendrites</a:t>
+            </a:r>
+            <a:endParaRPr lang="en-US" sz="1100" dirty="0"/>
+          </a:p>
+        </p:txBody>
+      </p:sp>
+      <p:sp>
+        <p:nvSpPr>
+          <p:cNvPr id="58" name="Shape 56"/>
+          <p:cNvSpPr/>
+          <p:nvPr/>
+        </p:nvSpPr>
+        <p:spPr>
+          <a:xfrm>
+            <a:off x="868680" y="1554480"/>
+            <a:ext cx="182880" cy="548640"/>
+          </a:xfrm>
+          <a:prstGeom prst="line">
+            <a:avLst/>
+          </a:prstGeom>
+          <a:noFill/>
+          <a:ln w="9525">
+            <a:solidFill>
+              <a:srgbClr val="5A6275"/>
+            </a:solidFill>
+            <a:prstDash val="solid"/>
+          </a:ln>
+        </p:spPr>
+      </p:sp>
+      <p:sp>
+        <p:nvSpPr>
+          <p:cNvPr id="59" name="Text 57"/>
+          <p:cNvSpPr/>
+          <p:nvPr/>
+        </p:nvSpPr>
+        <p:spPr>
+          <a:xfrm>
+            <a:off x="1874520" y="1298448"/>
+            <a:ext cx="1097280" cy="256032"/>
+          </a:xfrm>
+          <a:prstGeom prst="rect">
+            <a:avLst/>
+          </a:prstGeom>
+          <a:noFill/>
+          <a:ln/>
+        </p:spPr>
+        <p:txBody>
+          <a:bodyPr wrap="square" lIns="0" tIns="0" rIns="0" bIns="0" rtlCol="0" anchor="ctr"/>
+          <a:lstStyle/>
+          <a:p>
+            <a:pPr algn="l" indent="0" marL="0">
+              <a:buNone/>
+            </a:pPr>
+            <a:r>
+              <a:rPr lang="en-US" sz="1100" b="1" dirty="0">
+                <a:solidFill>
+                  <a:srgbClr val="262B3A"/>
+                </a:solidFill>
+                <a:latin typeface="Calibri" pitchFamily="34" charset="0"/>
+                <a:ea typeface="Calibri" pitchFamily="34" charset="-122"/>
+                <a:cs typeface="Calibri" pitchFamily="34" charset="-120"/>
+              </a:rPr>
+              <a:t>cell body</a:t>
+            </a:r>
+            <a:endParaRPr lang="en-US" sz="1100" dirty="0"/>
+          </a:p>
+        </p:txBody>
+      </p:sp>
+      <p:sp>
+        <p:nvSpPr>
+          <p:cNvPr id="60" name="Shape 58"/>
+          <p:cNvSpPr/>
+          <p:nvPr/>
+        </p:nvSpPr>
+        <p:spPr>
+          <a:xfrm flipH="1">
+            <a:off x="1810512" y="1554480"/>
+            <a:ext cx="292608" cy="731520"/>
+          </a:xfrm>
+          <a:prstGeom prst="line">
+            <a:avLst/>
+          </a:prstGeom>
+          <a:noFill/>
+          <a:ln w="9525">
+            <a:solidFill>
+              <a:srgbClr val="5A6275"/>
+            </a:solidFill>
+            <a:prstDash val="solid"/>
+          </a:ln>
+        </p:spPr>
+      </p:sp>
+      <p:sp>
+        <p:nvSpPr>
+          <p:cNvPr id="61" name="Text 59"/>
+          <p:cNvSpPr/>
+          <p:nvPr/>
+        </p:nvSpPr>
+        <p:spPr>
+          <a:xfrm>
+            <a:off x="548640" y="3429000"/>
+            <a:ext cx="1280160" cy="256032"/>
+          </a:xfrm>
+          <a:prstGeom prst="rect">
+            <a:avLst/>
+          </a:prstGeom>
+          <a:noFill/>
+          <a:ln/>
+        </p:spPr>
+        <p:txBody>
+          <a:bodyPr wrap="square" lIns="0" tIns="0" rIns="0" bIns="0" rtlCol="0" anchor="ctr"/>
+          <a:lstStyle/>
+          <a:p>
+            <a:pPr algn="l" indent="0" marL="0">
+              <a:buNone/>
+            </a:pPr>
+            <a:r>
+              <a:rPr lang="en-US" sz="1100" b="1" dirty="0">
+                <a:solidFill>
+                  <a:srgbClr val="262B3A"/>
+                </a:solidFill>
+                <a:latin typeface="Calibri" pitchFamily="34" charset="0"/>
+                <a:ea typeface="Calibri" pitchFamily="34" charset="-122"/>
+                <a:cs typeface="Calibri" pitchFamily="34" charset="-120"/>
+              </a:rPr>
+              <a:t>nucleus</a:t>
+            </a:r>
+            <a:endParaRPr lang="en-US" sz="1100" dirty="0"/>
+          </a:p>
+        </p:txBody>
+      </p:sp>
+      <p:sp>
+        <p:nvSpPr>
+          <p:cNvPr id="62" name="Shape 60"/>
+          <p:cNvSpPr/>
+          <p:nvPr/>
+        </p:nvSpPr>
+        <p:spPr>
+          <a:xfrm flipV="1">
+            <a:off x="1005840" y="2578608"/>
+            <a:ext cx="603504" cy="877824"/>
+          </a:xfrm>
+          <a:prstGeom prst="line">
+            <a:avLst/>
+          </a:prstGeom>
+          <a:noFill/>
+          <a:ln w="9525">
+            <a:solidFill>
+              <a:srgbClr val="5A6275"/>
+            </a:solidFill>
+            <a:prstDash val="solid"/>
+          </a:ln>
+        </p:spPr>
+      </p:sp>
+      <p:sp>
+        <p:nvSpPr>
+          <p:cNvPr id="63" name="Text 61"/>
+          <p:cNvSpPr/>
+          <p:nvPr/>
+        </p:nvSpPr>
+        <p:spPr>
+          <a:xfrm>
+            <a:off x="3017520" y="1298448"/>
+            <a:ext cx="2194560" cy="256032"/>
+          </a:xfrm>
+          <a:prstGeom prst="rect">
+            <a:avLst/>
+          </a:prstGeom>
+          <a:noFill/>
+          <a:ln/>
+        </p:spPr>
+        <p:txBody>
+          <a:bodyPr wrap="square" lIns="0" tIns="0" rIns="0" bIns="0" rtlCol="0" anchor="ctr"/>
+          <a:lstStyle/>
+          <a:p>
+            <a:pPr algn="l" indent="0" marL="0">
+              <a:buNone/>
+            </a:pPr>
+            <a:r>
+              <a:rPr lang="en-US" sz="1100" b="1" dirty="0">
+                <a:solidFill>
+                  <a:srgbClr val="262B3A"/>
+                </a:solidFill>
+                <a:latin typeface="Calibri" pitchFamily="34" charset="0"/>
+                <a:ea typeface="Calibri" pitchFamily="34" charset="-122"/>
+                <a:cs typeface="Calibri" pitchFamily="34" charset="-120"/>
+              </a:rPr>
+              <a:t>axon</a:t>
+            </a:r>
+            <a:r>
+              <a:rPr lang="en-US" sz="1100" dirty="0">
+                <a:solidFill>
+                  <a:srgbClr val="262B3A"/>
+                </a:solidFill>
+                <a:latin typeface="Calibri" pitchFamily="34" charset="0"/>
+                <a:ea typeface="Calibri" pitchFamily="34" charset="-122"/>
+                <a:cs typeface="Calibri" pitchFamily="34" charset="-120"/>
+              </a:rPr>
+              <a:t>: long, carries the impulse</a:t>
+            </a:r>
+            <a:endParaRPr lang="en-US" sz="1100" dirty="0"/>
+          </a:p>
+        </p:txBody>
+      </p:sp>
+      <p:sp>
+        <p:nvSpPr>
+          <p:cNvPr id="64" name="Shape 62"/>
+          <p:cNvSpPr/>
+          <p:nvPr/>
+        </p:nvSpPr>
+        <p:spPr>
+          <a:xfrm>
+            <a:off x="3200400" y="1554480"/>
+            <a:ext cx="91440" cy="941832"/>
+          </a:xfrm>
+          <a:prstGeom prst="line">
+            <a:avLst/>
+          </a:prstGeom>
+          <a:noFill/>
+          <a:ln w="9525">
+            <a:solidFill>
+              <a:srgbClr val="5A6275"/>
+            </a:solidFill>
+            <a:prstDash val="solid"/>
+          </a:ln>
+        </p:spPr>
+      </p:sp>
+      <p:sp>
+        <p:nvSpPr>
+          <p:cNvPr id="65" name="Text 63"/>
+          <p:cNvSpPr/>
+          <p:nvPr/>
+        </p:nvSpPr>
+        <p:spPr>
+          <a:xfrm>
+            <a:off x="3703320" y="1691640"/>
+            <a:ext cx="2377440" cy="256032"/>
+          </a:xfrm>
+          <a:prstGeom prst="rect">
+            <a:avLst/>
+          </a:prstGeom>
+          <a:noFill/>
+          <a:ln/>
+        </p:spPr>
+        <p:txBody>
+          <a:bodyPr wrap="square" lIns="0" tIns="0" rIns="0" bIns="0" rtlCol="0" anchor="ctr"/>
+          <a:lstStyle/>
+          <a:p>
+            <a:pPr algn="l" indent="0" marL="0">
+              <a:buNone/>
+            </a:pPr>
+            <a:r>
+              <a:rPr lang="en-US" sz="1100" b="1" dirty="0">
+                <a:solidFill>
+                  <a:srgbClr val="262B3A"/>
+                </a:solidFill>
+                <a:latin typeface="Calibri" pitchFamily="34" charset="0"/>
+                <a:ea typeface="Calibri" pitchFamily="34" charset="-122"/>
+                <a:cs typeface="Calibri" pitchFamily="34" charset="-120"/>
+              </a:rPr>
+              <a:t>myelin sheath</a:t>
+            </a:r>
+            <a:r>
+              <a:rPr lang="en-US" sz="1100" dirty="0">
+                <a:solidFill>
+                  <a:srgbClr val="262B3A"/>
+                </a:solidFill>
+                <a:latin typeface="Calibri" pitchFamily="34" charset="0"/>
+                <a:ea typeface="Calibri" pitchFamily="34" charset="-122"/>
+                <a:cs typeface="Calibri" pitchFamily="34" charset="-120"/>
+              </a:rPr>
+              <a:t>: fatty insulating layer</a:t>
+            </a:r>
+            <a:endParaRPr lang="en-US" sz="1100" dirty="0"/>
+          </a:p>
+        </p:txBody>
+      </p:sp>
+      <p:sp>
+        <p:nvSpPr>
+          <p:cNvPr id="66" name="Shape 64"/>
+          <p:cNvSpPr/>
+          <p:nvPr/>
+        </p:nvSpPr>
+        <p:spPr>
+          <a:xfrm>
+            <a:off x="4023360" y="1938528"/>
+            <a:ext cx="91440" cy="484632"/>
+          </a:xfrm>
+          <a:prstGeom prst="line">
+            <a:avLst/>
+          </a:prstGeom>
+          <a:noFill/>
+          <a:ln w="9525">
+            <a:solidFill>
+              <a:srgbClr val="5A6275"/>
+            </a:solidFill>
+            <a:prstDash val="solid"/>
+          </a:ln>
+        </p:spPr>
+      </p:sp>
+      <p:sp>
+        <p:nvSpPr>
+          <p:cNvPr id="67" name="Text 65"/>
+          <p:cNvSpPr/>
+          <p:nvPr/>
+        </p:nvSpPr>
+        <p:spPr>
+          <a:xfrm>
+            <a:off x="5074920" y="3154680"/>
+            <a:ext cx="1280160" cy="256032"/>
+          </a:xfrm>
+          <a:prstGeom prst="rect">
+            <a:avLst/>
+          </a:prstGeom>
+          <a:noFill/>
+          <a:ln/>
+        </p:spPr>
+        <p:txBody>
+          <a:bodyPr wrap="square" lIns="0" tIns="0" rIns="0" bIns="0" rtlCol="0" anchor="ctr"/>
+          <a:lstStyle/>
+          <a:p>
+            <a:pPr algn="l" indent="0" marL="0">
+              <a:buNone/>
+            </a:pPr>
+            <a:r>
+              <a:rPr lang="en-US" sz="1100" b="1" dirty="0">
+                <a:solidFill>
+                  <a:srgbClr val="262B3A"/>
+                </a:solidFill>
+                <a:latin typeface="Calibri" pitchFamily="34" charset="0"/>
+                <a:ea typeface="Calibri" pitchFamily="34" charset="-122"/>
+                <a:cs typeface="Calibri" pitchFamily="34" charset="-120"/>
+              </a:rPr>
+              <a:t>axon terminals</a:t>
+            </a:r>
+            <a:endParaRPr lang="en-US" sz="1100" dirty="0"/>
+          </a:p>
+        </p:txBody>
+      </p:sp>
+      <p:sp>
+        <p:nvSpPr>
+          <p:cNvPr id="68" name="Shape 66"/>
+          <p:cNvSpPr/>
+          <p:nvPr/>
+        </p:nvSpPr>
+        <p:spPr>
+          <a:xfrm flipV="1">
+            <a:off x="5760720" y="2788920"/>
+            <a:ext cx="228600" cy="365760"/>
+          </a:xfrm>
+          <a:prstGeom prst="line">
+            <a:avLst/>
+          </a:prstGeom>
+          <a:noFill/>
+          <a:ln w="9525">
+            <a:solidFill>
+              <a:srgbClr val="5A6275"/>
+            </a:solidFill>
+            <a:prstDash val="solid"/>
+          </a:ln>
+        </p:spPr>
+      </p:sp>
+      <p:sp>
+        <p:nvSpPr>
+          <p:cNvPr id="69" name="Text 67"/>
+          <p:cNvSpPr/>
+          <p:nvPr/>
+        </p:nvSpPr>
+        <p:spPr>
+          <a:xfrm>
+            <a:off x="5989320" y="1600200"/>
+            <a:ext cx="1051560" cy="365760"/>
+          </a:xfrm>
+          <a:prstGeom prst="rect">
+            <a:avLst/>
+          </a:prstGeom>
+          <a:noFill/>
+          <a:ln/>
+        </p:spPr>
+        <p:txBody>
+          <a:bodyPr wrap="square" lIns="0" tIns="0" rIns="0" bIns="0" rtlCol="0" anchor="ctr"/>
+          <a:lstStyle/>
+          <a:p>
+            <a:pPr algn="ctr" indent="0" marL="0">
+              <a:buNone/>
+            </a:pPr>
+            <a:r>
+              <a:rPr lang="en-US" sz="1050" b="1" dirty="0">
+                <a:solidFill>
+                  <a:srgbClr val="262B3A"/>
+                </a:solidFill>
+                <a:latin typeface="Calibri" pitchFamily="34" charset="0"/>
+                <a:ea typeface="Calibri" pitchFamily="34" charset="-122"/>
+                <a:cs typeface="Calibri" pitchFamily="34" charset="-120"/>
+              </a:rPr>
+              <a:t>effector</a:t>
+            </a:r>
+            <a:r>
+              <a:rPr lang="en-US" sz="1050" dirty="0">
+                <a:solidFill>
+                  <a:srgbClr val="262B3A"/>
+                </a:solidFill>
+                <a:latin typeface="Calibri" pitchFamily="34" charset="0"/>
+                <a:ea typeface="Calibri" pitchFamily="34" charset="-122"/>
+                <a:cs typeface="Calibri" pitchFamily="34" charset="-120"/>
+              </a:rPr>
+              <a:t> (muscle)</a:t>
+            </a:r>
+            <a:endParaRPr lang="en-US" sz="1050" dirty="0"/>
+          </a:p>
+        </p:txBody>
+      </p:sp>
+      <p:sp>
+        <p:nvSpPr>
+          <p:cNvPr id="70" name="Shape 68"/>
+          <p:cNvSpPr/>
+          <p:nvPr/>
+        </p:nvSpPr>
+        <p:spPr>
+          <a:xfrm>
+            <a:off x="594360" y="3886200"/>
+            <a:ext cx="6309360" cy="1417320"/>
+          </a:xfrm>
+          <a:prstGeom prst="roundRect">
+            <a:avLst>
+              <a:gd name="adj" fmla="val 3226"/>
+            </a:avLst>
+          </a:prstGeom>
+          <a:solidFill>
+            <a:srgbClr val="FFFFFF"/>
+          </a:solidFill>
+          <a:ln w="12700">
+            <a:solidFill>
+              <a:srgbClr val="CFE0DE"/>
+            </a:solidFill>
+            <a:prstDash val="solid"/>
+          </a:ln>
+        </p:spPr>
+      </p:sp>
+      <p:sp>
+        <p:nvSpPr>
+          <p:cNvPr id="71" name="Shape 69"/>
+          <p:cNvSpPr/>
+          <p:nvPr/>
+        </p:nvSpPr>
+        <p:spPr>
+          <a:xfrm>
+            <a:off x="777240" y="4041648"/>
+            <a:ext cx="1097280" cy="1097280"/>
+          </a:xfrm>
+          <a:prstGeom prst="ellipse">
+            <a:avLst/>
+          </a:prstGeom>
+          <a:solidFill>
+            <a:srgbClr val="F6F0E0"/>
+          </a:solidFill>
+          <a:ln w="19050">
+            <a:solidFill>
+              <a:srgbClr val="8A6D3B"/>
+            </a:solidFill>
+            <a:prstDash val="solid"/>
+          </a:ln>
+        </p:spPr>
+      </p:sp>
+      <p:sp>
+        <p:nvSpPr>
+          <p:cNvPr id="72" name="Shape 70"/>
+          <p:cNvSpPr/>
+          <p:nvPr/>
+        </p:nvSpPr>
+        <p:spPr>
+          <a:xfrm>
+            <a:off x="1216152" y="4480560"/>
+            <a:ext cx="219456" cy="219456"/>
+          </a:xfrm>
+          <a:prstGeom prst="ellipse">
+            <a:avLst/>
           </a:prstGeom>
           <a:solidFill>
             <a:srgbClr val="FBE3A6"/>
@@ -44139,37 +45234,14 @@
       </p:sp>
       <p:sp>
         <p:nvSpPr>
-          <p:cNvPr id="41" name="Shape 39"/>
-          <p:cNvSpPr/>
-          <p:nvPr/>
-        </p:nvSpPr>
-        <p:spPr>
-          <a:xfrm flipV="1">
-            <a:off x="5715000" y="2253996"/>
-            <a:ext cx="390906" cy="260604"/>
-          </a:xfrm>
-          <a:prstGeom prst="line">
-            <a:avLst/>
-          </a:prstGeom>
-          <a:noFill/>
-          <a:ln w="19050">
-            <a:solidFill>
-              <a:srgbClr val="6A4C93"/>
-            </a:solidFill>
-            <a:prstDash val="solid"/>
-          </a:ln>
-        </p:spPr>
-      </p:sp>
-      <p:sp>
-        <p:nvSpPr>
-          <p:cNvPr id="42" name="Shape 40"/>
-          <p:cNvSpPr/>
-          <p:nvPr/>
-        </p:nvSpPr>
-        <p:spPr>
-          <a:xfrm>
-            <a:off x="6066815" y="2214905"/>
-            <a:ext cx="78181" cy="78181"/>
+          <p:cNvPr id="73" name="Shape 71"/>
+          <p:cNvSpPr/>
+          <p:nvPr/>
+        </p:nvSpPr>
+        <p:spPr>
+          <a:xfrm>
+            <a:off x="1289304" y="4553712"/>
+            <a:ext cx="73152" cy="73152"/>
           </a:xfrm>
           <a:prstGeom prst="ellipse">
             <a:avLst/>
@@ -44187,37 +45259,39 @@
       </p:sp>
       <p:sp>
         <p:nvSpPr>
-          <p:cNvPr id="43" name="Shape 41"/>
-          <p:cNvSpPr/>
-          <p:nvPr/>
-        </p:nvSpPr>
-        <p:spPr>
-          <a:xfrm flipV="1">
-            <a:off x="5715000" y="2427732"/>
-            <a:ext cx="434340" cy="86868"/>
-          </a:xfrm>
-          <a:prstGeom prst="line">
-            <a:avLst/>
-          </a:prstGeom>
-          <a:noFill/>
-          <a:ln w="19050">
-            <a:solidFill>
-              <a:srgbClr val="6A4C93"/>
-            </a:solidFill>
-            <a:prstDash val="solid"/>
-          </a:ln>
-        </p:spPr>
-      </p:sp>
-      <p:sp>
-        <p:nvSpPr>
-          <p:cNvPr id="44" name="Shape 42"/>
-          <p:cNvSpPr/>
-          <p:nvPr/>
-        </p:nvSpPr>
-        <p:spPr>
-          <a:xfrm>
-            <a:off x="6110249" y="2388641"/>
-            <a:ext cx="78181" cy="78181"/>
+          <p:cNvPr id="74" name="Shape 72"/>
+          <p:cNvSpPr/>
+          <p:nvPr/>
+        </p:nvSpPr>
+        <p:spPr>
+          <a:xfrm>
+            <a:off x="1490472" y="4315968"/>
+            <a:ext cx="219456" cy="219456"/>
+          </a:xfrm>
+          <a:prstGeom prst="ellipse">
+            <a:avLst/>
+          </a:prstGeom>
+          <a:solidFill>
+            <a:srgbClr val="FBE3A6"/>
+          </a:solidFill>
+          <a:ln w="9525">
+            <a:solidFill>
+              <a:srgbClr val="C9A04A"/>
+            </a:solidFill>
+            <a:prstDash val="solid"/>
+          </a:ln>
+        </p:spPr>
+      </p:sp>
+      <p:sp>
+        <p:nvSpPr>
+          <p:cNvPr id="75" name="Shape 73"/>
+          <p:cNvSpPr/>
+          <p:nvPr/>
+        </p:nvSpPr>
+        <p:spPr>
+          <a:xfrm>
+            <a:off x="1563624" y="4389120"/>
+            <a:ext cx="73152" cy="73152"/>
           </a:xfrm>
           <a:prstGeom prst="ellipse">
             <a:avLst/>
@@ -44235,37 +45309,39 @@
       </p:sp>
       <p:sp>
         <p:nvSpPr>
-          <p:cNvPr id="45" name="Shape 43"/>
-          <p:cNvSpPr/>
-          <p:nvPr/>
-        </p:nvSpPr>
-        <p:spPr>
-          <a:xfrm>
-            <a:off x="5715000" y="2514600"/>
-            <a:ext cx="434340" cy="86868"/>
-          </a:xfrm>
-          <a:prstGeom prst="line">
-            <a:avLst/>
-          </a:prstGeom>
-          <a:noFill/>
-          <a:ln w="19050">
-            <a:solidFill>
-              <a:srgbClr val="6A4C93"/>
-            </a:solidFill>
-            <a:prstDash val="solid"/>
-          </a:ln>
-        </p:spPr>
-      </p:sp>
-      <p:sp>
-        <p:nvSpPr>
-          <p:cNvPr id="46" name="Shape 44"/>
-          <p:cNvSpPr/>
-          <p:nvPr/>
-        </p:nvSpPr>
-        <p:spPr>
-          <a:xfrm>
-            <a:off x="6110249" y="2562377"/>
-            <a:ext cx="78181" cy="78181"/>
+          <p:cNvPr id="76" name="Shape 74"/>
+          <p:cNvSpPr/>
+          <p:nvPr/>
+        </p:nvSpPr>
+        <p:spPr>
+          <a:xfrm>
+            <a:off x="941832" y="4334256"/>
+            <a:ext cx="219456" cy="219456"/>
+          </a:xfrm>
+          <a:prstGeom prst="ellipse">
+            <a:avLst/>
+          </a:prstGeom>
+          <a:solidFill>
+            <a:srgbClr val="FBE3A6"/>
+          </a:solidFill>
+          <a:ln w="9525">
+            <a:solidFill>
+              <a:srgbClr val="C9A04A"/>
+            </a:solidFill>
+            <a:prstDash val="solid"/>
+          </a:ln>
+        </p:spPr>
+      </p:sp>
+      <p:sp>
+        <p:nvSpPr>
+          <p:cNvPr id="77" name="Shape 75"/>
+          <p:cNvSpPr/>
+          <p:nvPr/>
+        </p:nvSpPr>
+        <p:spPr>
+          <a:xfrm>
+            <a:off x="1014984" y="4407408"/>
+            <a:ext cx="73152" cy="73152"/>
           </a:xfrm>
           <a:prstGeom prst="ellipse">
             <a:avLst/>
@@ -44283,37 +45359,39 @@
       </p:sp>
       <p:sp>
         <p:nvSpPr>
-          <p:cNvPr id="47" name="Shape 45"/>
-          <p:cNvSpPr/>
-          <p:nvPr/>
-        </p:nvSpPr>
-        <p:spPr>
-          <a:xfrm>
-            <a:off x="5715000" y="2514600"/>
-            <a:ext cx="390906" cy="260604"/>
-          </a:xfrm>
-          <a:prstGeom prst="line">
-            <a:avLst/>
-          </a:prstGeom>
-          <a:noFill/>
-          <a:ln w="19050">
-            <a:solidFill>
-              <a:srgbClr val="6A4C93"/>
-            </a:solidFill>
-            <a:prstDash val="solid"/>
-          </a:ln>
-        </p:spPr>
-      </p:sp>
-      <p:sp>
-        <p:nvSpPr>
-          <p:cNvPr id="48" name="Shape 46"/>
-          <p:cNvSpPr/>
-          <p:nvPr/>
-        </p:nvSpPr>
-        <p:spPr>
-          <a:xfrm>
-            <a:off x="6066815" y="2736113"/>
-            <a:ext cx="78181" cy="78181"/>
+          <p:cNvPr id="78" name="Shape 76"/>
+          <p:cNvSpPr/>
+          <p:nvPr/>
+        </p:nvSpPr>
+        <p:spPr>
+          <a:xfrm>
+            <a:off x="1472184" y="4663440"/>
+            <a:ext cx="219456" cy="219456"/>
+          </a:xfrm>
+          <a:prstGeom prst="ellipse">
+            <a:avLst/>
+          </a:prstGeom>
+          <a:solidFill>
+            <a:srgbClr val="FBE3A6"/>
+          </a:solidFill>
+          <a:ln w="9525">
+            <a:solidFill>
+              <a:srgbClr val="C9A04A"/>
+            </a:solidFill>
+            <a:prstDash val="solid"/>
+          </a:ln>
+        </p:spPr>
+      </p:sp>
+      <p:sp>
+        <p:nvSpPr>
+          <p:cNvPr id="79" name="Shape 77"/>
+          <p:cNvSpPr/>
+          <p:nvPr/>
+        </p:nvSpPr>
+        <p:spPr>
+          <a:xfrm>
+            <a:off x="1545336" y="4736592"/>
+            <a:ext cx="73152" cy="73152"/>
           </a:xfrm>
           <a:prstGeom prst="ellipse">
             <a:avLst/>
@@ -44331,738 +45409,13 @@
       </p:sp>
       <p:sp>
         <p:nvSpPr>
-          <p:cNvPr id="49" name="Shape 47"/>
-          <p:cNvSpPr/>
-          <p:nvPr/>
-        </p:nvSpPr>
-        <p:spPr>
-          <a:xfrm>
-            <a:off x="6172200" y="1965960"/>
-            <a:ext cx="566928" cy="1097280"/>
-          </a:xfrm>
-          <a:prstGeom prst="roundRect">
-            <a:avLst>
-              <a:gd name="adj" fmla="val 12903"/>
-            </a:avLst>
-          </a:prstGeom>
-          <a:solidFill>
-            <a:srgbClr val="F4B6B9"/>
-          </a:solidFill>
-          <a:ln w="15875">
-            <a:solidFill>
-              <a:srgbClr val="A33E48"/>
-            </a:solidFill>
-            <a:prstDash val="solid"/>
-          </a:ln>
-        </p:spPr>
-      </p:sp>
-      <p:sp>
-        <p:nvSpPr>
-          <p:cNvPr id="50" name="Shape 48"/>
-          <p:cNvSpPr/>
-          <p:nvPr/>
-        </p:nvSpPr>
-        <p:spPr>
-          <a:xfrm>
-            <a:off x="6217920" y="2148840"/>
-            <a:ext cx="475488" cy="91"/>
-          </a:xfrm>
-          <a:prstGeom prst="line">
-            <a:avLst/>
-          </a:prstGeom>
-          <a:noFill/>
-          <a:ln w="9525">
-            <a:solidFill>
-              <a:srgbClr val="C76A72"/>
-            </a:solidFill>
-            <a:prstDash val="solid"/>
-          </a:ln>
-        </p:spPr>
-      </p:sp>
-      <p:sp>
-        <p:nvSpPr>
-          <p:cNvPr id="51" name="Shape 49"/>
-          <p:cNvSpPr/>
-          <p:nvPr/>
-        </p:nvSpPr>
-        <p:spPr>
-          <a:xfrm>
-            <a:off x="6217920" y="2331720"/>
-            <a:ext cx="475488" cy="91"/>
-          </a:xfrm>
-          <a:prstGeom prst="line">
-            <a:avLst/>
-          </a:prstGeom>
-          <a:noFill/>
-          <a:ln w="9525">
-            <a:solidFill>
-              <a:srgbClr val="C76A72"/>
-            </a:solidFill>
-            <a:prstDash val="solid"/>
-          </a:ln>
-        </p:spPr>
-      </p:sp>
-      <p:sp>
-        <p:nvSpPr>
-          <p:cNvPr id="52" name="Shape 50"/>
-          <p:cNvSpPr/>
-          <p:nvPr/>
-        </p:nvSpPr>
-        <p:spPr>
-          <a:xfrm>
-            <a:off x="6217920" y="2514600"/>
-            <a:ext cx="475488" cy="91"/>
-          </a:xfrm>
-          <a:prstGeom prst="line">
-            <a:avLst/>
-          </a:prstGeom>
-          <a:noFill/>
-          <a:ln w="9525">
-            <a:solidFill>
-              <a:srgbClr val="C76A72"/>
-            </a:solidFill>
-            <a:prstDash val="solid"/>
-          </a:ln>
-        </p:spPr>
-      </p:sp>
-      <p:sp>
-        <p:nvSpPr>
-          <p:cNvPr id="53" name="Shape 51"/>
-          <p:cNvSpPr/>
-          <p:nvPr/>
-        </p:nvSpPr>
-        <p:spPr>
-          <a:xfrm>
-            <a:off x="6217920" y="2697480"/>
-            <a:ext cx="475488" cy="91"/>
-          </a:xfrm>
-          <a:prstGeom prst="line">
-            <a:avLst/>
-          </a:prstGeom>
-          <a:noFill/>
-          <a:ln w="9525">
-            <a:solidFill>
-              <a:srgbClr val="C76A72"/>
-            </a:solidFill>
-            <a:prstDash val="solid"/>
-          </a:ln>
-        </p:spPr>
-      </p:sp>
-      <p:sp>
-        <p:nvSpPr>
-          <p:cNvPr id="54" name="Shape 52"/>
-          <p:cNvSpPr/>
-          <p:nvPr/>
-        </p:nvSpPr>
-        <p:spPr>
-          <a:xfrm>
-            <a:off x="6217920" y="2880360"/>
-            <a:ext cx="475488" cy="91"/>
-          </a:xfrm>
-          <a:prstGeom prst="line">
-            <a:avLst/>
-          </a:prstGeom>
-          <a:noFill/>
-          <a:ln w="9525">
-            <a:solidFill>
-              <a:srgbClr val="C76A72"/>
-            </a:solidFill>
-            <a:prstDash val="solid"/>
-          </a:ln>
-        </p:spPr>
-      </p:sp>
-      <p:sp>
-        <p:nvSpPr>
-          <p:cNvPr id="55" name="Shape 53"/>
-          <p:cNvSpPr/>
-          <p:nvPr/>
-        </p:nvSpPr>
-        <p:spPr>
-          <a:xfrm>
-            <a:off x="2926080" y="2971800"/>
-            <a:ext cx="137160" cy="91"/>
-          </a:xfrm>
-          <a:prstGeom prst="line">
-            <a:avLst/>
-          </a:prstGeom>
-          <a:noFill/>
-          <a:ln w="25400">
-            <a:solidFill>
-              <a:srgbClr val="C8414C"/>
-            </a:solidFill>
-            <a:prstDash val="solid"/>
-            <a:tailEnd type="triangle"/>
-          </a:ln>
-        </p:spPr>
-      </p:sp>
-      <p:sp>
-        <p:nvSpPr>
-          <p:cNvPr id="56" name="Shape 54"/>
-          <p:cNvSpPr/>
-          <p:nvPr/>
-        </p:nvSpPr>
-        <p:spPr>
-          <a:xfrm>
-            <a:off x="4343400" y="2971800"/>
-            <a:ext cx="137160" cy="91"/>
-          </a:xfrm>
-          <a:prstGeom prst="line">
-            <a:avLst/>
-          </a:prstGeom>
-          <a:noFill/>
-          <a:ln w="25400">
-            <a:solidFill>
-              <a:srgbClr val="C8414C"/>
-            </a:solidFill>
-            <a:prstDash val="solid"/>
-            <a:tailEnd type="triangle"/>
-          </a:ln>
-        </p:spPr>
-      </p:sp>
-      <p:sp>
-        <p:nvSpPr>
-          <p:cNvPr id="57" name="Text 55"/>
-          <p:cNvSpPr/>
-          <p:nvPr/>
-        </p:nvSpPr>
-        <p:spPr>
-          <a:xfrm>
-            <a:off x="2743200" y="3044952"/>
-            <a:ext cx="2011680" cy="256032"/>
-          </a:xfrm>
-          <a:prstGeom prst="rect">
-            <a:avLst/>
-          </a:prstGeom>
-          <a:noFill/>
-          <a:ln/>
-        </p:spPr>
-        <p:txBody>
-          <a:bodyPr wrap="square" lIns="0" tIns="0" rIns="0" bIns="0" rtlCol="0" anchor="ctr"/>
-          <a:lstStyle/>
-          <a:p>
-            <a:pPr algn="ctr" indent="0" marL="0">
-              <a:buNone/>
-            </a:pPr>
-            <a:r>
-              <a:rPr lang="en-US" sz="1050" b="1" dirty="0">
-                <a:solidFill>
-                  <a:srgbClr val="C8414C"/>
-                </a:solidFill>
-                <a:latin typeface="Calibri" pitchFamily="34" charset="0"/>
-                <a:ea typeface="Calibri" pitchFamily="34" charset="-122"/>
-                <a:cs typeface="Calibri" pitchFamily="34" charset="-120"/>
-              </a:rPr>
-              <a:t>direction of impulse</a:t>
-            </a:r>
-            <a:endParaRPr lang="en-US" sz="1050" dirty="0"/>
-          </a:p>
-        </p:txBody>
-      </p:sp>
-      <p:sp>
-        <p:nvSpPr>
-          <p:cNvPr id="58" name="Text 56"/>
-          <p:cNvSpPr/>
-          <p:nvPr/>
-        </p:nvSpPr>
-        <p:spPr>
-          <a:xfrm>
-            <a:off x="502920" y="1298448"/>
-            <a:ext cx="1188720" cy="256032"/>
-          </a:xfrm>
-          <a:prstGeom prst="rect">
-            <a:avLst/>
-          </a:prstGeom>
-          <a:noFill/>
-          <a:ln/>
-        </p:spPr>
-        <p:txBody>
-          <a:bodyPr wrap="square" lIns="0" tIns="0" rIns="0" bIns="0" rtlCol="0" anchor="ctr"/>
-          <a:lstStyle/>
-          <a:p>
-            <a:pPr algn="l" indent="0" marL="0">
-              <a:buNone/>
-            </a:pPr>
-            <a:r>
-              <a:rPr lang="en-US" sz="1100" b="1" dirty="0">
-                <a:solidFill>
-                  <a:srgbClr val="262B3A"/>
-                </a:solidFill>
-                <a:latin typeface="Calibri" pitchFamily="34" charset="0"/>
-                <a:ea typeface="Calibri" pitchFamily="34" charset="-122"/>
-                <a:cs typeface="Calibri" pitchFamily="34" charset="-120"/>
-              </a:rPr>
-              <a:t>dendrites</a:t>
-            </a:r>
-            <a:endParaRPr lang="en-US" sz="1100" dirty="0"/>
-          </a:p>
-        </p:txBody>
-      </p:sp>
-      <p:sp>
-        <p:nvSpPr>
-          <p:cNvPr id="59" name="Shape 57"/>
-          <p:cNvSpPr/>
-          <p:nvPr/>
-        </p:nvSpPr>
-        <p:spPr>
-          <a:xfrm flipH="1">
-            <a:off x="731520" y="1554480"/>
-            <a:ext cx="137160" cy="457200"/>
-          </a:xfrm>
-          <a:prstGeom prst="line">
-            <a:avLst/>
-          </a:prstGeom>
-          <a:noFill/>
-          <a:ln w="9525">
-            <a:solidFill>
-              <a:srgbClr val="5A6275"/>
-            </a:solidFill>
-            <a:prstDash val="solid"/>
-          </a:ln>
-        </p:spPr>
-      </p:sp>
-      <p:sp>
-        <p:nvSpPr>
-          <p:cNvPr id="60" name="Text 58"/>
-          <p:cNvSpPr/>
-          <p:nvPr/>
-        </p:nvSpPr>
-        <p:spPr>
-          <a:xfrm>
-            <a:off x="1463040" y="1298448"/>
-            <a:ext cx="1463040" cy="256032"/>
-          </a:xfrm>
-          <a:prstGeom prst="rect">
-            <a:avLst/>
-          </a:prstGeom>
-          <a:noFill/>
-          <a:ln/>
-        </p:spPr>
-        <p:txBody>
-          <a:bodyPr wrap="square" lIns="0" tIns="0" rIns="0" bIns="0" rtlCol="0" anchor="ctr"/>
-          <a:lstStyle/>
-          <a:p>
-            <a:pPr algn="l" indent="0" marL="0">
-              <a:buNone/>
-            </a:pPr>
-            <a:r>
-              <a:rPr lang="en-US" sz="1100" b="1" dirty="0">
-                <a:solidFill>
-                  <a:srgbClr val="262B3A"/>
-                </a:solidFill>
-                <a:latin typeface="Calibri" pitchFamily="34" charset="0"/>
-                <a:ea typeface="Calibri" pitchFamily="34" charset="-122"/>
-                <a:cs typeface="Calibri" pitchFamily="34" charset="-120"/>
-              </a:rPr>
-              <a:t>cell body</a:t>
-            </a:r>
-            <a:endParaRPr lang="en-US" sz="1100" dirty="0"/>
-          </a:p>
-        </p:txBody>
-      </p:sp>
-      <p:sp>
-        <p:nvSpPr>
-          <p:cNvPr id="61" name="Shape 59"/>
-          <p:cNvSpPr/>
-          <p:nvPr/>
-        </p:nvSpPr>
-        <p:spPr>
-          <a:xfrm flipH="1">
-            <a:off x="1371600" y="1554480"/>
-            <a:ext cx="320040" cy="713232"/>
-          </a:xfrm>
-          <a:prstGeom prst="line">
-            <a:avLst/>
-          </a:prstGeom>
-          <a:noFill/>
-          <a:ln w="9525">
-            <a:solidFill>
-              <a:srgbClr val="5A6275"/>
-            </a:solidFill>
-            <a:prstDash val="solid"/>
-          </a:ln>
-        </p:spPr>
-      </p:sp>
-      <p:sp>
-        <p:nvSpPr>
-          <p:cNvPr id="62" name="Text 60"/>
-          <p:cNvSpPr/>
-          <p:nvPr/>
-        </p:nvSpPr>
-        <p:spPr>
-          <a:xfrm>
-            <a:off x="502920" y="3429000"/>
-            <a:ext cx="1280160" cy="256032"/>
-          </a:xfrm>
-          <a:prstGeom prst="rect">
-            <a:avLst/>
-          </a:prstGeom>
-          <a:noFill/>
-          <a:ln/>
-        </p:spPr>
-        <p:txBody>
-          <a:bodyPr wrap="square" lIns="0" tIns="0" rIns="0" bIns="0" rtlCol="0" anchor="ctr"/>
-          <a:lstStyle/>
-          <a:p>
-            <a:pPr algn="l" indent="0" marL="0">
-              <a:buNone/>
-            </a:pPr>
-            <a:r>
-              <a:rPr lang="en-US" sz="1100" b="1" dirty="0">
-                <a:solidFill>
-                  <a:srgbClr val="262B3A"/>
-                </a:solidFill>
-                <a:latin typeface="Calibri" pitchFamily="34" charset="0"/>
-                <a:ea typeface="Calibri" pitchFamily="34" charset="-122"/>
-                <a:cs typeface="Calibri" pitchFamily="34" charset="-120"/>
-              </a:rPr>
-              <a:t>nucleus</a:t>
-            </a:r>
-            <a:endParaRPr lang="en-US" sz="1100" dirty="0"/>
-          </a:p>
-        </p:txBody>
-      </p:sp>
-      <p:sp>
-        <p:nvSpPr>
-          <p:cNvPr id="63" name="Shape 61"/>
-          <p:cNvSpPr/>
-          <p:nvPr/>
-        </p:nvSpPr>
-        <p:spPr>
-          <a:xfrm flipV="1">
-            <a:off x="914400" y="2578608"/>
-            <a:ext cx="301752" cy="850392"/>
-          </a:xfrm>
-          <a:prstGeom prst="line">
-            <a:avLst/>
-          </a:prstGeom>
-          <a:noFill/>
-          <a:ln w="9525">
-            <a:solidFill>
-              <a:srgbClr val="5A6275"/>
-            </a:solidFill>
-            <a:prstDash val="solid"/>
-          </a:ln>
-        </p:spPr>
-      </p:sp>
-      <p:sp>
-        <p:nvSpPr>
-          <p:cNvPr id="64" name="Text 62"/>
-          <p:cNvSpPr/>
-          <p:nvPr/>
-        </p:nvSpPr>
-        <p:spPr>
-          <a:xfrm>
-            <a:off x="3017520" y="1298448"/>
-            <a:ext cx="2194560" cy="256032"/>
-          </a:xfrm>
-          <a:prstGeom prst="rect">
-            <a:avLst/>
-          </a:prstGeom>
-          <a:noFill/>
-          <a:ln/>
-        </p:spPr>
-        <p:txBody>
-          <a:bodyPr wrap="square" lIns="0" tIns="0" rIns="0" bIns="0" rtlCol="0" anchor="ctr"/>
-          <a:lstStyle/>
-          <a:p>
-            <a:pPr algn="l" indent="0" marL="0">
-              <a:buNone/>
-            </a:pPr>
-            <a:r>
-              <a:rPr lang="en-US" sz="1100" b="1" dirty="0">
-                <a:solidFill>
-                  <a:srgbClr val="262B3A"/>
-                </a:solidFill>
-                <a:latin typeface="Calibri" pitchFamily="34" charset="0"/>
-                <a:ea typeface="Calibri" pitchFamily="34" charset="-122"/>
-                <a:cs typeface="Calibri" pitchFamily="34" charset="-120"/>
-              </a:rPr>
-              <a:t>axon</a:t>
-            </a:r>
-            <a:r>
-              <a:rPr lang="en-US" sz="1100" dirty="0">
-                <a:solidFill>
-                  <a:srgbClr val="262B3A"/>
-                </a:solidFill>
-                <a:latin typeface="Calibri" pitchFamily="34" charset="0"/>
-                <a:ea typeface="Calibri" pitchFamily="34" charset="-122"/>
-                <a:cs typeface="Calibri" pitchFamily="34" charset="-120"/>
-              </a:rPr>
-              <a:t>: long, carries the impulse</a:t>
-            </a:r>
-            <a:endParaRPr lang="en-US" sz="1100" dirty="0"/>
-          </a:p>
-        </p:txBody>
-      </p:sp>
-      <p:sp>
-        <p:nvSpPr>
-          <p:cNvPr id="65" name="Shape 63"/>
-          <p:cNvSpPr/>
-          <p:nvPr/>
-        </p:nvSpPr>
-        <p:spPr>
-          <a:xfrm>
-            <a:off x="3200400" y="1554480"/>
-            <a:ext cx="91440" cy="941832"/>
-          </a:xfrm>
-          <a:prstGeom prst="line">
-            <a:avLst/>
-          </a:prstGeom>
-          <a:noFill/>
-          <a:ln w="9525">
-            <a:solidFill>
-              <a:srgbClr val="5A6275"/>
-            </a:solidFill>
-            <a:prstDash val="solid"/>
-          </a:ln>
-        </p:spPr>
-      </p:sp>
-      <p:sp>
-        <p:nvSpPr>
-          <p:cNvPr id="66" name="Text 64"/>
-          <p:cNvSpPr/>
-          <p:nvPr/>
-        </p:nvSpPr>
-        <p:spPr>
-          <a:xfrm>
-            <a:off x="3703320" y="1691640"/>
-            <a:ext cx="2377440" cy="256032"/>
-          </a:xfrm>
-          <a:prstGeom prst="rect">
-            <a:avLst/>
-          </a:prstGeom>
-          <a:noFill/>
-          <a:ln/>
-        </p:spPr>
-        <p:txBody>
-          <a:bodyPr wrap="square" lIns="0" tIns="0" rIns="0" bIns="0" rtlCol="0" anchor="ctr"/>
-          <a:lstStyle/>
-          <a:p>
-            <a:pPr algn="l" indent="0" marL="0">
-              <a:buNone/>
-            </a:pPr>
-            <a:r>
-              <a:rPr lang="en-US" sz="1100" b="1" dirty="0">
-                <a:solidFill>
-                  <a:srgbClr val="262B3A"/>
-                </a:solidFill>
-                <a:latin typeface="Calibri" pitchFamily="34" charset="0"/>
-                <a:ea typeface="Calibri" pitchFamily="34" charset="-122"/>
-                <a:cs typeface="Calibri" pitchFamily="34" charset="-120"/>
-              </a:rPr>
-              <a:t>myelin sheath</a:t>
-            </a:r>
-            <a:r>
-              <a:rPr lang="en-US" sz="1100" dirty="0">
-                <a:solidFill>
-                  <a:srgbClr val="262B3A"/>
-                </a:solidFill>
-                <a:latin typeface="Calibri" pitchFamily="34" charset="0"/>
-                <a:ea typeface="Calibri" pitchFamily="34" charset="-122"/>
-                <a:cs typeface="Calibri" pitchFamily="34" charset="-120"/>
-              </a:rPr>
-              <a:t>: fatty insulating layer</a:t>
-            </a:r>
-            <a:endParaRPr lang="en-US" sz="1100" dirty="0"/>
-          </a:p>
-        </p:txBody>
-      </p:sp>
-      <p:sp>
-        <p:nvSpPr>
-          <p:cNvPr id="67" name="Shape 65"/>
-          <p:cNvSpPr/>
-          <p:nvPr/>
-        </p:nvSpPr>
-        <p:spPr>
-          <a:xfrm>
-            <a:off x="4023360" y="1938528"/>
-            <a:ext cx="91440" cy="484632"/>
-          </a:xfrm>
-          <a:prstGeom prst="line">
-            <a:avLst/>
-          </a:prstGeom>
-          <a:noFill/>
-          <a:ln w="9525">
-            <a:solidFill>
-              <a:srgbClr val="5A6275"/>
-            </a:solidFill>
-            <a:prstDash val="solid"/>
-          </a:ln>
-        </p:spPr>
-      </p:sp>
-      <p:sp>
-        <p:nvSpPr>
-          <p:cNvPr id="68" name="Text 66"/>
-          <p:cNvSpPr/>
-          <p:nvPr/>
-        </p:nvSpPr>
-        <p:spPr>
-          <a:xfrm>
-            <a:off x="5074920" y="3154680"/>
-            <a:ext cx="1280160" cy="256032"/>
-          </a:xfrm>
-          <a:prstGeom prst="rect">
-            <a:avLst/>
-          </a:prstGeom>
-          <a:noFill/>
-          <a:ln/>
-        </p:spPr>
-        <p:txBody>
-          <a:bodyPr wrap="square" lIns="0" tIns="0" rIns="0" bIns="0" rtlCol="0" anchor="ctr"/>
-          <a:lstStyle/>
-          <a:p>
-            <a:pPr algn="l" indent="0" marL="0">
-              <a:buNone/>
-            </a:pPr>
-            <a:r>
-              <a:rPr lang="en-US" sz="1100" b="1" dirty="0">
-                <a:solidFill>
-                  <a:srgbClr val="262B3A"/>
-                </a:solidFill>
-                <a:latin typeface="Calibri" pitchFamily="34" charset="0"/>
-                <a:ea typeface="Calibri" pitchFamily="34" charset="-122"/>
-                <a:cs typeface="Calibri" pitchFamily="34" charset="-120"/>
-              </a:rPr>
-              <a:t>axon terminals</a:t>
-            </a:r>
-            <a:endParaRPr lang="en-US" sz="1100" dirty="0"/>
-          </a:p>
-        </p:txBody>
-      </p:sp>
-      <p:sp>
-        <p:nvSpPr>
-          <p:cNvPr id="69" name="Shape 67"/>
-          <p:cNvSpPr/>
-          <p:nvPr/>
-        </p:nvSpPr>
-        <p:spPr>
-          <a:xfrm flipV="1">
-            <a:off x="5760720" y="2788920"/>
-            <a:ext cx="228600" cy="365760"/>
-          </a:xfrm>
-          <a:prstGeom prst="line">
-            <a:avLst/>
-          </a:prstGeom>
-          <a:noFill/>
-          <a:ln w="9525">
-            <a:solidFill>
-              <a:srgbClr val="5A6275"/>
-            </a:solidFill>
-            <a:prstDash val="solid"/>
-          </a:ln>
-        </p:spPr>
-      </p:sp>
-      <p:sp>
-        <p:nvSpPr>
-          <p:cNvPr id="70" name="Text 68"/>
-          <p:cNvSpPr/>
-          <p:nvPr/>
-        </p:nvSpPr>
-        <p:spPr>
-          <a:xfrm>
-            <a:off x="5989320" y="1600200"/>
-            <a:ext cx="1051560" cy="365760"/>
-          </a:xfrm>
-          <a:prstGeom prst="rect">
-            <a:avLst/>
-          </a:prstGeom>
-          <a:noFill/>
-          <a:ln/>
-        </p:spPr>
-        <p:txBody>
-          <a:bodyPr wrap="square" lIns="0" tIns="0" rIns="0" bIns="0" rtlCol="0" anchor="ctr"/>
-          <a:lstStyle/>
-          <a:p>
-            <a:pPr algn="ctr" indent="0" marL="0">
-              <a:buNone/>
-            </a:pPr>
-            <a:r>
-              <a:rPr lang="en-US" sz="1050" b="1" dirty="0">
-                <a:solidFill>
-                  <a:srgbClr val="262B3A"/>
-                </a:solidFill>
-                <a:latin typeface="Calibri" pitchFamily="34" charset="0"/>
-                <a:ea typeface="Calibri" pitchFamily="34" charset="-122"/>
-                <a:cs typeface="Calibri" pitchFamily="34" charset="-120"/>
-              </a:rPr>
-              <a:t>effector</a:t>
-            </a:r>
-            <a:r>
-              <a:rPr lang="en-US" sz="1050" dirty="0">
-                <a:solidFill>
-                  <a:srgbClr val="262B3A"/>
-                </a:solidFill>
-                <a:latin typeface="Calibri" pitchFamily="34" charset="0"/>
-                <a:ea typeface="Calibri" pitchFamily="34" charset="-122"/>
-                <a:cs typeface="Calibri" pitchFamily="34" charset="-120"/>
-              </a:rPr>
-              <a:t> (muscle)</a:t>
-            </a:r>
-            <a:endParaRPr lang="en-US" sz="1050" dirty="0"/>
-          </a:p>
-        </p:txBody>
-      </p:sp>
-      <p:sp>
-        <p:nvSpPr>
-          <p:cNvPr id="71" name="Shape 69"/>
-          <p:cNvSpPr/>
-          <p:nvPr/>
-        </p:nvSpPr>
-        <p:spPr>
-          <a:xfrm>
-            <a:off x="594360" y="3886200"/>
-            <a:ext cx="6309360" cy="1417320"/>
-          </a:xfrm>
-          <a:prstGeom prst="roundRect">
-            <a:avLst>
-              <a:gd name="adj" fmla="val 3226"/>
-            </a:avLst>
-          </a:prstGeom>
-          <a:solidFill>
-            <a:srgbClr val="FFFFFF"/>
-          </a:solidFill>
-          <a:ln w="12700">
-            <a:solidFill>
-              <a:srgbClr val="CFE0DE"/>
-            </a:solidFill>
-            <a:prstDash val="solid"/>
-          </a:ln>
-        </p:spPr>
-      </p:sp>
-      <p:sp>
-        <p:nvSpPr>
-          <p:cNvPr id="72" name="Shape 70"/>
-          <p:cNvSpPr/>
-          <p:nvPr/>
-        </p:nvSpPr>
-        <p:spPr>
-          <a:xfrm>
-            <a:off x="777240" y="4041648"/>
-            <a:ext cx="1097280" cy="1097280"/>
-          </a:xfrm>
-          <a:prstGeom prst="ellipse">
-            <a:avLst/>
-          </a:prstGeom>
-          <a:solidFill>
-            <a:srgbClr val="F6F0E0"/>
-          </a:solidFill>
-          <a:ln w="19050">
-            <a:solidFill>
-              <a:srgbClr val="8A6D3B"/>
-            </a:solidFill>
-            <a:prstDash val="solid"/>
-          </a:ln>
-        </p:spPr>
-      </p:sp>
-      <p:sp>
-        <p:nvSpPr>
-          <p:cNvPr id="73" name="Shape 71"/>
-          <p:cNvSpPr/>
-          <p:nvPr/>
-        </p:nvSpPr>
-        <p:spPr>
-          <a:xfrm>
-            <a:off x="1216152" y="4480560"/>
+          <p:cNvPr id="80" name="Shape 78"/>
+          <p:cNvSpPr/>
+          <p:nvPr/>
+        </p:nvSpPr>
+        <p:spPr>
+          <a:xfrm>
+            <a:off x="960120" y="4681728"/>
             <a:ext cx="219456" cy="219456"/>
           </a:xfrm>
           <a:prstGeom prst="ellipse">
@@ -45081,13 +45434,13 @@
       </p:sp>
       <p:sp>
         <p:nvSpPr>
-          <p:cNvPr id="74" name="Shape 72"/>
-          <p:cNvSpPr/>
-          <p:nvPr/>
-        </p:nvSpPr>
-        <p:spPr>
-          <a:xfrm>
-            <a:off x="1289304" y="4553712"/>
+          <p:cNvPr id="81" name="Shape 79"/>
+          <p:cNvSpPr/>
+          <p:nvPr/>
+        </p:nvSpPr>
+        <p:spPr>
+          <a:xfrm>
+            <a:off x="1033272" y="4754880"/>
             <a:ext cx="73152" cy="73152"/>
           </a:xfrm>
           <a:prstGeom prst="ellipse">
@@ -45106,13 +45459,13 @@
       </p:sp>
       <p:sp>
         <p:nvSpPr>
-          <p:cNvPr id="75" name="Shape 73"/>
-          <p:cNvSpPr/>
-          <p:nvPr/>
-        </p:nvSpPr>
-        <p:spPr>
-          <a:xfrm>
-            <a:off x="1490472" y="4315968"/>
+          <p:cNvPr id="82" name="Shape 80"/>
+          <p:cNvSpPr/>
+          <p:nvPr/>
+        </p:nvSpPr>
+        <p:spPr>
+          <a:xfrm>
+            <a:off x="1234440" y="4809744"/>
             <a:ext cx="219456" cy="219456"/>
           </a:xfrm>
           <a:prstGeom prst="ellipse">
@@ -45131,13 +45484,13 @@
       </p:sp>
       <p:sp>
         <p:nvSpPr>
-          <p:cNvPr id="76" name="Shape 74"/>
-          <p:cNvSpPr/>
-          <p:nvPr/>
-        </p:nvSpPr>
-        <p:spPr>
-          <a:xfrm>
-            <a:off x="1563624" y="4389120"/>
+          <p:cNvPr id="83" name="Shape 81"/>
+          <p:cNvSpPr/>
+          <p:nvPr/>
+        </p:nvSpPr>
+        <p:spPr>
+          <a:xfrm>
+            <a:off x="1307592" y="4882896"/>
             <a:ext cx="73152" cy="73152"/>
           </a:xfrm>
           <a:prstGeom prst="ellipse">
@@ -45156,13 +45509,13 @@
       </p:sp>
       <p:sp>
         <p:nvSpPr>
-          <p:cNvPr id="77" name="Shape 75"/>
-          <p:cNvSpPr/>
-          <p:nvPr/>
-        </p:nvSpPr>
-        <p:spPr>
-          <a:xfrm>
-            <a:off x="941832" y="4334256"/>
+          <p:cNvPr id="84" name="Shape 82"/>
+          <p:cNvSpPr/>
+          <p:nvPr/>
+        </p:nvSpPr>
+        <p:spPr>
+          <a:xfrm>
+            <a:off x="1234440" y="4151376"/>
             <a:ext cx="219456" cy="219456"/>
           </a:xfrm>
           <a:prstGeom prst="ellipse">
@@ -45181,13 +45534,13 @@
       </p:sp>
       <p:sp>
         <p:nvSpPr>
-          <p:cNvPr id="78" name="Shape 76"/>
-          <p:cNvSpPr/>
-          <p:nvPr/>
-        </p:nvSpPr>
-        <p:spPr>
-          <a:xfrm>
-            <a:off x="1014984" y="4407408"/>
+          <p:cNvPr id="85" name="Shape 83"/>
+          <p:cNvSpPr/>
+          <p:nvPr/>
+        </p:nvSpPr>
+        <p:spPr>
+          <a:xfrm>
+            <a:off x="1307592" y="4224528"/>
             <a:ext cx="73152" cy="73152"/>
           </a:xfrm>
           <a:prstGeom prst="ellipse">
@@ -45206,13 +45559,13 @@
       </p:sp>
       <p:sp>
         <p:nvSpPr>
-          <p:cNvPr id="79" name="Shape 77"/>
-          <p:cNvSpPr/>
-          <p:nvPr/>
-        </p:nvSpPr>
-        <p:spPr>
-          <a:xfrm>
-            <a:off x="1472184" y="4663440"/>
+          <p:cNvPr id="86" name="Shape 84"/>
+          <p:cNvSpPr/>
+          <p:nvPr/>
+        </p:nvSpPr>
+        <p:spPr>
+          <a:xfrm>
+            <a:off x="1581912" y="4498848"/>
             <a:ext cx="219456" cy="219456"/>
           </a:xfrm>
           <a:prstGeom prst="ellipse">
@@ -45231,13 +45584,13 @@
       </p:sp>
       <p:sp>
         <p:nvSpPr>
-          <p:cNvPr id="80" name="Shape 78"/>
-          <p:cNvSpPr/>
-          <p:nvPr/>
-        </p:nvSpPr>
-        <p:spPr>
-          <a:xfrm>
-            <a:off x="1545336" y="4736592"/>
+          <p:cNvPr id="87" name="Shape 85"/>
+          <p:cNvSpPr/>
+          <p:nvPr/>
+        </p:nvSpPr>
+        <p:spPr>
+          <a:xfrm>
+            <a:off x="1655064" y="4572000"/>
             <a:ext cx="73152" cy="73152"/>
           </a:xfrm>
           <a:prstGeom prst="ellipse">
@@ -45256,13 +45609,13 @@
       </p:sp>
       <p:sp>
         <p:nvSpPr>
-          <p:cNvPr id="81" name="Shape 79"/>
-          <p:cNvSpPr/>
-          <p:nvPr/>
-        </p:nvSpPr>
-        <p:spPr>
-          <a:xfrm>
-            <a:off x="960120" y="4681728"/>
+          <p:cNvPr id="88" name="Shape 86"/>
+          <p:cNvSpPr/>
+          <p:nvPr/>
+        </p:nvSpPr>
+        <p:spPr>
+          <a:xfrm>
+            <a:off x="850392" y="4507992"/>
             <a:ext cx="219456" cy="219456"/>
           </a:xfrm>
           <a:prstGeom prst="ellipse">
@@ -45281,13 +45634,13 @@
       </p:sp>
       <p:sp>
         <p:nvSpPr>
-          <p:cNvPr id="82" name="Shape 80"/>
-          <p:cNvSpPr/>
-          <p:nvPr/>
-        </p:nvSpPr>
-        <p:spPr>
-          <a:xfrm>
-            <a:off x="1033272" y="4754880"/>
+          <p:cNvPr id="89" name="Shape 87"/>
+          <p:cNvSpPr/>
+          <p:nvPr/>
+        </p:nvSpPr>
+        <p:spPr>
+          <a:xfrm>
+            <a:off x="923544" y="4581144"/>
             <a:ext cx="73152" cy="73152"/>
           </a:xfrm>
           <a:prstGeom prst="ellipse">
@@ -45306,207 +45659,7 @@
       </p:sp>
       <p:sp>
         <p:nvSpPr>
-          <p:cNvPr id="83" name="Shape 81"/>
-          <p:cNvSpPr/>
-          <p:nvPr/>
-        </p:nvSpPr>
-        <p:spPr>
-          <a:xfrm>
-            <a:off x="1234440" y="4809744"/>
-            <a:ext cx="219456" cy="219456"/>
-          </a:xfrm>
-          <a:prstGeom prst="ellipse">
-            <a:avLst/>
-          </a:prstGeom>
-          <a:solidFill>
-            <a:srgbClr val="FBE3A6"/>
-          </a:solidFill>
-          <a:ln w="9525">
-            <a:solidFill>
-              <a:srgbClr val="C9A04A"/>
-            </a:solidFill>
-            <a:prstDash val="solid"/>
-          </a:ln>
-        </p:spPr>
-      </p:sp>
-      <p:sp>
-        <p:nvSpPr>
-          <p:cNvPr id="84" name="Shape 82"/>
-          <p:cNvSpPr/>
-          <p:nvPr/>
-        </p:nvSpPr>
-        <p:spPr>
-          <a:xfrm>
-            <a:off x="1307592" y="4882896"/>
-            <a:ext cx="73152" cy="73152"/>
-          </a:xfrm>
-          <a:prstGeom prst="ellipse">
-            <a:avLst/>
-          </a:prstGeom>
-          <a:solidFill>
-            <a:srgbClr val="6A4C93"/>
-          </a:solidFill>
-          <a:ln w="9525">
-            <a:solidFill>
-              <a:srgbClr val="6A4C93"/>
-            </a:solidFill>
-            <a:prstDash val="solid"/>
-          </a:ln>
-        </p:spPr>
-      </p:sp>
-      <p:sp>
-        <p:nvSpPr>
-          <p:cNvPr id="85" name="Shape 83"/>
-          <p:cNvSpPr/>
-          <p:nvPr/>
-        </p:nvSpPr>
-        <p:spPr>
-          <a:xfrm>
-            <a:off x="1234440" y="4151376"/>
-            <a:ext cx="219456" cy="219456"/>
-          </a:xfrm>
-          <a:prstGeom prst="ellipse">
-            <a:avLst/>
-          </a:prstGeom>
-          <a:solidFill>
-            <a:srgbClr val="FBE3A6"/>
-          </a:solidFill>
-          <a:ln w="9525">
-            <a:solidFill>
-              <a:srgbClr val="C9A04A"/>
-            </a:solidFill>
-            <a:prstDash val="solid"/>
-          </a:ln>
-        </p:spPr>
-      </p:sp>
-      <p:sp>
-        <p:nvSpPr>
-          <p:cNvPr id="86" name="Shape 84"/>
-          <p:cNvSpPr/>
-          <p:nvPr/>
-        </p:nvSpPr>
-        <p:spPr>
-          <a:xfrm>
-            <a:off x="1307592" y="4224528"/>
-            <a:ext cx="73152" cy="73152"/>
-          </a:xfrm>
-          <a:prstGeom prst="ellipse">
-            <a:avLst/>
-          </a:prstGeom>
-          <a:solidFill>
-            <a:srgbClr val="6A4C93"/>
-          </a:solidFill>
-          <a:ln w="9525">
-            <a:solidFill>
-              <a:srgbClr val="6A4C93"/>
-            </a:solidFill>
-            <a:prstDash val="solid"/>
-          </a:ln>
-        </p:spPr>
-      </p:sp>
-      <p:sp>
-        <p:nvSpPr>
-          <p:cNvPr id="87" name="Shape 85"/>
-          <p:cNvSpPr/>
-          <p:nvPr/>
-        </p:nvSpPr>
-        <p:spPr>
-          <a:xfrm>
-            <a:off x="1581912" y="4498848"/>
-            <a:ext cx="219456" cy="219456"/>
-          </a:xfrm>
-          <a:prstGeom prst="ellipse">
-            <a:avLst/>
-          </a:prstGeom>
-          <a:solidFill>
-            <a:srgbClr val="FBE3A6"/>
-          </a:solidFill>
-          <a:ln w="9525">
-            <a:solidFill>
-              <a:srgbClr val="C9A04A"/>
-            </a:solidFill>
-            <a:prstDash val="solid"/>
-          </a:ln>
-        </p:spPr>
-      </p:sp>
-      <p:sp>
-        <p:nvSpPr>
-          <p:cNvPr id="88" name="Shape 86"/>
-          <p:cNvSpPr/>
-          <p:nvPr/>
-        </p:nvSpPr>
-        <p:spPr>
-          <a:xfrm>
-            <a:off x="1655064" y="4572000"/>
-            <a:ext cx="73152" cy="73152"/>
-          </a:xfrm>
-          <a:prstGeom prst="ellipse">
-            <a:avLst/>
-          </a:prstGeom>
-          <a:solidFill>
-            <a:srgbClr val="6A4C93"/>
-          </a:solidFill>
-          <a:ln w="9525">
-            <a:solidFill>
-              <a:srgbClr val="6A4C93"/>
-            </a:solidFill>
-            <a:prstDash val="solid"/>
-          </a:ln>
-        </p:spPr>
-      </p:sp>
-      <p:sp>
-        <p:nvSpPr>
-          <p:cNvPr id="89" name="Shape 87"/>
-          <p:cNvSpPr/>
-          <p:nvPr/>
-        </p:nvSpPr>
-        <p:spPr>
-          <a:xfrm>
-            <a:off x="850392" y="4507992"/>
-            <a:ext cx="219456" cy="219456"/>
-          </a:xfrm>
-          <a:prstGeom prst="ellipse">
-            <a:avLst/>
-          </a:prstGeom>
-          <a:solidFill>
-            <a:srgbClr val="FBE3A6"/>
-          </a:solidFill>
-          <a:ln w="9525">
-            <a:solidFill>
-              <a:srgbClr val="C9A04A"/>
-            </a:solidFill>
-            <a:prstDash val="solid"/>
-          </a:ln>
-        </p:spPr>
-      </p:sp>
-      <p:sp>
-        <p:nvSpPr>
-          <p:cNvPr id="90" name="Shape 88"/>
-          <p:cNvSpPr/>
-          <p:nvPr/>
-        </p:nvSpPr>
-        <p:spPr>
-          <a:xfrm>
-            <a:off x="923544" y="4581144"/>
-            <a:ext cx="73152" cy="73152"/>
-          </a:xfrm>
-          <a:prstGeom prst="ellipse">
-            <a:avLst/>
-          </a:prstGeom>
-          <a:solidFill>
-            <a:srgbClr val="6A4C93"/>
-          </a:solidFill>
-          <a:ln w="9525">
-            <a:solidFill>
-              <a:srgbClr val="6A4C93"/>
-            </a:solidFill>
-            <a:prstDash val="solid"/>
-          </a:ln>
-        </p:spPr>
-      </p:sp>
-      <p:sp>
-        <p:nvSpPr>
-          <p:cNvPr id="91" name="Text 89"/>
+          <p:cNvPr id="90" name="Text 88"/>
           <p:cNvSpPr/>
           <p:nvPr/>
         </p:nvSpPr>
@@ -45556,7 +45709,7 @@
       </p:sp>
       <p:sp>
         <p:nvSpPr>
-          <p:cNvPr id="92" name="Text 90"/>
+          <p:cNvPr id="91" name="Text 89"/>
           <p:cNvSpPr/>
           <p:nvPr/>
         </p:nvSpPr>
@@ -45617,7 +45770,7 @@
       </p:sp>
       <p:sp>
         <p:nvSpPr>
-          <p:cNvPr id="93" name="Shape 91"/>
+          <p:cNvPr id="92" name="Shape 90"/>
           <p:cNvSpPr/>
           <p:nvPr/>
         </p:nvSpPr>
@@ -45644,7 +45797,7 @@
       </p:sp>
       <p:sp>
         <p:nvSpPr>
-          <p:cNvPr id="94" name="Text 92"/>
+          <p:cNvPr id="93" name="Text 91"/>
           <p:cNvSpPr/>
           <p:nvPr/>
         </p:nvSpPr>
@@ -45683,7 +45836,7 @@
       </p:sp>
       <p:sp>
         <p:nvSpPr>
-          <p:cNvPr id="95" name="Text 93"/>
+          <p:cNvPr id="94" name="Text 92"/>
           <p:cNvSpPr/>
           <p:nvPr/>
         </p:nvSpPr>
@@ -45710,7 +45863,7 @@
               <a:buChar char="▪"/>
             </a:pPr>
             <a:r>
-              <a:rPr lang="en-US" sz="1050" b="1" dirty="0">
+              <a:rPr lang="en-US" sz="1150" b="1" dirty="0">
                 <a:solidFill>
                   <a:srgbClr val="262B3A"/>
                 </a:solidFill>
@@ -45721,7 +45874,7 @@
               <a:t>Dendrites</a:t>
             </a:r>
             <a:r>
-              <a:rPr lang="en-US" sz="1050" dirty="0">
+              <a:rPr lang="en-US" sz="1150" dirty="0">
                 <a:solidFill>
                   <a:srgbClr val="262B3A"/>
                 </a:solidFill>
@@ -45731,7 +45884,7 @@
               </a:rPr>
               <a:t>: many branches receive impulses from other neurones.</a:t>
             </a:r>
-            <a:endParaRPr lang="en-US" sz="1050" dirty="0"/>
+            <a:endParaRPr lang="en-US" sz="1150" dirty="0"/>
           </a:p>
           <a:p>
             <a:pPr marL="152400" indent="-152400">
@@ -45742,7 +45895,7 @@
               <a:buChar char="▪"/>
             </a:pPr>
             <a:r>
-              <a:rPr lang="en-US" sz="1050" b="1" dirty="0">
+              <a:rPr lang="en-US" sz="1150" b="1" dirty="0">
                 <a:solidFill>
                   <a:srgbClr val="262B3A"/>
                 </a:solidFill>
@@ -45753,7 +45906,7 @@
               <a:t>Cell body</a:t>
             </a:r>
             <a:r>
-              <a:rPr lang="en-US" sz="1050" dirty="0">
+              <a:rPr lang="en-US" sz="1150" dirty="0">
                 <a:solidFill>
                   <a:srgbClr val="262B3A"/>
                 </a:solidFill>
@@ -45764,7 +45917,7 @@
               <a:t>: contains the </a:t>
             </a:r>
             <a:r>
-              <a:rPr lang="en-US" sz="1050" b="1" dirty="0">
+              <a:rPr lang="en-US" sz="1150" b="1" dirty="0">
                 <a:solidFill>
                   <a:srgbClr val="262B3A"/>
                 </a:solidFill>
@@ -45775,7 +45928,7 @@
               <a:t>nucleus</a:t>
             </a:r>
             <a:r>
-              <a:rPr lang="en-US" sz="1050" dirty="0">
+              <a:rPr lang="en-US" sz="1150" dirty="0">
                 <a:solidFill>
                   <a:srgbClr val="262B3A"/>
                 </a:solidFill>
@@ -45785,7 +45938,7 @@
               </a:rPr>
               <a:t> and most organelles.</a:t>
             </a:r>
-            <a:endParaRPr lang="en-US" sz="1050" dirty="0"/>
+            <a:endParaRPr lang="en-US" sz="1150" dirty="0"/>
           </a:p>
           <a:p>
             <a:pPr marL="152400" indent="-152400">
@@ -45796,7 +45949,7 @@
               <a:buChar char="▪"/>
             </a:pPr>
             <a:r>
-              <a:rPr lang="en-US" sz="1050" b="1" dirty="0">
+              <a:rPr lang="en-US" sz="1150" b="1" dirty="0">
                 <a:solidFill>
                   <a:srgbClr val="262B3A"/>
                 </a:solidFill>
@@ -45807,7 +45960,7 @@
               <a:t>Axon</a:t>
             </a:r>
             <a:r>
-              <a:rPr lang="en-US" sz="1050" dirty="0">
+              <a:rPr lang="en-US" sz="1150" dirty="0">
                 <a:solidFill>
                   <a:srgbClr val="262B3A"/>
                 </a:solidFill>
@@ -45818,7 +45971,7 @@
               <a:t>: long, thin extension that carries impulses </a:t>
             </a:r>
             <a:r>
-              <a:rPr lang="en-US" sz="1050" b="1" dirty="0">
+              <a:rPr lang="en-US" sz="1150" b="1" dirty="0">
                 <a:solidFill>
                   <a:srgbClr val="262B3A"/>
                 </a:solidFill>
@@ -45829,7 +45982,7 @@
               <a:t>away</a:t>
             </a:r>
             <a:r>
-              <a:rPr lang="en-US" sz="1050" dirty="0">
+              <a:rPr lang="en-US" sz="1150" dirty="0">
                 <a:solidFill>
                   <a:srgbClr val="262B3A"/>
                 </a:solidFill>
@@ -45839,7 +45992,7 @@
               </a:rPr>
               <a:t> from the cell body.</a:t>
             </a:r>
-            <a:endParaRPr lang="en-US" sz="1050" dirty="0"/>
+            <a:endParaRPr lang="en-US" sz="1150" dirty="0"/>
           </a:p>
           <a:p>
             <a:pPr marL="152400" indent="-152400">
@@ -45850,7 +46003,7 @@
               <a:buChar char="▪"/>
             </a:pPr>
             <a:r>
-              <a:rPr lang="en-US" sz="1050" b="1" dirty="0">
+              <a:rPr lang="en-US" sz="1150" b="1" dirty="0">
                 <a:solidFill>
                   <a:srgbClr val="262B3A"/>
                 </a:solidFill>
@@ -45861,7 +46014,7 @@
               <a:t>Myelin sheath</a:t>
             </a:r>
             <a:r>
-              <a:rPr lang="en-US" sz="1050" dirty="0">
+              <a:rPr lang="en-US" sz="1150" dirty="0">
                 <a:solidFill>
                   <a:srgbClr val="262B3A"/>
                 </a:solidFill>
@@ -45872,7 +46025,7 @@
               <a:t>: insulates the axon so the impulse travels </a:t>
             </a:r>
             <a:r>
-              <a:rPr lang="en-US" sz="1050" b="1" dirty="0">
+              <a:rPr lang="en-US" sz="1150" b="1" dirty="0">
                 <a:solidFill>
                   <a:srgbClr val="262B3A"/>
                 </a:solidFill>
@@ -45883,7 +46036,7 @@
               <a:t>faster</a:t>
             </a:r>
             <a:r>
-              <a:rPr lang="en-US" sz="1050" dirty="0">
+              <a:rPr lang="en-US" sz="1150" dirty="0">
                 <a:solidFill>
                   <a:srgbClr val="262B3A"/>
                 </a:solidFill>
@@ -45893,7 +46046,7 @@
               </a:rPr>
               <a:t>.</a:t>
             </a:r>
-            <a:endParaRPr lang="en-US" sz="1050" dirty="0"/>
+            <a:endParaRPr lang="en-US" sz="1150" dirty="0"/>
           </a:p>
           <a:p>
             <a:pPr marL="152400" indent="-152400">
@@ -45904,7 +46057,7 @@
               <a:buChar char="▪"/>
             </a:pPr>
             <a:r>
-              <a:rPr lang="en-US" sz="1050" b="1" dirty="0">
+              <a:rPr lang="en-US" sz="1150" b="1" dirty="0">
                 <a:solidFill>
                   <a:srgbClr val="262B3A"/>
                 </a:solidFill>
@@ -45915,7 +46068,7 @@
               <a:t>Axon terminals</a:t>
             </a:r>
             <a:r>
-              <a:rPr lang="en-US" sz="1050" dirty="0">
+              <a:rPr lang="en-US" sz="1150" dirty="0">
                 <a:solidFill>
                   <a:srgbClr val="262B3A"/>
                 </a:solidFill>
@@ -45926,7 +46079,7 @@
               <a:t>: pass the impulse on, at a </a:t>
             </a:r>
             <a:r>
-              <a:rPr lang="en-US" sz="1050" b="1" dirty="0">
+              <a:rPr lang="en-US" sz="1150" b="1" dirty="0">
                 <a:solidFill>
                   <a:srgbClr val="262B3A"/>
                 </a:solidFill>
@@ -45937,7 +46090,7 @@
               <a:t>synapse</a:t>
             </a:r>
             <a:r>
-              <a:rPr lang="en-US" sz="1050" dirty="0">
+              <a:rPr lang="en-US" sz="1150" dirty="0">
                 <a:solidFill>
                   <a:srgbClr val="262B3A"/>
                 </a:solidFill>
@@ -45947,13 +46100,13 @@
               </a:rPr>
               <a:t>.</a:t>
             </a:r>
-            <a:endParaRPr lang="en-US" sz="1050" dirty="0"/>
+            <a:endParaRPr lang="en-US" sz="1150" dirty="0"/>
           </a:p>
         </p:txBody>
       </p:sp>
       <p:sp>
         <p:nvSpPr>
-          <p:cNvPr id="96" name="Shape 94"/>
+          <p:cNvPr id="95" name="Shape 93"/>
           <p:cNvSpPr/>
           <p:nvPr/>
         </p:nvSpPr>
@@ -45980,7 +46133,7 @@
       </p:sp>
       <p:sp>
         <p:nvSpPr>
-          <p:cNvPr id="97" name="Text 95"/>
+          <p:cNvPr id="96" name="Text 94"/>
           <p:cNvSpPr/>
           <p:nvPr/>
         </p:nvSpPr>
@@ -46019,7 +46172,7 @@
       </p:sp>
       <p:sp>
         <p:nvSpPr>
-          <p:cNvPr id="98" name="Text 96"/>
+          <p:cNvPr id="97" name="Text 95"/>
           <p:cNvSpPr/>
           <p:nvPr/>
         </p:nvSpPr>
@@ -46151,7 +46304,7 @@
       </p:sp>
       <p:sp>
         <p:nvSpPr>
-          <p:cNvPr id="99" name="Shape 97"/>
+          <p:cNvPr id="98" name="Shape 96"/>
           <p:cNvSpPr/>
           <p:nvPr/>
         </p:nvSpPr>
@@ -46176,7 +46329,7 @@
       </p:sp>
       <p:sp>
         <p:nvSpPr>
-          <p:cNvPr id="100" name="Shape 98"/>
+          <p:cNvPr id="99" name="Shape 97"/>
           <p:cNvSpPr/>
           <p:nvPr/>
         </p:nvSpPr>
@@ -46201,7 +46354,7 @@
       </p:sp>
       <p:sp>
         <p:nvSpPr>
-          <p:cNvPr id="101" name="Text 99"/>
+          <p:cNvPr id="100" name="Text 98"/>
           <p:cNvSpPr/>
           <p:nvPr/>
         </p:nvSpPr>
@@ -47376,7 +47529,7 @@
         </p:nvSpPr>
         <p:spPr>
           <a:xfrm>
-            <a:off x="3246120" y="1298448"/>
+            <a:off x="3291840" y="1325880"/>
             <a:ext cx="1188720" cy="256032"/>
           </a:xfrm>
           <a:prstGeom prst="rect">
@@ -47570,8 +47723,8 @@
         </p:nvSpPr>
         <p:spPr>
           <a:xfrm flipV="1">
-            <a:off x="2468880" y="3008376"/>
-            <a:ext cx="411785" cy="237744"/>
+            <a:off x="2743200" y="3103474"/>
+            <a:ext cx="247071" cy="142646"/>
           </a:xfrm>
           <a:prstGeom prst="line">
             <a:avLst/>
@@ -47593,8 +47746,8 @@
         </p:nvSpPr>
         <p:spPr>
           <a:xfrm flipV="1">
-            <a:off x="2880665" y="2872272"/>
-            <a:ext cx="92555" cy="136104"/>
+            <a:off x="2990271" y="3021811"/>
+            <a:ext cx="55533" cy="81662"/>
           </a:xfrm>
           <a:prstGeom prst="line">
             <a:avLst/>
@@ -47616,8 +47769,8 @@
         </p:nvSpPr>
         <p:spPr>
           <a:xfrm flipV="1">
-            <a:off x="2880665" y="2996273"/>
-            <a:ext cx="164146" cy="12103"/>
+            <a:off x="2990271" y="3096212"/>
+            <a:ext cx="98488" cy="7262"/>
           </a:xfrm>
           <a:prstGeom prst="line">
             <a:avLst/>
@@ -47639,8 +47792,8 @@
         </p:nvSpPr>
         <p:spPr>
           <a:xfrm flipV="1">
-            <a:off x="2468880" y="2777856"/>
-            <a:ext cx="82568" cy="468264"/>
+            <a:off x="2743200" y="2965161"/>
+            <a:ext cx="49541" cy="280959"/>
           </a:xfrm>
           <a:prstGeom prst="line">
             <a:avLst/>
@@ -47662,8 +47815,8 @@
         </p:nvSpPr>
         <p:spPr>
           <a:xfrm flipH="1" flipV="1">
-            <a:off x="2506679" y="2619469"/>
-            <a:ext cx="44768" cy="158387"/>
+            <a:off x="2765880" y="2870129"/>
+            <a:ext cx="26861" cy="95032"/>
           </a:xfrm>
           <a:prstGeom prst="line">
             <a:avLst/>
@@ -47685,8 +47838,8 @@
         </p:nvSpPr>
         <p:spPr>
           <a:xfrm flipV="1">
-            <a:off x="2551448" y="2644333"/>
-            <a:ext cx="96240" cy="133523"/>
+            <a:off x="2792741" y="2885048"/>
+            <a:ext cx="57744" cy="80114"/>
           </a:xfrm>
           <a:prstGeom prst="line">
             <a:avLst/>
@@ -47708,8 +47861,8 @@
         </p:nvSpPr>
         <p:spPr>
           <a:xfrm flipH="1" flipV="1">
-            <a:off x="2163242" y="2881875"/>
-            <a:ext cx="305638" cy="364245"/>
+            <a:off x="2559817" y="3027573"/>
+            <a:ext cx="183383" cy="218547"/>
           </a:xfrm>
           <a:prstGeom prst="line">
             <a:avLst/>
@@ -47731,8 +47884,8 @@
         </p:nvSpPr>
         <p:spPr>
           <a:xfrm flipH="1" flipV="1">
-            <a:off x="2013134" y="2814361"/>
-            <a:ext cx="150108" cy="67514"/>
+            <a:off x="2469753" y="2987064"/>
+            <a:ext cx="90065" cy="40509"/>
           </a:xfrm>
           <a:prstGeom prst="line">
             <a:avLst/>
@@ -47754,8 +47907,8 @@
         </p:nvSpPr>
         <p:spPr>
           <a:xfrm flipH="1" flipV="1">
-            <a:off x="2122820" y="2722324"/>
-            <a:ext cx="40423" cy="159551"/>
+            <a:off x="2535564" y="2931842"/>
+            <a:ext cx="24254" cy="95731"/>
           </a:xfrm>
           <a:prstGeom prst="line">
             <a:avLst/>
@@ -47777,8 +47930,8 @@
         </p:nvSpPr>
         <p:spPr>
           <a:xfrm flipH="1">
-            <a:off x="1993392" y="3246120"/>
-            <a:ext cx="475488" cy="91"/>
+            <a:off x="2457907" y="3246120"/>
+            <a:ext cx="285293" cy="91"/>
           </a:xfrm>
           <a:prstGeom prst="line">
             <a:avLst/>
@@ -47800,8 +47953,8 @@
         </p:nvSpPr>
         <p:spPr>
           <a:xfrm flipH="1">
-            <a:off x="1845186" y="3246120"/>
-            <a:ext cx="148206" cy="71592"/>
+            <a:off x="2368983" y="3246120"/>
+            <a:ext cx="88924" cy="42955"/>
           </a:xfrm>
           <a:prstGeom prst="line">
             <a:avLst/>
@@ -47823,8 +47976,8 @@
         </p:nvSpPr>
         <p:spPr>
           <a:xfrm flipH="1" flipV="1">
-            <a:off x="1845186" y="3174528"/>
-            <a:ext cx="148206" cy="71592"/>
+            <a:off x="2368983" y="3203165"/>
+            <a:ext cx="88924" cy="42955"/>
           </a:xfrm>
           <a:prstGeom prst="line">
             <a:avLst/>
@@ -47846,8 +47999,8 @@
         </p:nvSpPr>
         <p:spPr>
           <a:xfrm flipH="1">
-            <a:off x="2163242" y="3246120"/>
-            <a:ext cx="305638" cy="364245"/>
+            <a:off x="2559817" y="3246120"/>
+            <a:ext cx="183383" cy="218547"/>
           </a:xfrm>
           <a:prstGeom prst="line">
             <a:avLst/>
@@ -47869,8 +48022,8 @@
         </p:nvSpPr>
         <p:spPr>
           <a:xfrm flipH="1">
-            <a:off x="2122820" y="3610365"/>
-            <a:ext cx="40423" cy="159551"/>
+            <a:off x="2535564" y="3464667"/>
+            <a:ext cx="24254" cy="95731"/>
           </a:xfrm>
           <a:prstGeom prst="line">
             <a:avLst/>
@@ -47892,8 +48045,8 @@
         </p:nvSpPr>
         <p:spPr>
           <a:xfrm flipH="1">
-            <a:off x="2013134" y="3610365"/>
-            <a:ext cx="150108" cy="67514"/>
+            <a:off x="2469753" y="3464667"/>
+            <a:ext cx="90065" cy="40509"/>
           </a:xfrm>
           <a:prstGeom prst="line">
             <a:avLst/>
@@ -47915,8 +48068,8 @@
         </p:nvSpPr>
         <p:spPr>
           <a:xfrm>
-            <a:off x="2468880" y="3246120"/>
-            <a:ext cx="82568" cy="468264"/>
+            <a:off x="2743200" y="3246120"/>
+            <a:ext cx="49541" cy="280959"/>
           </a:xfrm>
           <a:prstGeom prst="line">
             <a:avLst/>
@@ -47938,8 +48091,8 @@
         </p:nvSpPr>
         <p:spPr>
           <a:xfrm>
-            <a:off x="2551448" y="3714384"/>
-            <a:ext cx="96240" cy="133523"/>
+            <a:off x="2792741" y="3527079"/>
+            <a:ext cx="57744" cy="80114"/>
           </a:xfrm>
           <a:prstGeom prst="line">
             <a:avLst/>
@@ -47961,8 +48114,8 @@
         </p:nvSpPr>
         <p:spPr>
           <a:xfrm flipH="1">
-            <a:off x="2506679" y="3714384"/>
-            <a:ext cx="44768" cy="158387"/>
+            <a:off x="2765880" y="3527079"/>
+            <a:ext cx="26861" cy="95032"/>
           </a:xfrm>
           <a:prstGeom prst="line">
             <a:avLst/>
@@ -47984,8 +48137,8 @@
         </p:nvSpPr>
         <p:spPr>
           <a:xfrm>
-            <a:off x="2468880" y="3246120"/>
-            <a:ext cx="411785" cy="237744"/>
+            <a:off x="2743200" y="3246120"/>
+            <a:ext cx="247071" cy="142646"/>
           </a:xfrm>
           <a:prstGeom prst="line">
             <a:avLst/>
@@ -48007,8 +48160,8 @@
         </p:nvSpPr>
         <p:spPr>
           <a:xfrm>
-            <a:off x="2880665" y="3483864"/>
-            <a:ext cx="164146" cy="12103"/>
+            <a:off x="2990271" y="3388766"/>
+            <a:ext cx="98488" cy="7262"/>
           </a:xfrm>
           <a:prstGeom prst="line">
             <a:avLst/>
@@ -48030,8 +48183,8 @@
         </p:nvSpPr>
         <p:spPr>
           <a:xfrm>
-            <a:off x="2880665" y="3483864"/>
-            <a:ext cx="92555" cy="136104"/>
+            <a:off x="2990271" y="3388766"/>
+            <a:ext cx="55533" cy="81662"/>
           </a:xfrm>
           <a:prstGeom prst="line">
             <a:avLst/>
@@ -48053,8 +48206,8 @@
         </p:nvSpPr>
         <p:spPr>
           <a:xfrm>
-            <a:off x="2286000" y="3063240"/>
-            <a:ext cx="365760" cy="365760"/>
+            <a:off x="2633472" y="3136392"/>
+            <a:ext cx="219456" cy="219456"/>
           </a:xfrm>
           <a:prstGeom prst="ellipse">
             <a:avLst/>
@@ -48078,8 +48231,8 @@
         </p:nvSpPr>
         <p:spPr>
           <a:xfrm>
-            <a:off x="2392070" y="3169310"/>
-            <a:ext cx="153619" cy="153619"/>
+            <a:off x="2697114" y="3200034"/>
+            <a:ext cx="92172" cy="92172"/>
           </a:xfrm>
           <a:prstGeom prst="ellipse">
             <a:avLst/>
@@ -48103,8 +48256,8 @@
         </p:nvSpPr>
         <p:spPr>
           <a:xfrm>
-            <a:off x="2651760" y="3246120"/>
-            <a:ext cx="1371600" cy="91"/>
+            <a:off x="2852928" y="3246120"/>
+            <a:ext cx="1170432" cy="91"/>
           </a:xfrm>
           <a:prstGeom prst="line">
             <a:avLst/>
@@ -48342,47 +48495,8 @@
         </p:nvSpPr>
         <p:spPr>
           <a:xfrm>
-            <a:off x="685800" y="3108960"/>
-            <a:ext cx="1280160" cy="411480"/>
-          </a:xfrm>
-          <a:prstGeom prst="rect">
-            <a:avLst/>
-          </a:prstGeom>
-          <a:noFill/>
-          <a:ln/>
-        </p:spPr>
-        <p:txBody>
-          <a:bodyPr wrap="square" lIns="0" tIns="0" rIns="0" bIns="0" rtlCol="0" anchor="t"/>
-          <a:lstStyle/>
-          <a:p>
-            <a:pPr algn="ctr" indent="0" marL="0">
-              <a:buNone/>
-            </a:pPr>
-            <a:r>
-              <a:rPr lang="en-US" sz="1000" dirty="0">
-                <a:solidFill>
-                  <a:srgbClr val="262B3A"/>
-                </a:solidFill>
-                <a:latin typeface="Calibri" pitchFamily="34" charset="0"/>
-                <a:ea typeface="Calibri" pitchFamily="34" charset="-122"/>
-                <a:cs typeface="Calibri" pitchFamily="34" charset="-120"/>
-              </a:rPr>
-              <a:t>many short dendrites</a:t>
-            </a:r>
-            <a:endParaRPr lang="en-US" sz="1000" dirty="0"/>
-          </a:p>
-        </p:txBody>
-      </p:sp>
-      <p:sp>
-        <p:nvSpPr>
-          <p:cNvPr id="77" name="Text 75"/>
-          <p:cNvSpPr/>
-          <p:nvPr/>
-        </p:nvSpPr>
-        <p:spPr>
-          <a:xfrm>
-            <a:off x="548640" y="3886200"/>
-            <a:ext cx="4114800" cy="256032"/>
+            <a:off x="685800" y="3136392"/>
+            <a:ext cx="1600200" cy="256032"/>
           </a:xfrm>
           <a:prstGeom prst="rect">
             <a:avLst/>
@@ -48394,6 +48508,45 @@
           <a:bodyPr wrap="square" lIns="0" tIns="0" rIns="0" bIns="0" rtlCol="0" anchor="ctr"/>
           <a:lstStyle/>
           <a:p>
+            <a:pPr algn="r" indent="0" marL="0">
+              <a:buNone/>
+            </a:pPr>
+            <a:r>
+              <a:rPr lang="en-US" sz="1000" dirty="0">
+                <a:solidFill>
+                  <a:srgbClr val="262B3A"/>
+                </a:solidFill>
+                <a:latin typeface="Calibri" pitchFamily="34" charset="0"/>
+                <a:ea typeface="Calibri" pitchFamily="34" charset="-122"/>
+                <a:cs typeface="Calibri" pitchFamily="34" charset="-120"/>
+              </a:rPr>
+              <a:t>many short dendrites</a:t>
+            </a:r>
+            <a:endParaRPr lang="en-US" sz="1000" dirty="0"/>
+          </a:p>
+        </p:txBody>
+      </p:sp>
+      <p:sp>
+        <p:nvSpPr>
+          <p:cNvPr id="77" name="Text 75"/>
+          <p:cNvSpPr/>
+          <p:nvPr/>
+        </p:nvSpPr>
+        <p:spPr>
+          <a:xfrm>
+            <a:off x="548640" y="3886200"/>
+            <a:ext cx="4114800" cy="256032"/>
+          </a:xfrm>
+          <a:prstGeom prst="rect">
+            <a:avLst/>
+          </a:prstGeom>
+          <a:noFill/>
+          <a:ln/>
+        </p:spPr>
+        <p:txBody>
+          <a:bodyPr wrap="square" lIns="0" tIns="0" rIns="0" bIns="0" rtlCol="0" anchor="ctr"/>
+          <a:lstStyle/>
+          <a:p>
             <a:pPr algn="l" indent="0" marL="0">
               <a:buNone/>
             </a:pPr>
@@ -48431,8 +48584,8 @@
         </p:nvSpPr>
         <p:spPr>
           <a:xfrm flipV="1">
-            <a:off x="1097280" y="4056909"/>
-            <a:ext cx="90824" cy="515091"/>
+            <a:off x="1188720" y="4311135"/>
+            <a:ext cx="70182" cy="398025"/>
           </a:xfrm>
           <a:prstGeom prst="line">
             <a:avLst/>
@@ -48454,8 +48607,8 @@
         </p:nvSpPr>
         <p:spPr>
           <a:xfrm flipH="1" flipV="1">
-            <a:off x="1138859" y="3882684"/>
-            <a:ext cx="49245" cy="174225"/>
+            <a:off x="1220849" y="4176507"/>
+            <a:ext cx="38053" cy="134629"/>
           </a:xfrm>
           <a:prstGeom prst="line">
             <a:avLst/>
@@ -48477,8 +48630,8 @@
         </p:nvSpPr>
         <p:spPr>
           <a:xfrm flipV="1">
-            <a:off x="1188104" y="3910034"/>
-            <a:ext cx="105864" cy="146875"/>
+            <a:off x="1258902" y="4197641"/>
+            <a:ext cx="81804" cy="113495"/>
           </a:xfrm>
           <a:prstGeom prst="line">
             <a:avLst/>
@@ -48500,8 +48653,8 @@
         </p:nvSpPr>
         <p:spPr>
           <a:xfrm flipH="1" flipV="1">
-            <a:off x="835762" y="4119037"/>
-            <a:ext cx="261518" cy="452963"/>
+            <a:off x="986638" y="4359143"/>
+            <a:ext cx="202082" cy="350017"/>
           </a:xfrm>
           <a:prstGeom prst="line">
             <a:avLst/>
@@ -48523,8 +48676,8 @@
         </p:nvSpPr>
         <p:spPr>
           <a:xfrm flipH="1" flipV="1">
-            <a:off x="686048" y="4017227"/>
-            <a:ext cx="149714" cy="101810"/>
+            <a:off x="870950" y="4280472"/>
+            <a:ext cx="115688" cy="78671"/>
           </a:xfrm>
           <a:prstGeom prst="line">
             <a:avLst/>
@@ -48546,8 +48699,8 @@
         </p:nvSpPr>
         <p:spPr>
           <a:xfrm flipH="1" flipV="1">
-            <a:off x="822448" y="3938476"/>
-            <a:ext cx="13313" cy="180561"/>
+            <a:off x="976350" y="4219619"/>
+            <a:ext cx="10287" cy="139524"/>
           </a:xfrm>
           <a:prstGeom prst="line">
             <a:avLst/>
@@ -48569,8 +48722,8 @@
         </p:nvSpPr>
         <p:spPr>
           <a:xfrm flipH="1" flipV="1">
-            <a:off x="605786" y="4393111"/>
-            <a:ext cx="491494" cy="178889"/>
+            <a:off x="808929" y="4570927"/>
+            <a:ext cx="379791" cy="138233"/>
           </a:xfrm>
           <a:prstGeom prst="line">
             <a:avLst/>
@@ -48592,8 +48745,8 @@
         </p:nvSpPr>
         <p:spPr>
           <a:xfrm flipH="1">
-            <a:off x="425656" y="4393111"/>
-            <a:ext cx="180130" cy="18243"/>
+            <a:off x="669738" y="4570927"/>
+            <a:ext cx="139191" cy="14097"/>
           </a:xfrm>
           <a:prstGeom prst="line">
             <a:avLst/>
@@ -48615,8 +48768,8 @@
         </p:nvSpPr>
         <p:spPr>
           <a:xfrm flipH="1" flipV="1">
-            <a:off x="479525" y="4263351"/>
-            <a:ext cx="126261" cy="129760"/>
+            <a:off x="711364" y="4470658"/>
+            <a:ext cx="97565" cy="100269"/>
           </a:xfrm>
           <a:prstGeom prst="line">
             <a:avLst/>
@@ -48638,8 +48791,8 @@
         </p:nvSpPr>
         <p:spPr>
           <a:xfrm flipH="1">
-            <a:off x="605786" y="4572000"/>
-            <a:ext cx="491494" cy="178889"/>
+            <a:off x="808929" y="4709160"/>
+            <a:ext cx="379791" cy="138233"/>
           </a:xfrm>
           <a:prstGeom prst="line">
             <a:avLst/>
@@ -48661,8 +48814,8 @@
         </p:nvSpPr>
         <p:spPr>
           <a:xfrm flipH="1">
-            <a:off x="479525" y="4750889"/>
-            <a:ext cx="126261" cy="129760"/>
+            <a:off x="711364" y="4847393"/>
+            <a:ext cx="97565" cy="100269"/>
           </a:xfrm>
           <a:prstGeom prst="line">
             <a:avLst/>
@@ -48684,8 +48837,8 @@
         </p:nvSpPr>
         <p:spPr>
           <a:xfrm flipH="1" flipV="1">
-            <a:off x="425656" y="4732646"/>
-            <a:ext cx="180130" cy="18243"/>
+            <a:off x="669738" y="4833295"/>
+            <a:ext cx="139191" cy="14097"/>
           </a:xfrm>
           <a:prstGeom prst="line">
             <a:avLst/>
@@ -48707,8 +48860,8 @@
         </p:nvSpPr>
         <p:spPr>
           <a:xfrm flipH="1">
-            <a:off x="835762" y="4572000"/>
-            <a:ext cx="261518" cy="452963"/>
+            <a:off x="986638" y="4709160"/>
+            <a:ext cx="202082" cy="350017"/>
           </a:xfrm>
           <a:prstGeom prst="line">
             <a:avLst/>
@@ -48730,8 +48883,8 @@
         </p:nvSpPr>
         <p:spPr>
           <a:xfrm flipH="1">
-            <a:off x="822448" y="5024963"/>
-            <a:ext cx="13313" cy="180561"/>
+            <a:off x="976350" y="5059177"/>
+            <a:ext cx="10287" cy="139524"/>
           </a:xfrm>
           <a:prstGeom prst="line">
             <a:avLst/>
@@ -48753,8 +48906,8 @@
         </p:nvSpPr>
         <p:spPr>
           <a:xfrm flipH="1">
-            <a:off x="686048" y="5024963"/>
-            <a:ext cx="149714" cy="101810"/>
+            <a:off x="870950" y="5059177"/>
+            <a:ext cx="115688" cy="78671"/>
           </a:xfrm>
           <a:prstGeom prst="line">
             <a:avLst/>
@@ -48776,8 +48929,8 @@
         </p:nvSpPr>
         <p:spPr>
           <a:xfrm>
-            <a:off x="1097280" y="4572000"/>
-            <a:ext cx="90824" cy="515091"/>
+            <a:off x="1188720" y="4709160"/>
+            <a:ext cx="70182" cy="398025"/>
           </a:xfrm>
           <a:prstGeom prst="line">
             <a:avLst/>
@@ -48799,8 +48952,8 @@
         </p:nvSpPr>
         <p:spPr>
           <a:xfrm>
-            <a:off x="1188104" y="5087091"/>
-            <a:ext cx="105864" cy="146875"/>
+            <a:off x="1258902" y="5107185"/>
+            <a:ext cx="81804" cy="113495"/>
           </a:xfrm>
           <a:prstGeom prst="line">
             <a:avLst/>
@@ -48822,8 +48975,8 @@
         </p:nvSpPr>
         <p:spPr>
           <a:xfrm flipH="1">
-            <a:off x="1138859" y="5087091"/>
-            <a:ext cx="49245" cy="174225"/>
+            <a:off x="1220849" y="5107185"/>
+            <a:ext cx="38053" cy="134629"/>
           </a:xfrm>
           <a:prstGeom prst="line">
             <a:avLst/>
@@ -48845,8 +48998,8 @@
         </p:nvSpPr>
         <p:spPr>
           <a:xfrm>
-            <a:off x="896112" y="4370832"/>
-            <a:ext cx="402336" cy="402336"/>
+            <a:off x="1033272" y="4553712"/>
+            <a:ext cx="310896" cy="310896"/>
           </a:xfrm>
           <a:prstGeom prst="ellipse">
             <a:avLst/>
@@ -48870,8 +49023,8 @@
         </p:nvSpPr>
         <p:spPr>
           <a:xfrm>
-            <a:off x="1012789" y="4487509"/>
-            <a:ext cx="168981" cy="168981"/>
+            <a:off x="1123432" y="4643872"/>
+            <a:ext cx="130576" cy="130576"/>
           </a:xfrm>
           <a:prstGeom prst="ellipse">
             <a:avLst/>
@@ -48895,8 +49048,8 @@
         </p:nvSpPr>
         <p:spPr>
           <a:xfrm>
-            <a:off x="1298448" y="4572000"/>
-            <a:ext cx="3730752" cy="91"/>
+            <a:off x="1344168" y="4709160"/>
+            <a:ext cx="3685032" cy="91"/>
           </a:xfrm>
           <a:prstGeom prst="line">
             <a:avLst/>
@@ -48918,7 +49071,7 @@
         </p:nvSpPr>
         <p:spPr>
           <a:xfrm>
-            <a:off x="1481328" y="4480560"/>
+            <a:off x="1527048" y="4617720"/>
             <a:ext cx="384048" cy="182880"/>
           </a:xfrm>
           <a:prstGeom prst="roundRect">
@@ -48945,7 +49098,7 @@
         </p:nvSpPr>
         <p:spPr>
           <a:xfrm>
-            <a:off x="1938528" y="4480560"/>
+            <a:off x="1984248" y="4617720"/>
             <a:ext cx="384048" cy="182880"/>
           </a:xfrm>
           <a:prstGeom prst="roundRect">
@@ -48972,7 +49125,7 @@
         </p:nvSpPr>
         <p:spPr>
           <a:xfrm>
-            <a:off x="2395728" y="4480560"/>
+            <a:off x="2441448" y="4617720"/>
             <a:ext cx="384048" cy="182880"/>
           </a:xfrm>
           <a:prstGeom prst="roundRect">
@@ -48999,7 +49152,7 @@
         </p:nvSpPr>
         <p:spPr>
           <a:xfrm>
-            <a:off x="2852928" y="4480560"/>
+            <a:off x="2898648" y="4617720"/>
             <a:ext cx="384048" cy="182880"/>
           </a:xfrm>
           <a:prstGeom prst="roundRect">
@@ -49026,7 +49179,7 @@
         </p:nvSpPr>
         <p:spPr>
           <a:xfrm>
-            <a:off x="3310128" y="4480560"/>
+            <a:off x="3355848" y="4617720"/>
             <a:ext cx="384048" cy="182880"/>
           </a:xfrm>
           <a:prstGeom prst="roundRect">
@@ -49053,7 +49206,7 @@
         </p:nvSpPr>
         <p:spPr>
           <a:xfrm>
-            <a:off x="3767328" y="4480560"/>
+            <a:off x="3813048" y="4617720"/>
             <a:ext cx="384048" cy="182880"/>
           </a:xfrm>
           <a:prstGeom prst="roundRect">
@@ -49080,7 +49233,7 @@
         </p:nvSpPr>
         <p:spPr>
           <a:xfrm>
-            <a:off x="4224528" y="4480560"/>
+            <a:off x="4270248" y="4617720"/>
             <a:ext cx="384048" cy="182880"/>
           </a:xfrm>
           <a:prstGeom prst="roundRect">
@@ -49107,7 +49260,7 @@
         </p:nvSpPr>
         <p:spPr>
           <a:xfrm flipV="1">
-            <a:off x="5029200" y="4407408"/>
+            <a:off x="5029200" y="4544568"/>
             <a:ext cx="246888" cy="164592"/>
           </a:xfrm>
           <a:prstGeom prst="line">
@@ -49130,7 +49283,7 @@
         </p:nvSpPr>
         <p:spPr>
           <a:xfrm>
-            <a:off x="5251399" y="4382719"/>
+            <a:off x="5251399" y="4519879"/>
             <a:ext cx="49378" cy="49378"/>
           </a:xfrm>
           <a:prstGeom prst="ellipse">
@@ -49155,7 +49308,7 @@
         </p:nvSpPr>
         <p:spPr>
           <a:xfrm flipV="1">
-            <a:off x="5029200" y="4517136"/>
+            <a:off x="5029200" y="4654296"/>
             <a:ext cx="274320" cy="54864"/>
           </a:xfrm>
           <a:prstGeom prst="line">
@@ -49178,7 +49331,7 @@
         </p:nvSpPr>
         <p:spPr>
           <a:xfrm>
-            <a:off x="5278831" y="4492447"/>
+            <a:off x="5278831" y="4629607"/>
             <a:ext cx="49378" cy="49378"/>
           </a:xfrm>
           <a:prstGeom prst="ellipse">
@@ -49203,7 +49356,7 @@
         </p:nvSpPr>
         <p:spPr>
           <a:xfrm>
-            <a:off x="5029200" y="4572000"/>
+            <a:off x="5029200" y="4709160"/>
             <a:ext cx="274320" cy="54864"/>
           </a:xfrm>
           <a:prstGeom prst="line">
@@ -49226,7 +49379,7 @@
         </p:nvSpPr>
         <p:spPr>
           <a:xfrm>
-            <a:off x="5278831" y="4602175"/>
+            <a:off x="5278831" y="4739335"/>
             <a:ext cx="49378" cy="49378"/>
           </a:xfrm>
           <a:prstGeom prst="ellipse">
@@ -49251,7 +49404,7 @@
         </p:nvSpPr>
         <p:spPr>
           <a:xfrm>
-            <a:off x="5029200" y="4572000"/>
+            <a:off x="5029200" y="4709160"/>
             <a:ext cx="246888" cy="164592"/>
           </a:xfrm>
           <a:prstGeom prst="line">
@@ -49274,7 +49427,7 @@
         </p:nvSpPr>
         <p:spPr>
           <a:xfrm>
-            <a:off x="5251399" y="4711903"/>
+            <a:off x="5251399" y="4849063"/>
             <a:ext cx="49378" cy="49378"/>
           </a:xfrm>
           <a:prstGeom prst="ellipse">
@@ -49299,7 +49452,7 @@
         </p:nvSpPr>
         <p:spPr>
           <a:xfrm>
-            <a:off x="5440680" y="4206240"/>
+            <a:off x="5440680" y="4343400"/>
             <a:ext cx="457200" cy="731520"/>
           </a:xfrm>
           <a:prstGeom prst="roundRect">
@@ -49326,7 +49479,7 @@
         </p:nvSpPr>
         <p:spPr>
           <a:xfrm>
-            <a:off x="5486400" y="4328160"/>
+            <a:off x="5486400" y="4465320"/>
             <a:ext cx="365760" cy="91"/>
           </a:xfrm>
           <a:prstGeom prst="line">
@@ -49349,7 +49502,7 @@
         </p:nvSpPr>
         <p:spPr>
           <a:xfrm>
-            <a:off x="5486400" y="4450080"/>
+            <a:off x="5486400" y="4587240"/>
             <a:ext cx="365760" cy="91"/>
           </a:xfrm>
           <a:prstGeom prst="line">
@@ -49372,7 +49525,7 @@
         </p:nvSpPr>
         <p:spPr>
           <a:xfrm>
-            <a:off x="5486400" y="4572000"/>
+            <a:off x="5486400" y="4709160"/>
             <a:ext cx="365760" cy="91"/>
           </a:xfrm>
           <a:prstGeom prst="line">
@@ -49395,7 +49548,7 @@
         </p:nvSpPr>
         <p:spPr>
           <a:xfrm>
-            <a:off x="5486400" y="4693920"/>
+            <a:off x="5486400" y="4831080"/>
             <a:ext cx="365760" cy="91"/>
           </a:xfrm>
           <a:prstGeom prst="line">
@@ -49418,7 +49571,7 @@
         </p:nvSpPr>
         <p:spPr>
           <a:xfrm>
-            <a:off x="5486400" y="4815840"/>
+            <a:off x="5486400" y="4953000"/>
             <a:ext cx="365760" cy="91"/>
           </a:xfrm>
           <a:prstGeom prst="line">
@@ -49441,7 +49594,7 @@
         </p:nvSpPr>
         <p:spPr>
           <a:xfrm>
-            <a:off x="2011680" y="4846320"/>
+            <a:off x="2011680" y="4983480"/>
             <a:ext cx="640080" cy="91"/>
           </a:xfrm>
           <a:prstGeom prst="line">
@@ -49465,7 +49618,7 @@
         </p:nvSpPr>
         <p:spPr>
           <a:xfrm>
-            <a:off x="3566160" y="4846320"/>
+            <a:off x="3566160" y="4983480"/>
             <a:ext cx="640080" cy="91"/>
           </a:xfrm>
           <a:prstGeom prst="line">
@@ -49489,7 +49642,7 @@
         </p:nvSpPr>
         <p:spPr>
           <a:xfrm>
-            <a:off x="5257800" y="4956048"/>
+            <a:off x="5257800" y="5093208"/>
             <a:ext cx="822960" cy="256032"/>
           </a:xfrm>
           <a:prstGeom prst="rect">
